--- a/docs/Sijil-Presentation.pptx
+++ b/docs/Sijil-Presentation.pptx
@@ -3352,7 +3352,7 @@
                 </a:solidFill>
                 <a:latin typeface="Calibri"/>
               </a:rPr>
-              <a:t>Version 3.14 · Octobre 2026 · Captures : entreprise fictive</a:t>
+              <a:t>Version 3.15 · Octobre 2026 · Captures : entreprise fictive</a:t>
             </a:r>
           </a:p>
         </p:txBody>

--- a/docs/Sijil-Presentation.pptx
+++ b/docs/Sijil-Presentation.pptx
@@ -3352,7 +3352,7 @@
                 </a:solidFill>
                 <a:latin typeface="Calibri"/>
               </a:rPr>
-              <a:t>Version 3.15 · Octobre 2026 · Captures : entreprise fictive</a:t>
+              <a:t>Version 3.16 · Octobre 2026 · Captures : entreprise fictive</a:t>
             </a:r>
           </a:p>
         </p:txBody>

--- a/docs/Sijil-Presentation.pptx
+++ b/docs/Sijil-Presentation.pptx
@@ -3352,7 +3352,7 @@
                 </a:solidFill>
                 <a:latin typeface="Calibri"/>
               </a:rPr>
-              <a:t>Version 3.16 · Octobre 2026 · Captures : entreprise fictive</a:t>
+              <a:t>Version 3.17 · Octobre 2026 · Captures : entreprise fictive</a:t>
             </a:r>
           </a:p>
         </p:txBody>

--- a/docs/Sijil-Presentation.pptx
+++ b/docs/Sijil-Presentation.pptx
@@ -3352,7 +3352,7 @@
                 </a:solidFill>
                 <a:latin typeface="Calibri"/>
               </a:rPr>
-              <a:t>Version 3.17 · Octobre 2026 · Captures : entreprise fictive</a:t>
+              <a:t>Version 3.18 · Octobre 2026 · Captures : entreprise fictive</a:t>
             </a:r>
           </a:p>
         </p:txBody>
@@ -5048,7 +5048,7 @@
                 </a:solidFill>
                 <a:latin typeface="Calibri"/>
               </a:rPr>
-              <a:t> — et e-mail au chef de groupe</a:t>
+              <a:t> — et e-mail au responsable d’équipe</a:t>
             </a:r>
           </a:p>
           <a:p>
@@ -5528,7 +5528,7 @@
                 </a:solidFill>
                 <a:latin typeface="Calibri"/>
               </a:rPr>
-              <a:t>Le chef de groupe est prévenu avec les dates et la date de reprise.</a:t>
+              <a:t>Le responsable d’équipe est prévenu avec les dates et la date de reprise.</a:t>
             </a:r>
           </a:p>
         </p:txBody>
@@ -5646,7 +5646,7 @@
                 </a:solidFill>
                 <a:latin typeface="Calibri"/>
               </a:rPr>
-              <a:t>Le chef de groupe voit la pastille et reçoit la remarque du client.</a:t>
+              <a:t>Le responsable d’équipe voit la pastille et reçoit la remarque du client.</a:t>
             </a:r>
           </a:p>
         </p:txBody>
@@ -9201,7 +9201,7 @@
                 </a:solidFill>
                 <a:latin typeface="Calibri"/>
               </a:rPr>
-              <a:t>Chaque agent écrit à son chef, qui relaie à la direction, sans suivi.</a:t>
+              <a:t>Chaque agent écrit à son responsable, qui relaie à la direction, sans suivi.</a:t>
             </a:r>
           </a:p>
         </p:txBody>
@@ -11105,7 +11105,7 @@
                 </a:solidFill>
                 <a:latin typeface="Calibri"/>
               </a:rPr>
-              <a:t>Le chef de groupe</a:t>
+              <a:t>Le responsable d’équipe</a:t>
             </a:r>
           </a:p>
         </p:txBody>

--- a/docs/Sijil-Presentation.pptx
+++ b/docs/Sijil-Presentation.pptx
@@ -3352,7 +3352,7 @@
                 </a:solidFill>
                 <a:latin typeface="Calibri"/>
               </a:rPr>
-              <a:t>Version 3.18 · Octobre 2026 · Captures : entreprise fictive</a:t>
+              <a:t>Version 3.19 · Octobre 2026 · Captures : entreprise fictive</a:t>
             </a:r>
           </a:p>
         </p:txBody>

--- a/docs/Sijil-Presentation.pptx
+++ b/docs/Sijil-Presentation.pptx
@@ -3352,7 +3352,7 @@
                 </a:solidFill>
                 <a:latin typeface="Calibri"/>
               </a:rPr>
-              <a:t>Version 3.19 · Octobre 2026 · Captures : entreprise fictive</a:t>
+              <a:t>Version 3.20 · Octobre 2026 · Captures : entreprise fictive</a:t>
             </a:r>
           </a:p>
         </p:txBody>

--- a/docs/Sijil-Presentation.pptx
+++ b/docs/Sijil-Presentation.pptx
@@ -3352,7 +3352,7 @@
                 </a:solidFill>
                 <a:latin typeface="Calibri"/>
               </a:rPr>
-              <a:t>Version 3.20 · Octobre 2026 · Captures : entreprise fictive</a:t>
+              <a:t>Version 3.21 · Octobre 2026 · Captures : entreprise fictive</a:t>
             </a:r>
           </a:p>
         </p:txBody>

--- a/docs/Sijil-Presentation.pptx
+++ b/docs/Sijil-Presentation.pptx
@@ -3352,7 +3352,7 @@
                 </a:solidFill>
                 <a:latin typeface="Calibri"/>
               </a:rPr>
-              <a:t>Version 3.21 · Octobre 2026 · Captures : entreprise fictive</a:t>
+              <a:t>Version 3.22 · Octobre 2026 · Captures : entreprise fictive</a:t>
             </a:r>
           </a:p>
         </p:txBody>

--- a/docs/Sijil-Presentation.pptx
+++ b/docs/Sijil-Presentation.pptx
@@ -3352,7 +3352,7 @@
                 </a:solidFill>
                 <a:latin typeface="Calibri"/>
               </a:rPr>
-              <a:t>Version 3.22 · Octobre 2026 · Captures : entreprise fictive</a:t>
+              <a:t>Version 3.23 · Octobre 2026 · Captures : entreprise fictive</a:t>
             </a:r>
           </a:p>
         </p:txBody>

--- a/docs/Sijil-Presentation.pptx
+++ b/docs/Sijil-Presentation.pptx
@@ -3352,7 +3352,7 @@
                 </a:solidFill>
                 <a:latin typeface="Calibri"/>
               </a:rPr>
-              <a:t>Version 3.23 · Octobre 2026 · Captures : entreprise fictive</a:t>
+              <a:t>Version 3.23.1 · Octobre 2026 · Captures : entreprise fictive</a:t>
             </a:r>
           </a:p>
         </p:txBody>

--- a/docs/Sijil-Presentation.pptx
+++ b/docs/Sijil-Presentation.pptx
@@ -3352,7 +3352,7 @@
                 </a:solidFill>
                 <a:latin typeface="Calibri"/>
               </a:rPr>
-              <a:t>Version 3.23.1 · Octobre 2026 · Captures : entreprise fictive</a:t>
+              <a:t>Version 3.24 · Octobre 2026 · Captures : entreprise fictive</a:t>
             </a:r>
           </a:p>
         </p:txBody>

--- a/docs/Sijil-Presentation.pptx
+++ b/docs/Sijil-Presentation.pptx
@@ -3352,7 +3352,7 @@
                 </a:solidFill>
                 <a:latin typeface="Calibri"/>
               </a:rPr>
-              <a:t>Version 3.24 · Octobre 2026 · Captures : entreprise fictive</a:t>
+              <a:t>Version 3.24.1 · Octobre 2026 · Captures : entreprise fictive</a:t>
             </a:r>
           </a:p>
         </p:txBody>

--- a/docs/Sijil-Presentation.pptx
+++ b/docs/Sijil-Presentation.pptx
@@ -3352,7 +3352,7 @@
                 </a:solidFill>
                 <a:latin typeface="Calibri"/>
               </a:rPr>
-              <a:t>Version 3.24.1 · Octobre 2026 · Captures : entreprise fictive</a:t>
+              <a:t>Version 3.24.2 · Octobre 2026 · Captures : entreprise fictive</a:t>
             </a:r>
           </a:p>
         </p:txBody>

--- a/docs/Sijil-Presentation.pptx
+++ b/docs/Sijil-Presentation.pptx
@@ -3352,7 +3352,7 @@
                 </a:solidFill>
                 <a:latin typeface="Calibri"/>
               </a:rPr>
-              <a:t>Version 3.24.2 · Octobre 2026 · Captures : entreprise fictive</a:t>
+              <a:t>Version 3.25 · Octobre 2026 · Captures : entreprise fictive</a:t>
             </a:r>
           </a:p>
         </p:txBody>

--- a/docs/Sijil-Presentation.pptx
+++ b/docs/Sijil-Presentation.pptx
@@ -3352,7 +3352,7 @@
                 </a:solidFill>
                 <a:latin typeface="Calibri"/>
               </a:rPr>
-              <a:t>Version 3.25 · Octobre 2026 · Captures : entreprise fictive</a:t>
+              <a:t>Version 3.25.1 · Octobre 2026 · Captures : entreprise fictive</a:t>
             </a:r>
           </a:p>
         </p:txBody>

--- a/docs/Sijil-Presentation.pptx
+++ b/docs/Sijil-Presentation.pptx
@@ -3352,7 +3352,7 @@
                 </a:solidFill>
                 <a:latin typeface="Calibri"/>
               </a:rPr>
-              <a:t>Version 3.25.1 · Octobre 2026 · Captures : entreprise fictive</a:t>
+              <a:t>Version 3.32.1 · Octobre 2026 · Captures : entreprise fictive</a:t>
             </a:r>
           </a:p>
         </p:txBody>
@@ -3562,7 +3562,7 @@
                 </a:solidFill>
                 <a:latin typeface="Calibri"/>
               </a:rPr>
-              <a:t>© 2026 Rayane M. — Tous droits réservés</a:t>
+              <a:t>© 2026 JawlaDev — Tous droits réservés</a:t>
             </a:r>
           </a:p>
         </p:txBody>
@@ -4012,7 +4012,7 @@
                 </a:solidFill>
                 <a:latin typeface="Calibri"/>
               </a:rPr>
-              <a:t>© 2026 Rayane M. — Tous droits réservés</a:t>
+              <a:t>© 2026 JawlaDev — Tous droits réservés</a:t>
             </a:r>
           </a:p>
         </p:txBody>
@@ -4410,7 +4410,7 @@
                 </a:solidFill>
                 <a:latin typeface="Calibri"/>
               </a:rPr>
-              <a:t>© 2026 Rayane M. — Tous droits réservés</a:t>
+              <a:t>© 2026 JawlaDev — Tous droits réservés</a:t>
             </a:r>
           </a:p>
         </p:txBody>
@@ -4842,7 +4842,7 @@
                 </a:solidFill>
                 <a:latin typeface="Calibri"/>
               </a:rPr>
-              <a:t>© 2026 Rayane M. — Tous droits réservés</a:t>
+              <a:t>© 2026 JawlaDev — Tous droits réservés</a:t>
             </a:r>
           </a:p>
         </p:txBody>
@@ -5292,7 +5292,7 @@
                 </a:solidFill>
                 <a:latin typeface="Calibri"/>
               </a:rPr>
-              <a:t>© 2026 Rayane M. — Tous droits réservés</a:t>
+              <a:t>© 2026 JawlaDev — Tous droits réservés</a:t>
             </a:r>
           </a:p>
         </p:txBody>
@@ -6092,7 +6092,7 @@
                 </a:solidFill>
                 <a:latin typeface="Calibri"/>
               </a:rPr>
-              <a:t>© 2026 Rayane M. — Tous droits réservés</a:t>
+              <a:t>© 2026 JawlaDev — Tous droits réservés</a:t>
             </a:r>
           </a:p>
         </p:txBody>
@@ -6407,7 +6407,7 @@
                 </a:solidFill>
                 <a:latin typeface="Calibri"/>
               </a:rPr>
-              <a:t>© 2026 Rayane M. — Tous droits réservés</a:t>
+              <a:t>© 2026 JawlaDev — Tous droits réservés</a:t>
             </a:r>
           </a:p>
         </p:txBody>
@@ -6907,7 +6907,7 @@
                 </a:solidFill>
                 <a:latin typeface="Calibri"/>
               </a:rPr>
-              <a:t>© 2026 Rayane M. — Tous droits réservés</a:t>
+              <a:t>© 2026 JawlaDev — Tous droits réservés</a:t>
             </a:r>
           </a:p>
         </p:txBody>
@@ -7786,7 +7786,7 @@
                 </a:solidFill>
                 <a:latin typeface="Calibri"/>
               </a:rPr>
-              <a:t>© 2026 Rayane M. — Tous droits réservés</a:t>
+              <a:t>© 2026 JawlaDev — Tous droits réservés</a:t>
             </a:r>
           </a:p>
         </p:txBody>
@@ -8401,7 +8401,7 @@
                 </a:solidFill>
                 <a:latin typeface="Calibri"/>
               </a:rPr>
-              <a:t>© 2026 Rayane M. — Tous droits réservés</a:t>
+              <a:t>© 2026 JawlaDev — Tous droits réservés</a:t>
             </a:r>
           </a:p>
         </p:txBody>
@@ -8611,7 +8611,7 @@
                 </a:solidFill>
                 <a:latin typeface="Calibri"/>
               </a:rPr>
-              <a:t>© 2026 Rayane M. — Tous droits réservés</a:t>
+              <a:t>© 2026 JawlaDev — Tous droits réservés</a:t>
             </a:r>
           </a:p>
         </p:txBody>
@@ -9529,7 +9529,7 @@
                 </a:solidFill>
                 <a:latin typeface="Calibri"/>
               </a:rPr>
-              <a:t>© 2026 Rayane M. — Tous droits réservés</a:t>
+              <a:t>© 2026 JawlaDev — Tous droits réservés</a:t>
             </a:r>
           </a:p>
         </p:txBody>
@@ -9927,7 +9927,7 @@
                 </a:solidFill>
                 <a:latin typeface="Calibri"/>
               </a:rPr>
-              <a:t>© 2026 Rayane M. — Tous droits réservés</a:t>
+              <a:t>© 2026 JawlaDev — Tous droits réservés</a:t>
             </a:r>
           </a:p>
         </p:txBody>
@@ -10868,7 +10868,7 @@
                 </a:solidFill>
                 <a:latin typeface="Calibri"/>
               </a:rPr>
-              <a:t>© 2026 Rayane M. — Tous droits réservés</a:t>
+              <a:t>© 2026 JawlaDev — Tous droits réservés</a:t>
             </a:r>
           </a:p>
         </p:txBody>
@@ -11694,7 +11694,7 @@
                 </a:solidFill>
                 <a:latin typeface="Calibri"/>
               </a:rPr>
-              <a:t>© 2026 Rayane M. — Tous droits réservés</a:t>
+              <a:t>© 2026 JawlaDev — Tous droits réservés</a:t>
             </a:r>
           </a:p>
         </p:txBody>
@@ -12092,7 +12092,7 @@
                 </a:solidFill>
                 <a:latin typeface="Calibri"/>
               </a:rPr>
-              <a:t>© 2026 Rayane M. — Tous droits réservés</a:t>
+              <a:t>© 2026 JawlaDev — Tous droits réservés</a:t>
             </a:r>
           </a:p>
         </p:txBody>
@@ -12490,7 +12490,7 @@
                 </a:solidFill>
                 <a:latin typeface="Calibri"/>
               </a:rPr>
-              <a:t>© 2026 Rayane M. — Tous droits réservés</a:t>
+              <a:t>© 2026 JawlaDev — Tous droits réservés</a:t>
             </a:r>
           </a:p>
         </p:txBody>
@@ -12888,7 +12888,7 @@
                 </a:solidFill>
                 <a:latin typeface="Calibri"/>
               </a:rPr>
-              <a:t>© 2026 Rayane M. — Tous droits réservés</a:t>
+              <a:t>© 2026 JawlaDev — Tous droits réservés</a:t>
             </a:r>
           </a:p>
         </p:txBody>

--- a/docs/Sijil-Presentation.pptx
+++ b/docs/Sijil-Presentation.pptx
@@ -3225,8 +3225,8 @@
         </p:nvSpPr>
         <p:spPr>
           <a:xfrm>
-            <a:off x="5120640" y="1737360"/>
-            <a:ext cx="6583680" cy="1280160"/>
+            <a:off x="5120640" y="1463040"/>
+            <a:ext cx="6583680" cy="1463040"/>
           </a:xfrm>
           <a:prstGeom prst="rect">
             <a:avLst/>
@@ -3260,8 +3260,8 @@
         </p:nvSpPr>
         <p:spPr>
           <a:xfrm>
-            <a:off x="5120640" y="3246120"/>
-            <a:ext cx="6400800" cy="1097280"/>
+            <a:off x="5120640" y="2743200"/>
+            <a:ext cx="6583680" cy="457200"/>
           </a:xfrm>
           <a:prstGeom prst="rect">
             <a:avLst/>
@@ -3276,13 +3276,13 @@
           <a:p>
             <a:pPr algn="l"/>
             <a:r>
-              <a:rPr sz="2000" b="0" i="0">
-                <a:solidFill>
-                  <a:srgbClr val="12263A"/>
-                </a:solidFill>
-                <a:latin typeface="Calibri"/>
-              </a:rPr>
-              <a:t>La mise à disposition et le personnel de prestation de services, de A à Z : du bordereau des prix jusqu'à l'attachement et à la facture.</a:t>
+              <a:rPr sz="2000" b="1" i="0">
+                <a:solidFill>
+                  <a:srgbClr val="2FB5B4"/>
+                </a:solidFill>
+                <a:latin typeface="Calibri"/>
+              </a:rPr>
+              <a:t>avec prise en charge des rotations</a:t>
             </a:r>
           </a:p>
         </p:txBody>
@@ -3295,8 +3295,8 @@
         </p:nvSpPr>
         <p:spPr>
           <a:xfrm>
-            <a:off x="5120640" y="4937760"/>
-            <a:ext cx="6400800" cy="457200"/>
+            <a:off x="5120640" y="3383280"/>
+            <a:ext cx="6400800" cy="1280160"/>
           </a:xfrm>
           <a:prstGeom prst="rect">
             <a:avLst/>
@@ -3311,13 +3311,13 @@
           <a:p>
             <a:pPr algn="l"/>
             <a:r>
-              <a:rPr sz="1600" b="1" i="0">
-                <a:solidFill>
-                  <a:srgbClr val="16598D"/>
-                </a:solidFill>
-                <a:latin typeface="Calibri"/>
-              </a:rPr>
-              <a:t>En français, en arabe et en anglais · sur ordinateur et sur téléphone</a:t>
+              <a:rPr sz="1800" b="0" i="0">
+                <a:solidFill>
+                  <a:srgbClr val="12263A"/>
+                </a:solidFill>
+                <a:latin typeface="Calibri"/>
+              </a:rPr>
+              <a:t>La mise à disposition du personnel et du matériel de prestation de services, de A à Z : du bordereau des prix jusqu'à l'attachement et à la facture (module facturation activable par l'administrateur).</a:t>
             </a:r>
           </a:p>
         </p:txBody>
@@ -3330,8 +3330,8 @@
         </p:nvSpPr>
         <p:spPr>
           <a:xfrm>
-            <a:off x="5120640" y="6035040"/>
-            <a:ext cx="6400800" cy="365760"/>
+            <a:off x="5120640" y="4937760"/>
+            <a:ext cx="6400800" cy="457200"/>
           </a:xfrm>
           <a:prstGeom prst="rect">
             <a:avLst/>
@@ -3346,13 +3346,48 @@
           <a:p>
             <a:pPr algn="l"/>
             <a:r>
+              <a:rPr sz="1600" b="1" i="0">
+                <a:solidFill>
+                  <a:srgbClr val="16598D"/>
+                </a:solidFill>
+                <a:latin typeface="Calibri"/>
+              </a:rPr>
+              <a:t>En français, en arabe et en anglais · sur ordinateur et sur téléphone</a:t>
+            </a:r>
+          </a:p>
+        </p:txBody>
+      </p:sp>
+      <p:sp>
+        <p:nvSpPr>
+          <p:cNvPr id="9" name="TextBox 8"/>
+          <p:cNvSpPr txBox="1"/>
+          <p:nvPr/>
+        </p:nvSpPr>
+        <p:spPr>
+          <a:xfrm>
+            <a:off x="5120640" y="6035040"/>
+            <a:ext cx="6400800" cy="365760"/>
+          </a:xfrm>
+          <a:prstGeom prst="rect">
+            <a:avLst/>
+          </a:prstGeom>
+          <a:noFill/>
+        </p:spPr>
+        <p:txBody>
+          <a:bodyPr wrap="square" anchor="t" lIns="45720" rIns="45720" tIns="27432" bIns="27432">
+            <a:spAutoFit/>
+          </a:bodyPr>
+          <a:lstStyle/>
+          <a:p>
+            <a:pPr algn="l"/>
+            <a:r>
               <a:rPr sz="1100" b="0" i="0">
                 <a:solidFill>
                   <a:srgbClr val="6B7785"/>
                 </a:solidFill>
                 <a:latin typeface="Calibri"/>
               </a:rPr>
-              <a:t>Version 3.32.1 · Octobre 2026 · Captures : entreprise fictive</a:t>
+              <a:t>Version 3.41.0 · Octobre 2026 · Captures : entreprise fictive</a:t>
             </a:r>
           </a:p>
         </p:txBody>
@@ -8331,7 +8366,7 @@
                 </a:solidFill>
                 <a:latin typeface="Calibri"/>
               </a:rPr>
-              <a:t>Gestion du temps de travail</a:t>
+              <a:t>Gestion du temps de travail et des rotations</a:t>
             </a:r>
           </a:p>
         </p:txBody>
@@ -9892,7 +9927,7 @@
                 </a:solidFill>
                 <a:latin typeface="Calibri"/>
               </a:rPr>
-              <a:t>Sijil gère la mise à disposition et le personnel de prestation de services de bout en bout</a:t>
+              <a:t>Sijil gère la mise à disposition du personnel et du matériel de prestation de services, avec les rotations, de bout en bout</a:t>
             </a:r>
           </a:p>
         </p:txBody>

--- a/docs/Sijil-Presentation.pptx
+++ b/docs/Sijil-Presentation.pptx
@@ -24,6 +24,8 @@
     <p:sldId id="272" r:id="rId23"/>
     <p:sldId id="273" r:id="rId24"/>
     <p:sldId id="274" r:id="rId25"/>
+    <p:sldId id="275" r:id="rId26"/>
+    <p:sldId id="276" r:id="rId27"/>
   </p:sldIdLst>
   <p:sldSz cx="12191695" cy="6858000" type="screen4x3"/>
   <p:notesSz cx="6858000" cy="9144000"/>
@@ -3527,7 +3529,7 @@
                 </a:solidFill>
                 <a:latin typeface="Calibri"/>
               </a:rPr>
-              <a:t>Demandes et documents, sans courir après</a:t>
+              <a:t>Voir loin : 3 mois, 6 mois, 1 an</a:t>
             </a:r>
           </a:p>
         </p:txBody>
@@ -3562,7 +3564,7 @@
                 </a:solidFill>
                 <a:latin typeface="Calibri"/>
               </a:rPr>
-              <a:t>Du titre de congé à la fiche de paie</a:t>
+              <a:t>Les départs, les reprises et les fêtes, en un coup d'œil</a:t>
             </a:r>
           </a:p>
         </p:txBody>
@@ -3604,7 +3606,7 @@
       </p:sp>
       <p:pic>
         <p:nvPicPr>
-          <p:cNvPr id="7" name="Picture 6" descr="70-demandes-chef.png"/>
+          <p:cNvPr id="7" name="Picture 6" descr="14-vue-1-an.png"/>
           <p:cNvPicPr>
             <a:picLocks noChangeAspect="1"/>
           </p:cNvPicPr>
@@ -3618,8 +3620,8 @@
         </p:blipFill>
         <p:spPr>
           <a:xfrm>
-            <a:off x="548640" y="1600200"/>
-            <a:ext cx="5394960" cy="3252843"/>
+            <a:off x="548640" y="1554480"/>
+            <a:ext cx="7863840" cy="4741432"/>
           </a:xfrm>
           <a:prstGeom prst="rect">
             <a:avLst/>
@@ -3631,45 +3633,16 @@
           </a:ln>
         </p:spPr>
       </p:pic>
-      <p:pic>
-        <p:nvPicPr>
-          <p:cNvPr id="8" name="Picture 7" descr="64-documents-agent.png"/>
-          <p:cNvPicPr>
-            <a:picLocks noChangeAspect="1"/>
-          </p:cNvPicPr>
-          <p:nvPr/>
-        </p:nvPicPr>
-        <p:blipFill>
-          <a:blip r:embed="rId3"/>
-          <a:stretch>
-            <a:fillRect/>
-          </a:stretch>
-        </p:blipFill>
-        <p:spPr>
-          <a:xfrm>
-            <a:off x="6309360" y="1600200"/>
-            <a:ext cx="5394960" cy="3252843"/>
-          </a:xfrm>
-          <a:prstGeom prst="rect">
-            <a:avLst/>
-          </a:prstGeom>
-          <a:ln w="9525">
-            <a:solidFill>
-              <a:srgbClr val="D0D7DE"/>
-            </a:solidFill>
-          </a:ln>
-        </p:spPr>
-      </p:pic>
-      <p:sp>
-        <p:nvSpPr>
-          <p:cNvPr id="9" name="TextBox 8"/>
+      <p:sp>
+        <p:nvSpPr>
+          <p:cNvPr id="8" name="TextBox 7"/>
           <p:cNvSpPr txBox="1"/>
           <p:nvPr/>
         </p:nvSpPr>
         <p:spPr>
           <a:xfrm>
-            <a:off x="548640" y="5029200"/>
-            <a:ext cx="5577840" cy="4572000"/>
+            <a:off x="8686800" y="1737360"/>
+            <a:ext cx="3200400" cy="4572000"/>
           </a:xfrm>
           <a:prstGeom prst="rect">
             <a:avLst/>
@@ -3684,11 +3657,11 @@
           <a:p>
             <a:pPr>
               <a:spcAft>
-                <a:spcPts val="800"/>
+                <a:spcPts val="1200"/>
               </a:spcAft>
             </a:pPr>
             <a:r>
-              <a:rPr sz="1100">
+              <a:rPr sz="1200">
                 <a:solidFill>
                   <a:srgbClr val="2FB5B4"/>
                 </a:solidFill>
@@ -3697,32 +3670,32 @@
               <a:t>● </a:t>
             </a:r>
             <a:r>
-              <a:rPr sz="1500" b="1">
+              <a:rPr sz="1600" b="1">
                 <a:solidFill>
                   <a:srgbClr val="0E4377"/>
                 </a:solidFill>
                 <a:latin typeface="Calibri"/>
               </a:rPr>
-              <a:t>Demandes regroupées par thème</a:t>
-            </a:r>
-            <a:r>
-              <a:rPr sz="1400">
+              <a:t>Jours fériés algériens</a:t>
+            </a:r>
+            <a:r>
+              <a:rPr sz="1500">
                 <a:solidFill>
                   <a:srgbClr val="12263A"/>
                 </a:solidFill>
                 <a:latin typeface="Calibri"/>
               </a:rPr>
-              <a:t> — une seule demande part à la direction</a:t>
+              <a:t> — fêtes nationales et religieuses</a:t>
             </a:r>
           </a:p>
           <a:p>
             <a:pPr>
               <a:spcAft>
-                <a:spcPts val="800"/>
+                <a:spcPts val="1200"/>
               </a:spcAft>
             </a:pPr>
             <a:r>
-              <a:rPr sz="1100">
+              <a:rPr sz="1200">
                 <a:solidFill>
                   <a:srgbClr val="2FB5B4"/>
                 </a:solidFill>
@@ -3731,55 +3704,32 @@
               <a:t>● </a:t>
             </a:r>
             <a:r>
-              <a:rPr sz="1500" b="1">
+              <a:rPr sz="1600" b="1">
                 <a:solidFill>
                   <a:srgbClr val="0E4377"/>
                 </a:solidFill>
                 <a:latin typeface="Calibri"/>
               </a:rPr>
-              <a:t>Date de reprise calculée</a:t>
-            </a:r>
-            <a:r>
-              <a:rPr sz="1400">
+              <a:t>Jour courant</a:t>
+            </a:r>
+            <a:r>
+              <a:rPr sz="1500">
                 <a:solidFill>
                   <a:srgbClr val="12263A"/>
                 </a:solidFill>
                 <a:latin typeface="Calibri"/>
               </a:rPr>
-              <a:t> — départ + durée du repos</a:t>
-            </a:r>
-          </a:p>
-        </p:txBody>
-      </p:sp>
-      <p:sp>
-        <p:nvSpPr>
-          <p:cNvPr id="10" name="TextBox 9"/>
-          <p:cNvSpPr txBox="1"/>
-          <p:nvPr/>
-        </p:nvSpPr>
-        <p:spPr>
-          <a:xfrm>
-            <a:off x="6309360" y="5029200"/>
-            <a:ext cx="5577840" cy="4572000"/>
-          </a:xfrm>
-          <a:prstGeom prst="rect">
-            <a:avLst/>
-          </a:prstGeom>
-          <a:noFill/>
-        </p:spPr>
-        <p:txBody>
-          <a:bodyPr wrap="square">
-            <a:spAutoFit/>
-          </a:bodyPr>
-          <a:lstStyle/>
+              <a:t> — repéré, la grille s'y place</a:t>
+            </a:r>
+          </a:p>
           <a:p>
             <a:pPr>
               <a:spcAft>
-                <a:spcPts val="800"/>
+                <a:spcPts val="1200"/>
               </a:spcAft>
             </a:pPr>
             <a:r>
-              <a:rPr sz="1100">
+              <a:rPr sz="1200">
                 <a:solidFill>
                   <a:srgbClr val="2FB5B4"/>
                 </a:solidFill>
@@ -3788,32 +3738,32 @@
               <a:t>● </a:t>
             </a:r>
             <a:r>
-              <a:rPr sz="1500" b="1">
+              <a:rPr sz="1600" b="1">
                 <a:solidFill>
                   <a:srgbClr val="0E4377"/>
                 </a:solidFill>
                 <a:latin typeface="Calibri"/>
               </a:rPr>
-              <a:t>Documents rangés tout seuls</a:t>
-            </a:r>
-            <a:r>
-              <a:rPr sz="1400">
+              <a:t>Totaux T, CR, ABS</a:t>
+            </a:r>
+            <a:r>
+              <a:rPr sz="1500">
                 <a:solidFill>
                   <a:srgbClr val="12263A"/>
                 </a:solidFill>
                 <a:latin typeface="Calibri"/>
               </a:rPr>
-              <a:t> — type, période, nom, dossier Drive</a:t>
+              <a:t> — et solde cumulé</a:t>
             </a:r>
           </a:p>
           <a:p>
             <a:pPr>
               <a:spcAft>
-                <a:spcPts val="800"/>
+                <a:spcPts val="1200"/>
               </a:spcAft>
             </a:pPr>
             <a:r>
-              <a:rPr sz="1100">
+              <a:rPr sz="1200">
                 <a:solidFill>
                   <a:srgbClr val="2FB5B4"/>
                 </a:solidFill>
@@ -3822,22 +3772,22 @@
               <a:t>● </a:t>
             </a:r>
             <a:r>
-              <a:rPr sz="1500" b="1">
+              <a:rPr sz="1600" b="1">
                 <a:solidFill>
                   <a:srgbClr val="0E4377"/>
                 </a:solidFill>
                 <a:latin typeface="Calibri"/>
               </a:rPr>
-              <a:t>Pastille et e-mail</a:t>
-            </a:r>
-            <a:r>
-              <a:rPr sz="1400">
+              <a:t>Dates religieuses</a:t>
+            </a:r>
+            <a:r>
+              <a:rPr sz="1500">
                 <a:solidFill>
                   <a:srgbClr val="12263A"/>
                 </a:solidFill>
                 <a:latin typeface="Calibri"/>
               </a:rPr>
-              <a:t> — l'agent est prévenu</a:t>
+              <a:t> — corrigeables en 2 clics</a:t>
             </a:r>
           </a:p>
         </p:txBody>
@@ -3977,7 +3927,7 @@
                 </a:solidFill>
                 <a:latin typeface="Calibri"/>
               </a:rPr>
-              <a:t>Du contrat à la facture, sans ressaisie</a:t>
+              <a:t>L'agent sait toujours où il en est</a:t>
             </a:r>
           </a:p>
         </p:txBody>
@@ -4012,7 +3962,7 @@
                 </a:solidFill>
                 <a:latin typeface="Calibri"/>
               </a:rPr>
-              <a:t>Le bordereau des prix se lit tout seul, le reste en découle</a:t>
+              <a:t>Plus besoin d'appeler pour demander son solde ou sa date de reprise</a:t>
             </a:r>
           </a:p>
         </p:txBody>
@@ -4054,7 +4004,7 @@
       </p:sp>
       <p:pic>
         <p:nvPicPr>
-          <p:cNvPr id="7" name="Picture 6" descr="40a-contrat.png"/>
+          <p:cNvPr id="7" name="Picture 6" descr="60-agent-accueil.png"/>
           <p:cNvPicPr>
             <a:picLocks noChangeAspect="1"/>
           </p:cNvPicPr>
@@ -4068,8 +4018,8 @@
         </p:blipFill>
         <p:spPr>
           <a:xfrm>
-            <a:off x="548640" y="1554480"/>
-            <a:ext cx="6035040" cy="4570655"/>
+            <a:off x="548640" y="1600200"/>
+            <a:ext cx="6766560" cy="4079837"/>
           </a:xfrm>
           <a:prstGeom prst="rect">
             <a:avLst/>
@@ -4081,16 +4031,45 @@
           </a:ln>
         </p:spPr>
       </p:pic>
-      <p:sp>
-        <p:nvSpPr>
-          <p:cNvPr id="8" name="TextBox 7"/>
+      <p:pic>
+        <p:nvPicPr>
+          <p:cNvPr id="8" name="Picture 7" descr="93-mobile.png"/>
+          <p:cNvPicPr>
+            <a:picLocks noChangeAspect="1"/>
+          </p:cNvPicPr>
+          <p:nvPr/>
+        </p:nvPicPr>
+        <p:blipFill>
+          <a:blip r:embed="rId3"/>
+          <a:stretch>
+            <a:fillRect/>
+          </a:stretch>
+        </p:blipFill>
+        <p:spPr>
+          <a:xfrm>
+            <a:off x="7680960" y="1463040"/>
+            <a:ext cx="2318004" cy="4754880"/>
+          </a:xfrm>
+          <a:prstGeom prst="rect">
+            <a:avLst/>
+          </a:prstGeom>
+          <a:ln w="9525">
+            <a:solidFill>
+              <a:srgbClr val="D0D7DE"/>
+            </a:solidFill>
+          </a:ln>
+        </p:spPr>
+      </p:pic>
+      <p:sp>
+        <p:nvSpPr>
+          <p:cNvPr id="9" name="TextBox 8"/>
           <p:cNvSpPr txBox="1"/>
           <p:nvPr/>
         </p:nvSpPr>
         <p:spPr>
           <a:xfrm>
-            <a:off x="7406640" y="1737360"/>
-            <a:ext cx="4480560" cy="4572000"/>
+            <a:off x="10058400" y="2103120"/>
+            <a:ext cx="2011680" cy="2926080"/>
           </a:xfrm>
           <a:prstGeom prst="rect">
             <a:avLst/>
@@ -4098,144 +4077,20 @@
           <a:noFill/>
         </p:spPr>
         <p:txBody>
-          <a:bodyPr wrap="square">
+          <a:bodyPr wrap="square" anchor="t" lIns="45720" rIns="45720" tIns="27432" bIns="27432">
             <a:spAutoFit/>
           </a:bodyPr>
           <a:lstStyle/>
           <a:p>
-            <a:pPr>
-              <a:spcAft>
-                <a:spcPts val="1400"/>
-              </a:spcAft>
-            </a:pPr>
-            <a:r>
-              <a:rPr sz="1200">
-                <a:solidFill>
-                  <a:srgbClr val="2FB5B4"/>
-                </a:solidFill>
-                <a:latin typeface="Calibri"/>
-              </a:rPr>
-              <a:t>● </a:t>
-            </a:r>
-            <a:r>
-              <a:rPr sz="1600" b="1">
+            <a:pPr algn="l"/>
+            <a:r>
+              <a:rPr sz="1500" b="0" i="1">
                 <a:solidFill>
                   <a:srgbClr val="0E4377"/>
                 </a:solidFill>
                 <a:latin typeface="Calibri"/>
               </a:rPr>
-              <a:t>Bordereau des prix lu automatiquement</a:t>
-            </a:r>
-            <a:r>
-              <a:rPr sz="1500">
-                <a:solidFill>
-                  <a:srgbClr val="12263A"/>
-                </a:solidFill>
-                <a:latin typeface="Calibri"/>
-              </a:rPr>
-              <a:t> — PDF scanné, photo, Excel, CSV</a:t>
-            </a:r>
-          </a:p>
-          <a:p>
-            <a:pPr>
-              <a:spcAft>
-                <a:spcPts val="1400"/>
-              </a:spcAft>
-            </a:pPr>
-            <a:r>
-              <a:rPr sz="1200">
-                <a:solidFill>
-                  <a:srgbClr val="2FB5B4"/>
-                </a:solidFill>
-                <a:latin typeface="Calibri"/>
-              </a:rPr>
-              <a:t>● </a:t>
-            </a:r>
-            <a:r>
-              <a:rPr sz="1600" b="1">
-                <a:solidFill>
-                  <a:srgbClr val="0E4377"/>
-                </a:solidFill>
-                <a:latin typeface="Calibri"/>
-              </a:rPr>
-              <a:t>Contrat complet</a:t>
-            </a:r>
-            <a:r>
-              <a:rPr sz="1500">
-                <a:solidFill>
-                  <a:srgbClr val="12263A"/>
-                </a:solidFill>
-                <a:latin typeface="Calibri"/>
-              </a:rPr>
-              <a:t> — début, durée, fin visibles de tous</a:t>
-            </a:r>
-          </a:p>
-          <a:p>
-            <a:pPr>
-              <a:spcAft>
-                <a:spcPts val="1400"/>
-              </a:spcAft>
-            </a:pPr>
-            <a:r>
-              <a:rPr sz="1200">
-                <a:solidFill>
-                  <a:srgbClr val="2FB5B4"/>
-                </a:solidFill>
-                <a:latin typeface="Calibri"/>
-              </a:rPr>
-              <a:t>● </a:t>
-            </a:r>
-            <a:r>
-              <a:rPr sz="1600" b="1">
-                <a:solidFill>
-                  <a:srgbClr val="0E4377"/>
-                </a:solidFill>
-                <a:latin typeface="Calibri"/>
-              </a:rPr>
-              <a:t>Effectifs bornés</a:t>
-            </a:r>
-            <a:r>
-              <a:rPr sz="1500">
-                <a:solidFill>
-                  <a:srgbClr val="12263A"/>
-                </a:solidFill>
-                <a:latin typeface="Calibri"/>
-              </a:rPr>
-              <a:t> — voyant complet / manque / dépassé</a:t>
-            </a:r>
-          </a:p>
-          <a:p>
-            <a:pPr>
-              <a:spcAft>
-                <a:spcPts val="1400"/>
-              </a:spcAft>
-            </a:pPr>
-            <a:r>
-              <a:rPr sz="1200">
-                <a:solidFill>
-                  <a:srgbClr val="2FB5B4"/>
-                </a:solidFill>
-                <a:latin typeface="Calibri"/>
-              </a:rPr>
-              <a:t>● </a:t>
-            </a:r>
-            <a:r>
-              <a:rPr sz="1600" b="1">
-                <a:solidFill>
-                  <a:srgbClr val="0E4377"/>
-                </a:solidFill>
-                <a:latin typeface="Calibri"/>
-              </a:rPr>
-              <a:t>Historique</a:t>
-            </a:r>
-            <a:r>
-              <a:rPr sz="1500">
-                <a:solidFill>
-                  <a:srgbClr val="12263A"/>
-                </a:solidFill>
-                <a:latin typeface="Calibri"/>
-              </a:rPr>
-              <a:t> — par fonction, avec le reste à facturer</a:t>
+              <a:t>« Le jour de votre départ, votre solde sera de +43 jours. »</a:t>
             </a:r>
           </a:p>
         </p:txBody>
@@ -4375,7 +4230,7 @@
                 </a:solidFill>
                 <a:latin typeface="Calibri"/>
               </a:rPr>
-              <a:t>Attachement et facture, sur les jours pointés</a:t>
+              <a:t>Demandes et documents, sans courir après</a:t>
             </a:r>
           </a:p>
         </p:txBody>
@@ -4410,7 +4265,7 @@
                 </a:solidFill>
                 <a:latin typeface="Calibri"/>
               </a:rPr>
-              <a:t>Validez : le mois est figé. Ensuite, la facture</a:t>
+              <a:t>Du titre de congé à la fiche de paie</a:t>
             </a:r>
           </a:p>
         </p:txBody>
@@ -4452,7 +4307,7 @@
       </p:sp>
       <p:pic>
         <p:nvPicPr>
-          <p:cNvPr id="7" name="Picture 6" descr="50-exports.png"/>
+          <p:cNvPr id="7" name="Picture 6" descr="70-demandes-chef.png"/>
           <p:cNvPicPr>
             <a:picLocks noChangeAspect="1"/>
           </p:cNvPicPr>
@@ -4466,8 +4321,8 @@
         </p:blipFill>
         <p:spPr>
           <a:xfrm>
-            <a:off x="548640" y="1554480"/>
-            <a:ext cx="5943600" cy="4545105"/>
+            <a:off x="548640" y="1600200"/>
+            <a:ext cx="5394960" cy="3252843"/>
           </a:xfrm>
           <a:prstGeom prst="rect">
             <a:avLst/>
@@ -4479,16 +4334,45 @@
           </a:ln>
         </p:spPr>
       </p:pic>
-      <p:sp>
-        <p:nvSpPr>
-          <p:cNvPr id="8" name="TextBox 7"/>
+      <p:pic>
+        <p:nvPicPr>
+          <p:cNvPr id="8" name="Picture 7" descr="64-documents-agent.png"/>
+          <p:cNvPicPr>
+            <a:picLocks noChangeAspect="1"/>
+          </p:cNvPicPr>
+          <p:nvPr/>
+        </p:nvPicPr>
+        <p:blipFill>
+          <a:blip r:embed="rId3"/>
+          <a:stretch>
+            <a:fillRect/>
+          </a:stretch>
+        </p:blipFill>
+        <p:spPr>
+          <a:xfrm>
+            <a:off x="6309360" y="1600200"/>
+            <a:ext cx="5394960" cy="3252843"/>
+          </a:xfrm>
+          <a:prstGeom prst="rect">
+            <a:avLst/>
+          </a:prstGeom>
+          <a:ln w="9525">
+            <a:solidFill>
+              <a:srgbClr val="D0D7DE"/>
+            </a:solidFill>
+          </a:ln>
+        </p:spPr>
+      </p:pic>
+      <p:sp>
+        <p:nvSpPr>
+          <p:cNvPr id="9" name="TextBox 8"/>
           <p:cNvSpPr txBox="1"/>
           <p:nvPr/>
         </p:nvSpPr>
         <p:spPr>
           <a:xfrm>
-            <a:off x="7589520" y="1737360"/>
-            <a:ext cx="4297680" cy="4572000"/>
+            <a:off x="548640" y="5029200"/>
+            <a:ext cx="5577840" cy="4572000"/>
           </a:xfrm>
           <a:prstGeom prst="rect">
             <a:avLst/>
@@ -4503,11 +4387,11 @@
           <a:p>
             <a:pPr>
               <a:spcAft>
-                <a:spcPts val="1200"/>
+                <a:spcPts val="800"/>
               </a:spcAft>
             </a:pPr>
             <a:r>
-              <a:rPr sz="1200">
+              <a:rPr sz="1100">
                 <a:solidFill>
                   <a:srgbClr val="2FB5B4"/>
                 </a:solidFill>
@@ -4516,32 +4400,32 @@
               <a:t>● </a:t>
             </a:r>
             <a:r>
-              <a:rPr sz="1600" b="1">
+              <a:rPr sz="1500" b="1">
                 <a:solidFill>
                   <a:srgbClr val="0E4377"/>
                 </a:solidFill>
                 <a:latin typeface="Calibri"/>
               </a:rPr>
-              <a:t>Fiche de pointage</a:t>
-            </a:r>
-            <a:r>
-              <a:rPr sz="1500">
+              <a:t>Demandes regroupées par thème</a:t>
+            </a:r>
+            <a:r>
+              <a:rPr sz="1400">
                 <a:solidFill>
                   <a:srgbClr val="12263A"/>
                 </a:solidFill>
                 <a:latin typeface="Calibri"/>
               </a:rPr>
-              <a:t> — Excel et PDF du mois</a:t>
+              <a:t> — une seule demande part à la direction</a:t>
             </a:r>
           </a:p>
           <a:p>
             <a:pPr>
               <a:spcAft>
-                <a:spcPts val="1200"/>
+                <a:spcPts val="800"/>
               </a:spcAft>
             </a:pPr>
             <a:r>
-              <a:rPr sz="1200">
+              <a:rPr sz="1100">
                 <a:solidFill>
                   <a:srgbClr val="2FB5B4"/>
                 </a:solidFill>
@@ -4550,32 +4434,55 @@
               <a:t>● </a:t>
             </a:r>
             <a:r>
-              <a:rPr sz="1600" b="1">
+              <a:rPr sz="1500" b="1">
                 <a:solidFill>
                   <a:srgbClr val="0E4377"/>
                 </a:solidFill>
                 <a:latin typeface="Calibri"/>
               </a:rPr>
-              <a:t>Attachement</a:t>
-            </a:r>
-            <a:r>
-              <a:rPr sz="1500">
+              <a:t>Date de reprise calculée</a:t>
+            </a:r>
+            <a:r>
+              <a:rPr sz="1400">
                 <a:solidFill>
                   <a:srgbClr val="12263A"/>
                 </a:solidFill>
                 <a:latin typeface="Calibri"/>
               </a:rPr>
-              <a:t> — quantités sur les jours T pointés</a:t>
-            </a:r>
-          </a:p>
+              <a:t> — départ + durée du repos</a:t>
+            </a:r>
+          </a:p>
+        </p:txBody>
+      </p:sp>
+      <p:sp>
+        <p:nvSpPr>
+          <p:cNvPr id="10" name="TextBox 9"/>
+          <p:cNvSpPr txBox="1"/>
+          <p:nvPr/>
+        </p:nvSpPr>
+        <p:spPr>
+          <a:xfrm>
+            <a:off x="6309360" y="5029200"/>
+            <a:ext cx="5577840" cy="4572000"/>
+          </a:xfrm>
+          <a:prstGeom prst="rect">
+            <a:avLst/>
+          </a:prstGeom>
+          <a:noFill/>
+        </p:spPr>
+        <p:txBody>
+          <a:bodyPr wrap="square">
+            <a:spAutoFit/>
+          </a:bodyPr>
+          <a:lstStyle/>
           <a:p>
             <a:pPr>
               <a:spcAft>
-                <a:spcPts val="1200"/>
+                <a:spcPts val="800"/>
               </a:spcAft>
             </a:pPr>
             <a:r>
-              <a:rPr sz="1200">
+              <a:rPr sz="1100">
                 <a:solidFill>
                   <a:srgbClr val="2FB5B4"/>
                 </a:solidFill>
@@ -4584,32 +4491,32 @@
               <a:t>● </a:t>
             </a:r>
             <a:r>
-              <a:rPr sz="1600" b="1">
+              <a:rPr sz="1500" b="1">
                 <a:solidFill>
                   <a:srgbClr val="0E4377"/>
                 </a:solidFill>
                 <a:latin typeface="Calibri"/>
               </a:rPr>
-              <a:t>Validation</a:t>
-            </a:r>
-            <a:r>
-              <a:rPr sz="1500">
+              <a:t>Documents rangés tout seuls</a:t>
+            </a:r>
+            <a:r>
+              <a:rPr sz="1400">
                 <a:solidFill>
                   <a:srgbClr val="12263A"/>
                 </a:solidFill>
                 <a:latin typeface="Calibri"/>
               </a:rPr>
-              <a:t> — mêmes quantités, mêmes prix</a:t>
+              <a:t> — type, période, nom, dossier Drive</a:t>
             </a:r>
           </a:p>
           <a:p>
             <a:pPr>
               <a:spcAft>
-                <a:spcPts val="1200"/>
+                <a:spcPts val="800"/>
               </a:spcAft>
             </a:pPr>
             <a:r>
-              <a:rPr sz="1200">
+              <a:rPr sz="1100">
                 <a:solidFill>
                   <a:srgbClr val="2FB5B4"/>
                 </a:solidFill>
@@ -4618,56 +4525,22 @@
               <a:t>● </a:t>
             </a:r>
             <a:r>
-              <a:rPr sz="1600" b="1">
+              <a:rPr sz="1500" b="1">
                 <a:solidFill>
                   <a:srgbClr val="0E4377"/>
                 </a:solidFill>
                 <a:latin typeface="Calibri"/>
               </a:rPr>
-              <a:t>Facture</a:t>
-            </a:r>
-            <a:r>
-              <a:rPr sz="1500">
+              <a:t>Pastille et e-mail</a:t>
+            </a:r>
+            <a:r>
+              <a:rPr sz="1400">
                 <a:solidFill>
                   <a:srgbClr val="12263A"/>
                 </a:solidFill>
                 <a:latin typeface="Calibri"/>
               </a:rPr>
-              <a:t> — numéro, date, PDF et Excel</a:t>
-            </a:r>
-          </a:p>
-          <a:p>
-            <a:pPr>
-              <a:spcAft>
-                <a:spcPts val="1200"/>
-              </a:spcAft>
-            </a:pPr>
-            <a:r>
-              <a:rPr sz="1200">
-                <a:solidFill>
-                  <a:srgbClr val="2FB5B4"/>
-                </a:solidFill>
-                <a:latin typeface="Calibri"/>
-              </a:rPr>
-              <a:t>● </a:t>
-            </a:r>
-            <a:r>
-              <a:rPr sz="1600" b="1">
-                <a:solidFill>
-                  <a:srgbClr val="0E4377"/>
-                </a:solidFill>
-                <a:latin typeface="Calibri"/>
-              </a:rPr>
-              <a:t>Brouillon du mois suivant</a:t>
-            </a:r>
-            <a:r>
-              <a:rPr sz="1500">
-                <a:solidFill>
-                  <a:srgbClr val="12263A"/>
-                </a:solidFill>
-                <a:latin typeface="Calibri"/>
-              </a:rPr>
-              <a:t> — à titre indicatif</a:t>
+              <a:t> — l'agent est prévenu</a:t>
             </a:r>
           </a:p>
         </p:txBody>
@@ -4807,7 +4680,7 @@
                 </a:solidFill>
                 <a:latin typeface="Calibri"/>
               </a:rPr>
-              <a:t>Votre client suit, et vous répond</a:t>
+              <a:t>Du contrat à la facture, sans ressaisie</a:t>
             </a:r>
           </a:p>
         </p:txBody>
@@ -4842,7 +4715,7 @@
                 </a:solidFill>
                 <a:latin typeface="Calibri"/>
               </a:rPr>
-              <a:t>Un compte de consultation créé tout seul, limité à son contrat</a:t>
+              <a:t>Le bordereau des prix se lit tout seul, le reste en découle</a:t>
             </a:r>
           </a:p>
         </p:txBody>
@@ -4884,7 +4757,7 @@
       </p:sp>
       <p:pic>
         <p:nvPicPr>
-          <p:cNvPr id="7" name="Picture 6" descr="81-client-remarque.png"/>
+          <p:cNvPr id="7" name="Picture 6" descr="40a-contrat.png"/>
           <p:cNvPicPr>
             <a:picLocks noChangeAspect="1"/>
           </p:cNvPicPr>
@@ -4898,8 +4771,8 @@
         </p:blipFill>
         <p:spPr>
           <a:xfrm>
-            <a:off x="548640" y="1600200"/>
-            <a:ext cx="5394960" cy="3252843"/>
+            <a:off x="548640" y="1554480"/>
+            <a:ext cx="6035040" cy="4570655"/>
           </a:xfrm>
           <a:prstGeom prst="rect">
             <a:avLst/>
@@ -4911,45 +4784,16 @@
           </a:ln>
         </p:spPr>
       </p:pic>
-      <p:pic>
-        <p:nvPicPr>
-          <p:cNvPr id="8" name="Picture 7" descr="83-remarque-prestataire.png"/>
-          <p:cNvPicPr>
-            <a:picLocks noChangeAspect="1"/>
-          </p:cNvPicPr>
-          <p:nvPr/>
-        </p:nvPicPr>
-        <p:blipFill>
-          <a:blip r:embed="rId3"/>
-          <a:stretch>
-            <a:fillRect/>
-          </a:stretch>
-        </p:blipFill>
-        <p:spPr>
-          <a:xfrm>
-            <a:off x="6309360" y="1600200"/>
-            <a:ext cx="5394960" cy="3252843"/>
-          </a:xfrm>
-          <a:prstGeom prst="rect">
-            <a:avLst/>
-          </a:prstGeom>
-          <a:ln w="9525">
-            <a:solidFill>
-              <a:srgbClr val="D0D7DE"/>
-            </a:solidFill>
-          </a:ln>
-        </p:spPr>
-      </p:pic>
-      <p:sp>
-        <p:nvSpPr>
-          <p:cNvPr id="9" name="TextBox 8"/>
+      <p:sp>
+        <p:nvSpPr>
+          <p:cNvPr id="8" name="TextBox 7"/>
           <p:cNvSpPr txBox="1"/>
           <p:nvPr/>
         </p:nvSpPr>
         <p:spPr>
           <a:xfrm>
-            <a:off x="548640" y="5029200"/>
-            <a:ext cx="5577840" cy="4572000"/>
+            <a:off x="7406640" y="1737360"/>
+            <a:ext cx="4480560" cy="4572000"/>
           </a:xfrm>
           <a:prstGeom prst="rect">
             <a:avLst/>
@@ -4964,11 +4808,11 @@
           <a:p>
             <a:pPr>
               <a:spcAft>
-                <a:spcPts val="800"/>
+                <a:spcPts val="1400"/>
               </a:spcAft>
             </a:pPr>
             <a:r>
-              <a:rPr sz="1100">
+              <a:rPr sz="1200">
                 <a:solidFill>
                   <a:srgbClr val="2FB5B4"/>
                 </a:solidFill>
@@ -4977,32 +4821,32 @@
               <a:t>● </a:t>
             </a:r>
             <a:r>
-              <a:rPr sz="1500" b="1">
+              <a:rPr sz="1600" b="1">
                 <a:solidFill>
                   <a:srgbClr val="0E4377"/>
                 </a:solidFill>
                 <a:latin typeface="Calibri"/>
               </a:rPr>
-              <a:t>Un clic sur un jour</a:t>
-            </a:r>
-            <a:r>
-              <a:rPr sz="1400">
+              <a:t>Bordereau des prix lu automatiquement</a:t>
+            </a:r>
+            <a:r>
+              <a:rPr sz="1500">
                 <a:solidFill>
                   <a:srgbClr val="12263A"/>
                 </a:solidFill>
                 <a:latin typeface="Calibri"/>
               </a:rPr>
-              <a:t> — le client laisse sa remarque</a:t>
+              <a:t> — PDF scanné, photo, Excel, CSV</a:t>
             </a:r>
           </a:p>
           <a:p>
             <a:pPr>
               <a:spcAft>
-                <a:spcPts val="800"/>
+                <a:spcPts val="1400"/>
               </a:spcAft>
             </a:pPr>
             <a:r>
-              <a:rPr sz="1100">
+              <a:rPr sz="1200">
                 <a:solidFill>
                   <a:srgbClr val="2FB5B4"/>
                 </a:solidFill>
@@ -5011,55 +4855,32 @@
               <a:t>● </a:t>
             </a:r>
             <a:r>
-              <a:rPr sz="1500" b="1">
+              <a:rPr sz="1600" b="1">
                 <a:solidFill>
                   <a:srgbClr val="0E4377"/>
                 </a:solidFill>
                 <a:latin typeface="Calibri"/>
               </a:rPr>
-              <a:t>Il ne modifie rien</a:t>
-            </a:r>
-            <a:r>
-              <a:rPr sz="1400">
+              <a:t>Contrat complet</a:t>
+            </a:r>
+            <a:r>
+              <a:rPr sz="1500">
                 <a:solidFill>
                   <a:srgbClr val="12263A"/>
                 </a:solidFill>
                 <a:latin typeface="Calibri"/>
               </a:rPr>
-              <a:t> — lecture seule</a:t>
-            </a:r>
-          </a:p>
-        </p:txBody>
-      </p:sp>
-      <p:sp>
-        <p:nvSpPr>
-          <p:cNvPr id="10" name="TextBox 9"/>
-          <p:cNvSpPr txBox="1"/>
-          <p:nvPr/>
-        </p:nvSpPr>
-        <p:spPr>
-          <a:xfrm>
-            <a:off x="6309360" y="5029200"/>
-            <a:ext cx="5577840" cy="4572000"/>
-          </a:xfrm>
-          <a:prstGeom prst="rect">
-            <a:avLst/>
-          </a:prstGeom>
-          <a:noFill/>
-        </p:spPr>
-        <p:txBody>
-          <a:bodyPr wrap="square">
-            <a:spAutoFit/>
-          </a:bodyPr>
-          <a:lstStyle/>
+              <a:t> — début, durée, fin visibles de tous</a:t>
+            </a:r>
+          </a:p>
           <a:p>
             <a:pPr>
               <a:spcAft>
-                <a:spcPts val="800"/>
+                <a:spcPts val="1400"/>
               </a:spcAft>
             </a:pPr>
             <a:r>
-              <a:rPr sz="1100">
+              <a:rPr sz="1200">
                 <a:solidFill>
                   <a:srgbClr val="2FB5B4"/>
                 </a:solidFill>
@@ -5068,32 +4889,32 @@
               <a:t>● </a:t>
             </a:r>
             <a:r>
-              <a:rPr sz="1500" b="1">
+              <a:rPr sz="1600" b="1">
                 <a:solidFill>
                   <a:srgbClr val="0E4377"/>
                 </a:solidFill>
                 <a:latin typeface="Calibri"/>
               </a:rPr>
-              <a:t>Repère rouge dans la grille</a:t>
-            </a:r>
-            <a:r>
-              <a:rPr sz="1400">
+              <a:t>Effectifs bornés</a:t>
+            </a:r>
+            <a:r>
+              <a:rPr sz="1500">
                 <a:solidFill>
                   <a:srgbClr val="12263A"/>
                 </a:solidFill>
                 <a:latin typeface="Calibri"/>
               </a:rPr>
-              <a:t> — et e-mail au responsable d’équipe</a:t>
+              <a:t> — voyant complet / manque / dépassé</a:t>
             </a:r>
           </a:p>
           <a:p>
             <a:pPr>
               <a:spcAft>
-                <a:spcPts val="800"/>
+                <a:spcPts val="1400"/>
               </a:spcAft>
             </a:pPr>
             <a:r>
-              <a:rPr sz="1100">
+              <a:rPr sz="1200">
                 <a:solidFill>
                   <a:srgbClr val="2FB5B4"/>
                 </a:solidFill>
@@ -5102,22 +4923,22 @@
               <a:t>● </a:t>
             </a:r>
             <a:r>
-              <a:rPr sz="1500" b="1">
+              <a:rPr sz="1600" b="1">
                 <a:solidFill>
                   <a:srgbClr val="0E4377"/>
                 </a:solidFill>
                 <a:latin typeface="Calibri"/>
               </a:rPr>
-              <a:t>« Vu » et réponse</a:t>
-            </a:r>
-            <a:r>
-              <a:rPr sz="1400">
+              <a:t>Historique</a:t>
+            </a:r>
+            <a:r>
+              <a:rPr sz="1500">
                 <a:solidFill>
                   <a:srgbClr val="12263A"/>
                 </a:solidFill>
                 <a:latin typeface="Calibri"/>
               </a:rPr>
-              <a:t> — le client voit la réponse</a:t>
+              <a:t> — par fonction, avec le reste à facturer</a:t>
             </a:r>
           </a:p>
         </p:txBody>
@@ -5257,7 +5078,7 @@
                 </a:solidFill>
                 <a:latin typeface="Calibri"/>
               </a:rPr>
-              <a:t>Tout le monde est prévenu au bon moment</a:t>
+              <a:t>Attachement et facture, sur les jours pointés</a:t>
             </a:r>
           </a:p>
         </p:txBody>
@@ -5292,7 +5113,7 @@
                 </a:solidFill>
                 <a:latin typeface="Calibri"/>
               </a:rPr>
-              <a:t>Pastilles, messages à l'écran et e-mails</a:t>
+              <a:t>Validez : le mois est figé. Ensuite, la facture</a:t>
             </a:r>
           </a:p>
         </p:txBody>
@@ -5332,54 +5153,35 @@
           </a:p>
         </p:txBody>
       </p:sp>
-      <p:sp>
-        <p:nvSpPr>
-          <p:cNvPr id="7" name="Rounded Rectangle 6"/>
-          <p:cNvSpPr/>
-          <p:nvPr/>
-        </p:nvSpPr>
-        <p:spPr>
-          <a:xfrm>
-            <a:off x="548640" y="1737360"/>
-            <a:ext cx="3566160" cy="2286000"/>
-          </a:xfrm>
-          <a:prstGeom prst="roundRect">
-            <a:avLst>
-              <a:gd name="adj" fmla="val 6000"/>
-            </a:avLst>
-          </a:prstGeom>
-          <a:solidFill>
-            <a:srgbClr val="FFFFFF"/>
-          </a:solidFill>
-          <a:ln>
+      <p:pic>
+        <p:nvPicPr>
+          <p:cNvPr id="7" name="Picture 6" descr="50-exports.png"/>
+          <p:cNvPicPr>
+            <a:picLocks noChangeAspect="1"/>
+          </p:cNvPicPr>
+          <p:nvPr/>
+        </p:nvPicPr>
+        <p:blipFill>
+          <a:blip r:embed="rId2"/>
+          <a:stretch>
+            <a:fillRect/>
+          </a:stretch>
+        </p:blipFill>
+        <p:spPr>
+          <a:xfrm>
+            <a:off x="548640" y="1554480"/>
+            <a:ext cx="5943600" cy="4545105"/>
+          </a:xfrm>
+          <a:prstGeom prst="rect">
+            <a:avLst/>
+          </a:prstGeom>
+          <a:ln w="9525">
             <a:solidFill>
-              <a:srgbClr val="D9DFE5"/>
+              <a:srgbClr val="D0D7DE"/>
             </a:solidFill>
           </a:ln>
-          <a:effectLst/>
-        </p:spPr>
-        <p:style>
-          <a:lnRef idx="1">
-            <a:schemeClr val="accent1"/>
-          </a:lnRef>
-          <a:fillRef idx="3">
-            <a:schemeClr val="accent1"/>
-          </a:fillRef>
-          <a:effectRef idx="2">
-            <a:schemeClr val="accent1"/>
-          </a:effectRef>
-          <a:fontRef idx="minor">
-            <a:schemeClr val="lt1"/>
-          </a:fontRef>
-        </p:style>
-        <p:txBody>
-          <a:bodyPr rtlCol="0" anchor="ctr"/>
-          <a:lstStyle/>
-          <a:p>
-            <a:pPr algn="ctr"/>
-          </a:p>
-        </p:txBody>
-      </p:sp>
+        </p:spPr>
+      </p:pic>
       <p:sp>
         <p:nvSpPr>
           <p:cNvPr id="8" name="TextBox 7"/>
@@ -5388,8 +5190,8 @@
         </p:nvSpPr>
         <p:spPr>
           <a:xfrm>
-            <a:off x="731520" y="1874519"/>
-            <a:ext cx="3200400" cy="457200"/>
+            <a:off x="7589520" y="1737360"/>
+            <a:ext cx="4297680" cy="4572000"/>
           </a:xfrm>
           <a:prstGeom prst="rect">
             <a:avLst/>
@@ -5397,527 +5199,178 @@
           <a:noFill/>
         </p:spPr>
         <p:txBody>
-          <a:bodyPr wrap="square" anchor="t" lIns="45720" rIns="45720" tIns="27432" bIns="27432">
+          <a:bodyPr wrap="square">
             <a:spAutoFit/>
           </a:bodyPr>
           <a:lstStyle/>
           <a:p>
-            <a:pPr algn="l"/>
-            <a:r>
-              <a:rPr sz="1700" b="1" i="0">
+            <a:pPr>
+              <a:spcAft>
+                <a:spcPts val="1200"/>
+              </a:spcAft>
+            </a:pPr>
+            <a:r>
+              <a:rPr sz="1200">
+                <a:solidFill>
+                  <a:srgbClr val="2FB5B4"/>
+                </a:solidFill>
+                <a:latin typeface="Calibri"/>
+              </a:rPr>
+              <a:t>● </a:t>
+            </a:r>
+            <a:r>
+              <a:rPr sz="1600" b="1">
                 <a:solidFill>
                   <a:srgbClr val="0E4377"/>
                 </a:solidFill>
                 <a:latin typeface="Calibri"/>
               </a:rPr>
-              <a:t>Nouveau document</a:t>
-            </a:r>
-          </a:p>
-        </p:txBody>
-      </p:sp>
-      <p:sp>
-        <p:nvSpPr>
-          <p:cNvPr id="9" name="TextBox 8"/>
-          <p:cNvSpPr txBox="1"/>
-          <p:nvPr/>
-        </p:nvSpPr>
-        <p:spPr>
-          <a:xfrm>
-            <a:off x="731520" y="2423160"/>
-            <a:ext cx="3200400" cy="1463040"/>
-          </a:xfrm>
-          <a:prstGeom prst="rect">
-            <a:avLst/>
-          </a:prstGeom>
-          <a:noFill/>
-        </p:spPr>
-        <p:txBody>
-          <a:bodyPr wrap="square" anchor="t" lIns="45720" rIns="45720" tIns="27432" bIns="27432">
-            <a:spAutoFit/>
-          </a:bodyPr>
-          <a:lstStyle/>
-          <a:p>
-            <a:pPr algn="l"/>
-            <a:r>
-              <a:rPr sz="1500" b="0" i="0">
+              <a:t>Fiche de pointage</a:t>
+            </a:r>
+            <a:r>
+              <a:rPr sz="1500">
                 <a:solidFill>
                   <a:srgbClr val="12263A"/>
                 </a:solidFill>
                 <a:latin typeface="Calibri"/>
               </a:rPr>
-              <a:t>Pastille « Mes documents », message à l'écran et e-mail avec le nom du fichier.</a:t>
-            </a:r>
-          </a:p>
-        </p:txBody>
-      </p:sp>
-      <p:sp>
-        <p:nvSpPr>
-          <p:cNvPr id="10" name="Rounded Rectangle 9"/>
-          <p:cNvSpPr/>
-          <p:nvPr/>
-        </p:nvSpPr>
-        <p:spPr>
-          <a:xfrm>
-            <a:off x="4297680" y="1737360"/>
-            <a:ext cx="3566160" cy="2286000"/>
-          </a:xfrm>
-          <a:prstGeom prst="roundRect">
-            <a:avLst>
-              <a:gd name="adj" fmla="val 6000"/>
-            </a:avLst>
-          </a:prstGeom>
-          <a:solidFill>
-            <a:srgbClr val="FFFFFF"/>
-          </a:solidFill>
-          <a:ln>
-            <a:solidFill>
-              <a:srgbClr val="D9DFE5"/>
-            </a:solidFill>
-          </a:ln>
-          <a:effectLst/>
-        </p:spPr>
-        <p:style>
-          <a:lnRef idx="1">
-            <a:schemeClr val="accent1"/>
-          </a:lnRef>
-          <a:fillRef idx="3">
-            <a:schemeClr val="accent1"/>
-          </a:fillRef>
-          <a:effectRef idx="2">
-            <a:schemeClr val="accent1"/>
-          </a:effectRef>
-          <a:fontRef idx="minor">
-            <a:schemeClr val="lt1"/>
-          </a:fontRef>
-        </p:style>
-        <p:txBody>
-          <a:bodyPr rtlCol="0" anchor="ctr"/>
-          <a:lstStyle/>
-          <a:p>
-            <a:pPr algn="ctr"/>
-          </a:p>
-        </p:txBody>
-      </p:sp>
-      <p:sp>
-        <p:nvSpPr>
-          <p:cNvPr id="11" name="TextBox 10"/>
-          <p:cNvSpPr txBox="1"/>
-          <p:nvPr/>
-        </p:nvSpPr>
-        <p:spPr>
-          <a:xfrm>
-            <a:off x="4480560" y="1874519"/>
-            <a:ext cx="3200400" cy="457200"/>
-          </a:xfrm>
-          <a:prstGeom prst="rect">
-            <a:avLst/>
-          </a:prstGeom>
-          <a:noFill/>
-        </p:spPr>
-        <p:txBody>
-          <a:bodyPr wrap="square" anchor="t" lIns="45720" rIns="45720" tIns="27432" bIns="27432">
-            <a:spAutoFit/>
-          </a:bodyPr>
-          <a:lstStyle/>
-          <a:p>
-            <a:pPr algn="l"/>
-            <a:r>
-              <a:rPr sz="1700" b="1" i="0">
+              <a:t> — Excel et PDF du mois</a:t>
+            </a:r>
+          </a:p>
+          <a:p>
+            <a:pPr>
+              <a:spcAft>
+                <a:spcPts val="1200"/>
+              </a:spcAft>
+            </a:pPr>
+            <a:r>
+              <a:rPr sz="1200">
+                <a:solidFill>
+                  <a:srgbClr val="2FB5B4"/>
+                </a:solidFill>
+                <a:latin typeface="Calibri"/>
+              </a:rPr>
+              <a:t>● </a:t>
+            </a:r>
+            <a:r>
+              <a:rPr sz="1600" b="1">
                 <a:solidFill>
                   <a:srgbClr val="0E4377"/>
                 </a:solidFill>
                 <a:latin typeface="Calibri"/>
               </a:rPr>
-              <a:t>Nouvelle demande</a:t>
-            </a:r>
-          </a:p>
-        </p:txBody>
-      </p:sp>
-      <p:sp>
-        <p:nvSpPr>
-          <p:cNvPr id="12" name="TextBox 11"/>
-          <p:cNvSpPr txBox="1"/>
-          <p:nvPr/>
-        </p:nvSpPr>
-        <p:spPr>
-          <a:xfrm>
-            <a:off x="4480560" y="2423160"/>
-            <a:ext cx="3200400" cy="1463040"/>
-          </a:xfrm>
-          <a:prstGeom prst="rect">
-            <a:avLst/>
-          </a:prstGeom>
-          <a:noFill/>
-        </p:spPr>
-        <p:txBody>
-          <a:bodyPr wrap="square" anchor="t" lIns="45720" rIns="45720" tIns="27432" bIns="27432">
-            <a:spAutoFit/>
-          </a:bodyPr>
-          <a:lstStyle/>
-          <a:p>
-            <a:pPr algn="l"/>
-            <a:r>
-              <a:rPr sz="1500" b="0" i="0">
+              <a:t>Attachement</a:t>
+            </a:r>
+            <a:r>
+              <a:rPr sz="1500">
                 <a:solidFill>
                   <a:srgbClr val="12263A"/>
                 </a:solidFill>
                 <a:latin typeface="Calibri"/>
               </a:rPr>
-              <a:t>Le responsable d’équipe est prévenu avec les dates et la date de reprise.</a:t>
-            </a:r>
-          </a:p>
-        </p:txBody>
-      </p:sp>
-      <p:sp>
-        <p:nvSpPr>
-          <p:cNvPr id="13" name="Rounded Rectangle 12"/>
-          <p:cNvSpPr/>
-          <p:nvPr/>
-        </p:nvSpPr>
-        <p:spPr>
-          <a:xfrm>
-            <a:off x="8046720" y="1737360"/>
-            <a:ext cx="3566160" cy="2286000"/>
-          </a:xfrm>
-          <a:prstGeom prst="roundRect">
-            <a:avLst>
-              <a:gd name="adj" fmla="val 6000"/>
-            </a:avLst>
-          </a:prstGeom>
-          <a:solidFill>
-            <a:srgbClr val="FFFFFF"/>
-          </a:solidFill>
-          <a:ln>
-            <a:solidFill>
-              <a:srgbClr val="D9DFE5"/>
-            </a:solidFill>
-          </a:ln>
-          <a:effectLst/>
-        </p:spPr>
-        <p:style>
-          <a:lnRef idx="1">
-            <a:schemeClr val="accent1"/>
-          </a:lnRef>
-          <a:fillRef idx="3">
-            <a:schemeClr val="accent1"/>
-          </a:fillRef>
-          <a:effectRef idx="2">
-            <a:schemeClr val="accent1"/>
-          </a:effectRef>
-          <a:fontRef idx="minor">
-            <a:schemeClr val="lt1"/>
-          </a:fontRef>
-        </p:style>
-        <p:txBody>
-          <a:bodyPr rtlCol="0" anchor="ctr"/>
-          <a:lstStyle/>
-          <a:p>
-            <a:pPr algn="ctr"/>
-          </a:p>
-        </p:txBody>
-      </p:sp>
-      <p:sp>
-        <p:nvSpPr>
-          <p:cNvPr id="14" name="TextBox 13"/>
-          <p:cNvSpPr txBox="1"/>
-          <p:nvPr/>
-        </p:nvSpPr>
-        <p:spPr>
-          <a:xfrm>
-            <a:off x="8229600" y="1874519"/>
-            <a:ext cx="3200400" cy="457200"/>
-          </a:xfrm>
-          <a:prstGeom prst="rect">
-            <a:avLst/>
-          </a:prstGeom>
-          <a:noFill/>
-        </p:spPr>
-        <p:txBody>
-          <a:bodyPr wrap="square" anchor="t" lIns="45720" rIns="45720" tIns="27432" bIns="27432">
-            <a:spAutoFit/>
-          </a:bodyPr>
-          <a:lstStyle/>
-          <a:p>
-            <a:pPr algn="l"/>
-            <a:r>
-              <a:rPr sz="1700" b="1" i="0">
+              <a:t> — quantités sur les jours T pointés</a:t>
+            </a:r>
+          </a:p>
+          <a:p>
+            <a:pPr>
+              <a:spcAft>
+                <a:spcPts val="1200"/>
+              </a:spcAft>
+            </a:pPr>
+            <a:r>
+              <a:rPr sz="1200">
+                <a:solidFill>
+                  <a:srgbClr val="2FB5B4"/>
+                </a:solidFill>
+                <a:latin typeface="Calibri"/>
+              </a:rPr>
+              <a:t>● </a:t>
+            </a:r>
+            <a:r>
+              <a:rPr sz="1600" b="1">
                 <a:solidFill>
                   <a:srgbClr val="0E4377"/>
                 </a:solidFill>
                 <a:latin typeface="Calibri"/>
               </a:rPr>
-              <a:t>Nouvelle remarque</a:t>
-            </a:r>
-          </a:p>
-        </p:txBody>
-      </p:sp>
-      <p:sp>
-        <p:nvSpPr>
-          <p:cNvPr id="15" name="TextBox 14"/>
-          <p:cNvSpPr txBox="1"/>
-          <p:nvPr/>
-        </p:nvSpPr>
-        <p:spPr>
-          <a:xfrm>
-            <a:off x="8229600" y="2423160"/>
-            <a:ext cx="3200400" cy="1463040"/>
-          </a:xfrm>
-          <a:prstGeom prst="rect">
-            <a:avLst/>
-          </a:prstGeom>
-          <a:noFill/>
-        </p:spPr>
-        <p:txBody>
-          <a:bodyPr wrap="square" anchor="t" lIns="45720" rIns="45720" tIns="27432" bIns="27432">
-            <a:spAutoFit/>
-          </a:bodyPr>
-          <a:lstStyle/>
-          <a:p>
-            <a:pPr algn="l"/>
-            <a:r>
-              <a:rPr sz="1500" b="0" i="0">
+              <a:t>Validation</a:t>
+            </a:r>
+            <a:r>
+              <a:rPr sz="1500">
                 <a:solidFill>
                   <a:srgbClr val="12263A"/>
                 </a:solidFill>
                 <a:latin typeface="Calibri"/>
               </a:rPr>
-              <a:t>Le responsable d’équipe voit la pastille et reçoit la remarque du client.</a:t>
-            </a:r>
-          </a:p>
-        </p:txBody>
-      </p:sp>
-      <p:sp>
-        <p:nvSpPr>
-          <p:cNvPr id="16" name="Rounded Rectangle 15"/>
-          <p:cNvSpPr/>
-          <p:nvPr/>
-        </p:nvSpPr>
-        <p:spPr>
-          <a:xfrm>
-            <a:off x="548640" y="4251960"/>
-            <a:ext cx="5486400" cy="1920240"/>
-          </a:xfrm>
-          <a:prstGeom prst="roundRect">
-            <a:avLst>
-              <a:gd name="adj" fmla="val 6000"/>
-            </a:avLst>
-          </a:prstGeom>
-          <a:solidFill>
-            <a:srgbClr val="FFFFFF"/>
-          </a:solidFill>
-          <a:ln>
-            <a:solidFill>
-              <a:srgbClr val="D9DFE5"/>
-            </a:solidFill>
-          </a:ln>
-          <a:effectLst/>
-        </p:spPr>
-        <p:style>
-          <a:lnRef idx="1">
-            <a:schemeClr val="accent1"/>
-          </a:lnRef>
-          <a:fillRef idx="3">
-            <a:schemeClr val="accent1"/>
-          </a:fillRef>
-          <a:effectRef idx="2">
-            <a:schemeClr val="accent1"/>
-          </a:effectRef>
-          <a:fontRef idx="minor">
-            <a:schemeClr val="lt1"/>
-          </a:fontRef>
-        </p:style>
-        <p:txBody>
-          <a:bodyPr rtlCol="0" anchor="ctr"/>
-          <a:lstStyle/>
-          <a:p>
-            <a:pPr algn="ctr"/>
-          </a:p>
-        </p:txBody>
-      </p:sp>
-      <p:sp>
-        <p:nvSpPr>
-          <p:cNvPr id="17" name="TextBox 16"/>
-          <p:cNvSpPr txBox="1"/>
-          <p:nvPr/>
-        </p:nvSpPr>
-        <p:spPr>
-          <a:xfrm>
-            <a:off x="731520" y="4389120"/>
-            <a:ext cx="5120640" cy="457200"/>
-          </a:xfrm>
-          <a:prstGeom prst="rect">
-            <a:avLst/>
-          </a:prstGeom>
-          <a:noFill/>
-        </p:spPr>
-        <p:txBody>
-          <a:bodyPr wrap="square" anchor="t" lIns="45720" rIns="45720" tIns="27432" bIns="27432">
-            <a:spAutoFit/>
-          </a:bodyPr>
-          <a:lstStyle/>
-          <a:p>
-            <a:pPr algn="l"/>
-            <a:r>
-              <a:rPr sz="1700" b="1" i="0">
+              <a:t> — mêmes quantités, mêmes prix</a:t>
+            </a:r>
+          </a:p>
+          <a:p>
+            <a:pPr>
+              <a:spcAft>
+                <a:spcPts val="1200"/>
+              </a:spcAft>
+            </a:pPr>
+            <a:r>
+              <a:rPr sz="1200">
+                <a:solidFill>
+                  <a:srgbClr val="2FB5B4"/>
+                </a:solidFill>
+                <a:latin typeface="Calibri"/>
+              </a:rPr>
+              <a:t>● </a:t>
+            </a:r>
+            <a:r>
+              <a:rPr sz="1600" b="1">
                 <a:solidFill>
                   <a:srgbClr val="0E4377"/>
                 </a:solidFill>
                 <a:latin typeface="Calibri"/>
               </a:rPr>
-              <a:t>Accès envoyés par e-mail</a:t>
-            </a:r>
-          </a:p>
-        </p:txBody>
-      </p:sp>
-      <p:sp>
-        <p:nvSpPr>
-          <p:cNvPr id="18" name="TextBox 17"/>
-          <p:cNvSpPr txBox="1"/>
-          <p:nvPr/>
-        </p:nvSpPr>
-        <p:spPr>
-          <a:xfrm>
-            <a:off x="731520" y="4937760"/>
-            <a:ext cx="5120640" cy="1097280"/>
-          </a:xfrm>
-          <a:prstGeom prst="rect">
-            <a:avLst/>
-          </a:prstGeom>
-          <a:noFill/>
-        </p:spPr>
-        <p:txBody>
-          <a:bodyPr wrap="square" anchor="t" lIns="45720" rIns="45720" tIns="27432" bIns="27432">
-            <a:spAutoFit/>
-          </a:bodyPr>
-          <a:lstStyle/>
-          <a:p>
-            <a:pPr algn="l"/>
-            <a:r>
-              <a:rPr sz="1500" b="0" i="0">
+              <a:t>Facture</a:t>
+            </a:r>
+            <a:r>
+              <a:rPr sz="1500">
                 <a:solidFill>
                   <a:srgbClr val="12263A"/>
                 </a:solidFill>
                 <a:latin typeface="Calibri"/>
               </a:rPr>
-              <a:t>À la création d'un agent, ou à tout moment : lien, identifiant et mot de passe provisoire.</a:t>
-            </a:r>
-          </a:p>
-        </p:txBody>
-      </p:sp>
-      <p:sp>
-        <p:nvSpPr>
-          <p:cNvPr id="19" name="Rounded Rectangle 18"/>
-          <p:cNvSpPr/>
-          <p:nvPr/>
-        </p:nvSpPr>
-        <p:spPr>
-          <a:xfrm>
-            <a:off x="6217920" y="4251960"/>
-            <a:ext cx="5394960" cy="1920240"/>
-          </a:xfrm>
-          <a:prstGeom prst="roundRect">
-            <a:avLst>
-              <a:gd name="adj" fmla="val 6000"/>
-            </a:avLst>
-          </a:prstGeom>
-          <a:solidFill>
-            <a:srgbClr val="FFFFFF"/>
-          </a:solidFill>
-          <a:ln>
-            <a:solidFill>
-              <a:srgbClr val="D9DFE5"/>
-            </a:solidFill>
-          </a:ln>
-          <a:effectLst/>
-        </p:spPr>
-        <p:style>
-          <a:lnRef idx="1">
-            <a:schemeClr val="accent1"/>
-          </a:lnRef>
-          <a:fillRef idx="3">
-            <a:schemeClr val="accent1"/>
-          </a:fillRef>
-          <a:effectRef idx="2">
-            <a:schemeClr val="accent1"/>
-          </a:effectRef>
-          <a:fontRef idx="minor">
-            <a:schemeClr val="lt1"/>
-          </a:fontRef>
-        </p:style>
-        <p:txBody>
-          <a:bodyPr rtlCol="0" anchor="ctr"/>
-          <a:lstStyle/>
-          <a:p>
-            <a:pPr algn="ctr"/>
-          </a:p>
-        </p:txBody>
-      </p:sp>
-      <p:sp>
-        <p:nvSpPr>
-          <p:cNvPr id="20" name="TextBox 19"/>
-          <p:cNvSpPr txBox="1"/>
-          <p:nvPr/>
-        </p:nvSpPr>
-        <p:spPr>
-          <a:xfrm>
-            <a:off x="6400800" y="4389120"/>
-            <a:ext cx="5029200" cy="457200"/>
-          </a:xfrm>
-          <a:prstGeom prst="rect">
-            <a:avLst/>
-          </a:prstGeom>
-          <a:noFill/>
-        </p:spPr>
-        <p:txBody>
-          <a:bodyPr wrap="square" anchor="t" lIns="45720" rIns="45720" tIns="27432" bIns="27432">
-            <a:spAutoFit/>
-          </a:bodyPr>
-          <a:lstStyle/>
-          <a:p>
-            <a:pPr algn="l"/>
-            <a:r>
-              <a:rPr sz="1700" b="1" i="0">
+              <a:t> — numéro, date, PDF et Excel</a:t>
+            </a:r>
+          </a:p>
+          <a:p>
+            <a:pPr>
+              <a:spcAft>
+                <a:spcPts val="1200"/>
+              </a:spcAft>
+            </a:pPr>
+            <a:r>
+              <a:rPr sz="1200">
+                <a:solidFill>
+                  <a:srgbClr val="2FB5B4"/>
+                </a:solidFill>
+                <a:latin typeface="Calibri"/>
+              </a:rPr>
+              <a:t>● </a:t>
+            </a:r>
+            <a:r>
+              <a:rPr sz="1600" b="1">
                 <a:solidFill>
                   <a:srgbClr val="0E4377"/>
                 </a:solidFill>
                 <a:latin typeface="Calibri"/>
               </a:rPr>
-              <a:t>Demandes groupées</a:t>
-            </a:r>
-          </a:p>
-        </p:txBody>
-      </p:sp>
-      <p:sp>
-        <p:nvSpPr>
-          <p:cNvPr id="21" name="TextBox 20"/>
-          <p:cNvSpPr txBox="1"/>
-          <p:nvPr/>
-        </p:nvSpPr>
-        <p:spPr>
-          <a:xfrm>
-            <a:off x="6400800" y="4937760"/>
-            <a:ext cx="5029200" cy="1097280"/>
-          </a:xfrm>
-          <a:prstGeom prst="rect">
-            <a:avLst/>
-          </a:prstGeom>
-          <a:noFill/>
-        </p:spPr>
-        <p:txBody>
-          <a:bodyPr wrap="square" anchor="t" lIns="45720" rIns="45720" tIns="27432" bIns="27432">
-            <a:spAutoFit/>
-          </a:bodyPr>
-          <a:lstStyle/>
-          <a:p>
-            <a:pPr algn="l"/>
-            <a:r>
-              <a:rPr sz="1500" b="0" i="0">
+              <a:t>Brouillon du mois suivant</a:t>
+            </a:r>
+            <a:r>
+              <a:rPr sz="1500">
                 <a:solidFill>
                   <a:srgbClr val="12263A"/>
                 </a:solidFill>
                 <a:latin typeface="Calibri"/>
               </a:rPr>
-              <a:t>Une seule demande par e-mail à la direction, avec la réponse appliquée à toutes.</a:t>
+              <a:t> — à titre indicatif</a:t>
             </a:r>
           </a:p>
         </p:txBody>
@@ -6057,7 +5510,7 @@
                 </a:solidFill>
                 <a:latin typeface="Calibri"/>
               </a:rPr>
-              <a:t>Français, arabe, anglais — et mode sombre</a:t>
+              <a:t>Votre client suit, et vous répond</a:t>
             </a:r>
           </a:p>
         </p:txBody>
@@ -6092,7 +5545,7 @@
                 </a:solidFill>
                 <a:latin typeface="Calibri"/>
               </a:rPr>
-              <a:t>Chacun travaille dans sa langue, de droite à gauche en arabe</a:t>
+              <a:t>Un compte de consultation créé tout seul, limité à son contrat</a:t>
             </a:r>
           </a:p>
         </p:txBody>
@@ -6134,7 +5587,7 @@
       </p:sp>
       <p:pic>
         <p:nvPicPr>
-          <p:cNvPr id="7" name="Picture 6" descr="92-arabe.png"/>
+          <p:cNvPr id="7" name="Picture 6" descr="81-client-remarque.png"/>
           <p:cNvPicPr>
             <a:picLocks noChangeAspect="1"/>
           </p:cNvPicPr>
@@ -6163,7 +5616,7 @@
       </p:pic>
       <p:pic>
         <p:nvPicPr>
-          <p:cNvPr id="8" name="Picture 7" descr="91-mode-sombre.png"/>
+          <p:cNvPr id="8" name="Picture 7" descr="83-remarque-prestataire.png"/>
           <p:cNvPicPr>
             <a:picLocks noChangeAspect="1"/>
           </p:cNvPicPr>
@@ -6198,8 +5651,8 @@
         </p:nvSpPr>
         <p:spPr>
           <a:xfrm>
-            <a:off x="548640" y="5257800"/>
-            <a:ext cx="11064240" cy="1371600"/>
+            <a:off x="548640" y="5029200"/>
+            <a:ext cx="5577840" cy="4572000"/>
           </a:xfrm>
           <a:prstGeom prst="rect">
             <a:avLst/>
@@ -6207,32 +5660,167 @@
           <a:noFill/>
         </p:spPr>
         <p:txBody>
-          <a:bodyPr wrap="square" anchor="t" lIns="45720" rIns="45720" tIns="27432" bIns="27432">
+          <a:bodyPr wrap="square">
             <a:spAutoFit/>
           </a:bodyPr>
           <a:lstStyle/>
           <a:p>
-            <a:pPr algn="l"/>
-            <a:r>
-              <a:rPr sz="1800" b="0" i="0">
+            <a:pPr>
+              <a:spcAft>
+                <a:spcPts val="800"/>
+              </a:spcAft>
+            </a:pPr>
+            <a:r>
+              <a:rPr sz="1100">
+                <a:solidFill>
+                  <a:srgbClr val="2FB5B4"/>
+                </a:solidFill>
+                <a:latin typeface="Calibri"/>
+              </a:rPr>
+              <a:t>● </a:t>
+            </a:r>
+            <a:r>
+              <a:rPr sz="1500" b="1">
                 <a:solidFill>
                   <a:srgbClr val="0E4377"/>
                 </a:solidFill>
                 <a:latin typeface="Calibri"/>
               </a:rPr>
-              <a:t>Application installable sur téléphone, en plein écran.</a:t>
-            </a:r>
-          </a:p>
-          <a:p>
-            <a:pPr algn="l"/>
-            <a:r>
-              <a:rPr sz="1800" b="0" i="0">
+              <a:t>Un clic sur un jour</a:t>
+            </a:r>
+            <a:r>
+              <a:rPr sz="1400">
+                <a:solidFill>
+                  <a:srgbClr val="12263A"/>
+                </a:solidFill>
+                <a:latin typeface="Calibri"/>
+              </a:rPr>
+              <a:t> — le client laisse sa remarque</a:t>
+            </a:r>
+          </a:p>
+          <a:p>
+            <a:pPr>
+              <a:spcAft>
+                <a:spcPts val="800"/>
+              </a:spcAft>
+            </a:pPr>
+            <a:r>
+              <a:rPr sz="1100">
+                <a:solidFill>
+                  <a:srgbClr val="2FB5B4"/>
+                </a:solidFill>
+                <a:latin typeface="Calibri"/>
+              </a:rPr>
+              <a:t>● </a:t>
+            </a:r>
+            <a:r>
+              <a:rPr sz="1500" b="1">
                 <a:solidFill>
                   <a:srgbClr val="0E4377"/>
                 </a:solidFill>
                 <a:latin typeface="Calibri"/>
               </a:rPr>
-              <a:t>Langue et mode sombre : un petit sélecteur discret en bas à droite.</a:t>
+              <a:t>Il ne modifie rien</a:t>
+            </a:r>
+            <a:r>
+              <a:rPr sz="1400">
+                <a:solidFill>
+                  <a:srgbClr val="12263A"/>
+                </a:solidFill>
+                <a:latin typeface="Calibri"/>
+              </a:rPr>
+              <a:t> — lecture seule</a:t>
+            </a:r>
+          </a:p>
+        </p:txBody>
+      </p:sp>
+      <p:sp>
+        <p:nvSpPr>
+          <p:cNvPr id="10" name="TextBox 9"/>
+          <p:cNvSpPr txBox="1"/>
+          <p:nvPr/>
+        </p:nvSpPr>
+        <p:spPr>
+          <a:xfrm>
+            <a:off x="6309360" y="5029200"/>
+            <a:ext cx="5577840" cy="4572000"/>
+          </a:xfrm>
+          <a:prstGeom prst="rect">
+            <a:avLst/>
+          </a:prstGeom>
+          <a:noFill/>
+        </p:spPr>
+        <p:txBody>
+          <a:bodyPr wrap="square">
+            <a:spAutoFit/>
+          </a:bodyPr>
+          <a:lstStyle/>
+          <a:p>
+            <a:pPr>
+              <a:spcAft>
+                <a:spcPts val="800"/>
+              </a:spcAft>
+            </a:pPr>
+            <a:r>
+              <a:rPr sz="1100">
+                <a:solidFill>
+                  <a:srgbClr val="2FB5B4"/>
+                </a:solidFill>
+                <a:latin typeface="Calibri"/>
+              </a:rPr>
+              <a:t>● </a:t>
+            </a:r>
+            <a:r>
+              <a:rPr sz="1500" b="1">
+                <a:solidFill>
+                  <a:srgbClr val="0E4377"/>
+                </a:solidFill>
+                <a:latin typeface="Calibri"/>
+              </a:rPr>
+              <a:t>Repère rouge dans la grille</a:t>
+            </a:r>
+            <a:r>
+              <a:rPr sz="1400">
+                <a:solidFill>
+                  <a:srgbClr val="12263A"/>
+                </a:solidFill>
+                <a:latin typeface="Calibri"/>
+              </a:rPr>
+              <a:t> — et e-mail au responsable d’équipe</a:t>
+            </a:r>
+          </a:p>
+          <a:p>
+            <a:pPr>
+              <a:spcAft>
+                <a:spcPts val="800"/>
+              </a:spcAft>
+            </a:pPr>
+            <a:r>
+              <a:rPr sz="1100">
+                <a:solidFill>
+                  <a:srgbClr val="2FB5B4"/>
+                </a:solidFill>
+                <a:latin typeface="Calibri"/>
+              </a:rPr>
+              <a:t>● </a:t>
+            </a:r>
+            <a:r>
+              <a:rPr sz="1500" b="1">
+                <a:solidFill>
+                  <a:srgbClr val="0E4377"/>
+                </a:solidFill>
+                <a:latin typeface="Calibri"/>
+              </a:rPr>
+              <a:t>« Vu » et réponse</a:t>
+            </a:r>
+            <a:r>
+              <a:rPr sz="1400">
+                <a:solidFill>
+                  <a:srgbClr val="12263A"/>
+                </a:solidFill>
+                <a:latin typeface="Calibri"/>
+              </a:rPr>
+              <a:t> — le client voit la réponse</a:t>
             </a:r>
           </a:p>
         </p:txBody>
@@ -6372,7 +5960,7 @@
                 </a:solidFill>
                 <a:latin typeface="Calibri"/>
               </a:rPr>
-              <a:t>Vos données restent chez vous</a:t>
+              <a:t>Tout le monde est prévenu au bon moment</a:t>
             </a:r>
           </a:p>
         </p:txBody>
@@ -6407,7 +5995,7 @@
                 </a:solidFill>
                 <a:latin typeface="Calibri"/>
               </a:rPr>
-              <a:t>Un classeur Google par entreprise, jamais mélangé</a:t>
+              <a:t>Pastilles, messages à l'écran et e-mails</a:t>
             </a:r>
           </a:p>
         </p:txBody>
@@ -6449,14 +6037,62 @@
       </p:sp>
       <p:sp>
         <p:nvSpPr>
-          <p:cNvPr id="7" name="TextBox 6"/>
+          <p:cNvPr id="7" name="Rounded Rectangle 6"/>
+          <p:cNvSpPr/>
+          <p:nvPr/>
+        </p:nvSpPr>
+        <p:spPr>
+          <a:xfrm>
+            <a:off x="548640" y="1737360"/>
+            <a:ext cx="3566160" cy="2286000"/>
+          </a:xfrm>
+          <a:prstGeom prst="roundRect">
+            <a:avLst>
+              <a:gd name="adj" fmla="val 6000"/>
+            </a:avLst>
+          </a:prstGeom>
+          <a:solidFill>
+            <a:srgbClr val="FFFFFF"/>
+          </a:solidFill>
+          <a:ln>
+            <a:solidFill>
+              <a:srgbClr val="D9DFE5"/>
+            </a:solidFill>
+          </a:ln>
+          <a:effectLst/>
+        </p:spPr>
+        <p:style>
+          <a:lnRef idx="1">
+            <a:schemeClr val="accent1"/>
+          </a:lnRef>
+          <a:fillRef idx="3">
+            <a:schemeClr val="accent1"/>
+          </a:fillRef>
+          <a:effectRef idx="2">
+            <a:schemeClr val="accent1"/>
+          </a:effectRef>
+          <a:fontRef idx="minor">
+            <a:schemeClr val="lt1"/>
+          </a:fontRef>
+        </p:style>
+        <p:txBody>
+          <a:bodyPr rtlCol="0" anchor="ctr"/>
+          <a:lstStyle/>
+          <a:p>
+            <a:pPr algn="ctr"/>
+          </a:p>
+        </p:txBody>
+      </p:sp>
+      <p:sp>
+        <p:nvSpPr>
+          <p:cNvPr id="8" name="TextBox 7"/>
           <p:cNvSpPr txBox="1"/>
           <p:nvPr/>
         </p:nvSpPr>
         <p:spPr>
           <a:xfrm>
-            <a:off x="548640" y="1737360"/>
-            <a:ext cx="5669280" cy="4572000"/>
+            <a:off x="731520" y="1874519"/>
+            <a:ext cx="3200400" cy="457200"/>
           </a:xfrm>
           <a:prstGeom prst="rect">
             <a:avLst/>
@@ -6464,279 +6100,531 @@
           <a:noFill/>
         </p:spPr>
         <p:txBody>
-          <a:bodyPr wrap="square">
+          <a:bodyPr wrap="square" anchor="t" lIns="45720" rIns="45720" tIns="27432" bIns="27432">
             <a:spAutoFit/>
           </a:bodyPr>
           <a:lstStyle/>
           <a:p>
-            <a:pPr>
-              <a:spcAft>
-                <a:spcPts val="1000"/>
-              </a:spcAft>
-            </a:pPr>
-            <a:r>
-              <a:rPr sz="1200">
-                <a:solidFill>
-                  <a:srgbClr val="2FB5B4"/>
-                </a:solidFill>
-                <a:latin typeface="Calibri"/>
-              </a:rPr>
-              <a:t>● </a:t>
-            </a:r>
-            <a:r>
-              <a:rPr sz="1600" b="1">
+            <a:pPr algn="l"/>
+            <a:r>
+              <a:rPr sz="1700" b="1" i="0">
                 <a:solidFill>
                   <a:srgbClr val="0E4377"/>
                 </a:solidFill>
                 <a:latin typeface="Calibri"/>
               </a:rPr>
-              <a:t>Un classeur par entreprise</a:t>
-            </a:r>
-            <a:r>
-              <a:rPr sz="1500">
+              <a:t>Nouveau document</a:t>
+            </a:r>
+          </a:p>
+        </p:txBody>
+      </p:sp>
+      <p:sp>
+        <p:nvSpPr>
+          <p:cNvPr id="9" name="TextBox 8"/>
+          <p:cNvSpPr txBox="1"/>
+          <p:nvPr/>
+        </p:nvSpPr>
+        <p:spPr>
+          <a:xfrm>
+            <a:off x="731520" y="2423160"/>
+            <a:ext cx="3200400" cy="1463040"/>
+          </a:xfrm>
+          <a:prstGeom prst="rect">
+            <a:avLst/>
+          </a:prstGeom>
+          <a:noFill/>
+        </p:spPr>
+        <p:txBody>
+          <a:bodyPr wrap="square" anchor="t" lIns="45720" rIns="45720" tIns="27432" bIns="27432">
+            <a:spAutoFit/>
+          </a:bodyPr>
+          <a:lstStyle/>
+          <a:p>
+            <a:pPr algn="l"/>
+            <a:r>
+              <a:rPr sz="1500" b="0" i="0">
                 <a:solidFill>
                   <a:srgbClr val="12263A"/>
                 </a:solidFill>
                 <a:latin typeface="Calibri"/>
               </a:rPr>
-              <a:t> — vous pouvez l'ouvrir à tout moment</a:t>
-            </a:r>
-          </a:p>
-          <a:p>
-            <a:pPr>
-              <a:spcAft>
-                <a:spcPts val="1000"/>
-              </a:spcAft>
-            </a:pPr>
-            <a:r>
-              <a:rPr sz="1200">
-                <a:solidFill>
-                  <a:srgbClr val="2FB5B4"/>
-                </a:solidFill>
-                <a:latin typeface="Calibri"/>
-              </a:rPr>
-              <a:t>● </a:t>
-            </a:r>
-            <a:r>
-              <a:rPr sz="1600" b="1">
-                <a:solidFill>
-                  <a:srgbClr val="0E4377"/>
-                </a:solidFill>
-                <a:latin typeface="Calibri"/>
-              </a:rPr>
-              <a:t>Mots de passe</a:t>
-            </a:r>
-            <a:r>
-              <a:rPr sz="1500">
-                <a:solidFill>
-                  <a:srgbClr val="12263A"/>
-                </a:solidFill>
-                <a:latin typeface="Calibri"/>
-              </a:rPr>
-              <a:t> — jamais stockés en clair, connexions limitées</a:t>
-            </a:r>
-          </a:p>
-          <a:p>
-            <a:pPr>
-              <a:spcAft>
-                <a:spcPts val="1000"/>
-              </a:spcAft>
-            </a:pPr>
-            <a:r>
-              <a:rPr sz="1200">
-                <a:solidFill>
-                  <a:srgbClr val="2FB5B4"/>
-                </a:solidFill>
-                <a:latin typeface="Calibri"/>
-              </a:rPr>
-              <a:t>● </a:t>
-            </a:r>
-            <a:r>
-              <a:rPr sz="1600" b="1">
-                <a:solidFill>
-                  <a:srgbClr val="0E4377"/>
-                </a:solidFill>
-                <a:latin typeface="Calibri"/>
-              </a:rPr>
-              <a:t>Droits par profil</a:t>
-            </a:r>
-            <a:r>
-              <a:rPr sz="1500">
-                <a:solidFill>
-                  <a:srgbClr val="12263A"/>
-                </a:solidFill>
-                <a:latin typeface="Calibri"/>
-              </a:rPr>
-              <a:t> — chacun ne voit que son périmètre</a:t>
-            </a:r>
-          </a:p>
-          <a:p>
-            <a:pPr>
-              <a:spcAft>
-                <a:spcPts val="1000"/>
-              </a:spcAft>
-            </a:pPr>
-            <a:r>
-              <a:rPr sz="1200">
-                <a:solidFill>
-                  <a:srgbClr val="2FB5B4"/>
-                </a:solidFill>
-                <a:latin typeface="Calibri"/>
-              </a:rPr>
-              <a:t>● </a:t>
-            </a:r>
-            <a:r>
-              <a:rPr sz="1600" b="1">
-                <a:solidFill>
-                  <a:srgbClr val="0E4377"/>
-                </a:solidFill>
-                <a:latin typeface="Calibri"/>
-              </a:rPr>
-              <a:t>Textes saisis</a:t>
-            </a:r>
-            <a:r>
-              <a:rPr sz="1500">
-                <a:solidFill>
-                  <a:srgbClr val="12263A"/>
-                </a:solidFill>
-                <a:latin typeface="Calibri"/>
-              </a:rPr>
-              <a:t> — jamais exécutés comme des formules</a:t>
-            </a:r>
-          </a:p>
-          <a:p>
-            <a:pPr>
-              <a:spcAft>
-                <a:spcPts val="1000"/>
-              </a:spcAft>
-            </a:pPr>
-            <a:r>
-              <a:rPr sz="1200">
-                <a:solidFill>
-                  <a:srgbClr val="2FB5B4"/>
-                </a:solidFill>
-                <a:latin typeface="Calibri"/>
-              </a:rPr>
-              <a:t>● </a:t>
-            </a:r>
-            <a:r>
-              <a:rPr sz="1600" b="1">
-                <a:solidFill>
-                  <a:srgbClr val="0E4377"/>
-                </a:solidFill>
-                <a:latin typeface="Calibri"/>
-              </a:rPr>
-              <a:t>Sauvegarde et restauration</a:t>
-            </a:r>
-            <a:r>
-              <a:rPr sz="1500">
-                <a:solidFill>
-                  <a:srgbClr val="12263A"/>
-                </a:solidFill>
-                <a:latin typeface="Calibri"/>
-              </a:rPr>
-              <a:t> — en un clic</a:t>
-            </a:r>
-          </a:p>
-          <a:p>
-            <a:pPr>
-              <a:spcAft>
-                <a:spcPts val="1000"/>
-              </a:spcAft>
-            </a:pPr>
-            <a:r>
-              <a:rPr sz="1200">
-                <a:solidFill>
-                  <a:srgbClr val="2FB5B4"/>
-                </a:solidFill>
-                <a:latin typeface="Calibri"/>
-              </a:rPr>
-              <a:t>● </a:t>
-            </a:r>
-            <a:r>
-              <a:rPr sz="1600" b="1">
-                <a:solidFill>
-                  <a:srgbClr val="0E4377"/>
-                </a:solidFill>
-                <a:latin typeface="Calibri"/>
-              </a:rPr>
-              <a:t>Export et import Excel</a:t>
-            </a:r>
-            <a:r>
-              <a:rPr sz="1500">
-                <a:solidFill>
-                  <a:srgbClr val="12263A"/>
-                </a:solidFill>
-                <a:latin typeface="Calibri"/>
-              </a:rPr>
-              <a:t> — vos données ne sont pas prisonnières</a:t>
-            </a:r>
-          </a:p>
-          <a:p>
-            <a:pPr>
-              <a:spcAft>
-                <a:spcPts val="1000"/>
-              </a:spcAft>
-            </a:pPr>
-            <a:r>
-              <a:rPr sz="1200">
-                <a:solidFill>
-                  <a:srgbClr val="2FB5B4"/>
-                </a:solidFill>
-                <a:latin typeface="Calibri"/>
-              </a:rPr>
-              <a:t>● </a:t>
-            </a:r>
-            <a:r>
-              <a:rPr sz="1600" b="1">
-                <a:solidFill>
-                  <a:srgbClr val="0E4377"/>
-                </a:solidFill>
-                <a:latin typeface="Calibri"/>
-              </a:rPr>
-              <a:t>Charte de confidentialité</a:t>
-            </a:r>
-            <a:r>
-              <a:rPr sz="1500">
-                <a:solidFill>
-                  <a:srgbClr val="12263A"/>
-                </a:solidFill>
-                <a:latin typeface="Calibri"/>
-              </a:rPr>
-              <a:t> — visible sur chaque page</a:t>
-            </a:r>
-          </a:p>
-        </p:txBody>
-      </p:sp>
-      <p:pic>
-        <p:nvPicPr>
-          <p:cNvPr id="8" name="Picture 7" descr="43-setup-maintenance.png"/>
-          <p:cNvPicPr>
-            <a:picLocks noChangeAspect="1"/>
-          </p:cNvPicPr>
-          <p:nvPr/>
-        </p:nvPicPr>
-        <p:blipFill>
-          <a:blip r:embed="rId2"/>
-          <a:stretch>
-            <a:fillRect/>
-          </a:stretch>
-        </p:blipFill>
-        <p:spPr>
-          <a:xfrm>
-            <a:off x="6949440" y="1600200"/>
-            <a:ext cx="4768630" cy="4663440"/>
-          </a:xfrm>
-          <a:prstGeom prst="rect">
-            <a:avLst/>
-          </a:prstGeom>
-          <a:ln w="9525">
+              <a:t>Pastille « Mes documents », message à l'écran et e-mail avec le nom du fichier.</a:t>
+            </a:r>
+          </a:p>
+        </p:txBody>
+      </p:sp>
+      <p:sp>
+        <p:nvSpPr>
+          <p:cNvPr id="10" name="Rounded Rectangle 9"/>
+          <p:cNvSpPr/>
+          <p:nvPr/>
+        </p:nvSpPr>
+        <p:spPr>
+          <a:xfrm>
+            <a:off x="4297680" y="1737360"/>
+            <a:ext cx="3566160" cy="2286000"/>
+          </a:xfrm>
+          <a:prstGeom prst="roundRect">
+            <a:avLst>
+              <a:gd name="adj" fmla="val 6000"/>
+            </a:avLst>
+          </a:prstGeom>
+          <a:solidFill>
+            <a:srgbClr val="FFFFFF"/>
+          </a:solidFill>
+          <a:ln>
             <a:solidFill>
-              <a:srgbClr val="D0D7DE"/>
+              <a:srgbClr val="D9DFE5"/>
             </a:solidFill>
           </a:ln>
-        </p:spPr>
-      </p:pic>
+          <a:effectLst/>
+        </p:spPr>
+        <p:style>
+          <a:lnRef idx="1">
+            <a:schemeClr val="accent1"/>
+          </a:lnRef>
+          <a:fillRef idx="3">
+            <a:schemeClr val="accent1"/>
+          </a:fillRef>
+          <a:effectRef idx="2">
+            <a:schemeClr val="accent1"/>
+          </a:effectRef>
+          <a:fontRef idx="minor">
+            <a:schemeClr val="lt1"/>
+          </a:fontRef>
+        </p:style>
+        <p:txBody>
+          <a:bodyPr rtlCol="0" anchor="ctr"/>
+          <a:lstStyle/>
+          <a:p>
+            <a:pPr algn="ctr"/>
+          </a:p>
+        </p:txBody>
+      </p:sp>
+      <p:sp>
+        <p:nvSpPr>
+          <p:cNvPr id="11" name="TextBox 10"/>
+          <p:cNvSpPr txBox="1"/>
+          <p:nvPr/>
+        </p:nvSpPr>
+        <p:spPr>
+          <a:xfrm>
+            <a:off x="4480560" y="1874519"/>
+            <a:ext cx="3200400" cy="457200"/>
+          </a:xfrm>
+          <a:prstGeom prst="rect">
+            <a:avLst/>
+          </a:prstGeom>
+          <a:noFill/>
+        </p:spPr>
+        <p:txBody>
+          <a:bodyPr wrap="square" anchor="t" lIns="45720" rIns="45720" tIns="27432" bIns="27432">
+            <a:spAutoFit/>
+          </a:bodyPr>
+          <a:lstStyle/>
+          <a:p>
+            <a:pPr algn="l"/>
+            <a:r>
+              <a:rPr sz="1700" b="1" i="0">
+                <a:solidFill>
+                  <a:srgbClr val="0E4377"/>
+                </a:solidFill>
+                <a:latin typeface="Calibri"/>
+              </a:rPr>
+              <a:t>Nouvelle demande</a:t>
+            </a:r>
+          </a:p>
+        </p:txBody>
+      </p:sp>
+      <p:sp>
+        <p:nvSpPr>
+          <p:cNvPr id="12" name="TextBox 11"/>
+          <p:cNvSpPr txBox="1"/>
+          <p:nvPr/>
+        </p:nvSpPr>
+        <p:spPr>
+          <a:xfrm>
+            <a:off x="4480560" y="2423160"/>
+            <a:ext cx="3200400" cy="1463040"/>
+          </a:xfrm>
+          <a:prstGeom prst="rect">
+            <a:avLst/>
+          </a:prstGeom>
+          <a:noFill/>
+        </p:spPr>
+        <p:txBody>
+          <a:bodyPr wrap="square" anchor="t" lIns="45720" rIns="45720" tIns="27432" bIns="27432">
+            <a:spAutoFit/>
+          </a:bodyPr>
+          <a:lstStyle/>
+          <a:p>
+            <a:pPr algn="l"/>
+            <a:r>
+              <a:rPr sz="1500" b="0" i="0">
+                <a:solidFill>
+                  <a:srgbClr val="12263A"/>
+                </a:solidFill>
+                <a:latin typeface="Calibri"/>
+              </a:rPr>
+              <a:t>Le responsable d’équipe est prévenu avec les dates et la date de reprise.</a:t>
+            </a:r>
+          </a:p>
+        </p:txBody>
+      </p:sp>
+      <p:sp>
+        <p:nvSpPr>
+          <p:cNvPr id="13" name="Rounded Rectangle 12"/>
+          <p:cNvSpPr/>
+          <p:nvPr/>
+        </p:nvSpPr>
+        <p:spPr>
+          <a:xfrm>
+            <a:off x="8046720" y="1737360"/>
+            <a:ext cx="3566160" cy="2286000"/>
+          </a:xfrm>
+          <a:prstGeom prst="roundRect">
+            <a:avLst>
+              <a:gd name="adj" fmla="val 6000"/>
+            </a:avLst>
+          </a:prstGeom>
+          <a:solidFill>
+            <a:srgbClr val="FFFFFF"/>
+          </a:solidFill>
+          <a:ln>
+            <a:solidFill>
+              <a:srgbClr val="D9DFE5"/>
+            </a:solidFill>
+          </a:ln>
+          <a:effectLst/>
+        </p:spPr>
+        <p:style>
+          <a:lnRef idx="1">
+            <a:schemeClr val="accent1"/>
+          </a:lnRef>
+          <a:fillRef idx="3">
+            <a:schemeClr val="accent1"/>
+          </a:fillRef>
+          <a:effectRef idx="2">
+            <a:schemeClr val="accent1"/>
+          </a:effectRef>
+          <a:fontRef idx="minor">
+            <a:schemeClr val="lt1"/>
+          </a:fontRef>
+        </p:style>
+        <p:txBody>
+          <a:bodyPr rtlCol="0" anchor="ctr"/>
+          <a:lstStyle/>
+          <a:p>
+            <a:pPr algn="ctr"/>
+          </a:p>
+        </p:txBody>
+      </p:sp>
+      <p:sp>
+        <p:nvSpPr>
+          <p:cNvPr id="14" name="TextBox 13"/>
+          <p:cNvSpPr txBox="1"/>
+          <p:nvPr/>
+        </p:nvSpPr>
+        <p:spPr>
+          <a:xfrm>
+            <a:off x="8229600" y="1874519"/>
+            <a:ext cx="3200400" cy="457200"/>
+          </a:xfrm>
+          <a:prstGeom prst="rect">
+            <a:avLst/>
+          </a:prstGeom>
+          <a:noFill/>
+        </p:spPr>
+        <p:txBody>
+          <a:bodyPr wrap="square" anchor="t" lIns="45720" rIns="45720" tIns="27432" bIns="27432">
+            <a:spAutoFit/>
+          </a:bodyPr>
+          <a:lstStyle/>
+          <a:p>
+            <a:pPr algn="l"/>
+            <a:r>
+              <a:rPr sz="1700" b="1" i="0">
+                <a:solidFill>
+                  <a:srgbClr val="0E4377"/>
+                </a:solidFill>
+                <a:latin typeface="Calibri"/>
+              </a:rPr>
+              <a:t>Nouvelle remarque</a:t>
+            </a:r>
+          </a:p>
+        </p:txBody>
+      </p:sp>
+      <p:sp>
+        <p:nvSpPr>
+          <p:cNvPr id="15" name="TextBox 14"/>
+          <p:cNvSpPr txBox="1"/>
+          <p:nvPr/>
+        </p:nvSpPr>
+        <p:spPr>
+          <a:xfrm>
+            <a:off x="8229600" y="2423160"/>
+            <a:ext cx="3200400" cy="1463040"/>
+          </a:xfrm>
+          <a:prstGeom prst="rect">
+            <a:avLst/>
+          </a:prstGeom>
+          <a:noFill/>
+        </p:spPr>
+        <p:txBody>
+          <a:bodyPr wrap="square" anchor="t" lIns="45720" rIns="45720" tIns="27432" bIns="27432">
+            <a:spAutoFit/>
+          </a:bodyPr>
+          <a:lstStyle/>
+          <a:p>
+            <a:pPr algn="l"/>
+            <a:r>
+              <a:rPr sz="1500" b="0" i="0">
+                <a:solidFill>
+                  <a:srgbClr val="12263A"/>
+                </a:solidFill>
+                <a:latin typeface="Calibri"/>
+              </a:rPr>
+              <a:t>Le responsable d’équipe voit la pastille et reçoit la remarque du client.</a:t>
+            </a:r>
+          </a:p>
+        </p:txBody>
+      </p:sp>
+      <p:sp>
+        <p:nvSpPr>
+          <p:cNvPr id="16" name="Rounded Rectangle 15"/>
+          <p:cNvSpPr/>
+          <p:nvPr/>
+        </p:nvSpPr>
+        <p:spPr>
+          <a:xfrm>
+            <a:off x="548640" y="4251960"/>
+            <a:ext cx="5486400" cy="1920240"/>
+          </a:xfrm>
+          <a:prstGeom prst="roundRect">
+            <a:avLst>
+              <a:gd name="adj" fmla="val 6000"/>
+            </a:avLst>
+          </a:prstGeom>
+          <a:solidFill>
+            <a:srgbClr val="FFFFFF"/>
+          </a:solidFill>
+          <a:ln>
+            <a:solidFill>
+              <a:srgbClr val="D9DFE5"/>
+            </a:solidFill>
+          </a:ln>
+          <a:effectLst/>
+        </p:spPr>
+        <p:style>
+          <a:lnRef idx="1">
+            <a:schemeClr val="accent1"/>
+          </a:lnRef>
+          <a:fillRef idx="3">
+            <a:schemeClr val="accent1"/>
+          </a:fillRef>
+          <a:effectRef idx="2">
+            <a:schemeClr val="accent1"/>
+          </a:effectRef>
+          <a:fontRef idx="minor">
+            <a:schemeClr val="lt1"/>
+          </a:fontRef>
+        </p:style>
+        <p:txBody>
+          <a:bodyPr rtlCol="0" anchor="ctr"/>
+          <a:lstStyle/>
+          <a:p>
+            <a:pPr algn="ctr"/>
+          </a:p>
+        </p:txBody>
+      </p:sp>
+      <p:sp>
+        <p:nvSpPr>
+          <p:cNvPr id="17" name="TextBox 16"/>
+          <p:cNvSpPr txBox="1"/>
+          <p:nvPr/>
+        </p:nvSpPr>
+        <p:spPr>
+          <a:xfrm>
+            <a:off x="731520" y="4389120"/>
+            <a:ext cx="5120640" cy="457200"/>
+          </a:xfrm>
+          <a:prstGeom prst="rect">
+            <a:avLst/>
+          </a:prstGeom>
+          <a:noFill/>
+        </p:spPr>
+        <p:txBody>
+          <a:bodyPr wrap="square" anchor="t" lIns="45720" rIns="45720" tIns="27432" bIns="27432">
+            <a:spAutoFit/>
+          </a:bodyPr>
+          <a:lstStyle/>
+          <a:p>
+            <a:pPr algn="l"/>
+            <a:r>
+              <a:rPr sz="1700" b="1" i="0">
+                <a:solidFill>
+                  <a:srgbClr val="0E4377"/>
+                </a:solidFill>
+                <a:latin typeface="Calibri"/>
+              </a:rPr>
+              <a:t>Accès envoyés par e-mail</a:t>
+            </a:r>
+          </a:p>
+        </p:txBody>
+      </p:sp>
+      <p:sp>
+        <p:nvSpPr>
+          <p:cNvPr id="18" name="TextBox 17"/>
+          <p:cNvSpPr txBox="1"/>
+          <p:nvPr/>
+        </p:nvSpPr>
+        <p:spPr>
+          <a:xfrm>
+            <a:off x="731520" y="4937760"/>
+            <a:ext cx="5120640" cy="1097280"/>
+          </a:xfrm>
+          <a:prstGeom prst="rect">
+            <a:avLst/>
+          </a:prstGeom>
+          <a:noFill/>
+        </p:spPr>
+        <p:txBody>
+          <a:bodyPr wrap="square" anchor="t" lIns="45720" rIns="45720" tIns="27432" bIns="27432">
+            <a:spAutoFit/>
+          </a:bodyPr>
+          <a:lstStyle/>
+          <a:p>
+            <a:pPr algn="l"/>
+            <a:r>
+              <a:rPr sz="1500" b="0" i="0">
+                <a:solidFill>
+                  <a:srgbClr val="12263A"/>
+                </a:solidFill>
+                <a:latin typeface="Calibri"/>
+              </a:rPr>
+              <a:t>À la création d'un agent, ou à tout moment : lien, identifiant et mot de passe provisoire.</a:t>
+            </a:r>
+          </a:p>
+        </p:txBody>
+      </p:sp>
+      <p:sp>
+        <p:nvSpPr>
+          <p:cNvPr id="19" name="Rounded Rectangle 18"/>
+          <p:cNvSpPr/>
+          <p:nvPr/>
+        </p:nvSpPr>
+        <p:spPr>
+          <a:xfrm>
+            <a:off x="6217920" y="4251960"/>
+            <a:ext cx="5394960" cy="1920240"/>
+          </a:xfrm>
+          <a:prstGeom prst="roundRect">
+            <a:avLst>
+              <a:gd name="adj" fmla="val 6000"/>
+            </a:avLst>
+          </a:prstGeom>
+          <a:solidFill>
+            <a:srgbClr val="FFFFFF"/>
+          </a:solidFill>
+          <a:ln>
+            <a:solidFill>
+              <a:srgbClr val="D9DFE5"/>
+            </a:solidFill>
+          </a:ln>
+          <a:effectLst/>
+        </p:spPr>
+        <p:style>
+          <a:lnRef idx="1">
+            <a:schemeClr val="accent1"/>
+          </a:lnRef>
+          <a:fillRef idx="3">
+            <a:schemeClr val="accent1"/>
+          </a:fillRef>
+          <a:effectRef idx="2">
+            <a:schemeClr val="accent1"/>
+          </a:effectRef>
+          <a:fontRef idx="minor">
+            <a:schemeClr val="lt1"/>
+          </a:fontRef>
+        </p:style>
+        <p:txBody>
+          <a:bodyPr rtlCol="0" anchor="ctr"/>
+          <a:lstStyle/>
+          <a:p>
+            <a:pPr algn="ctr"/>
+          </a:p>
+        </p:txBody>
+      </p:sp>
+      <p:sp>
+        <p:nvSpPr>
+          <p:cNvPr id="20" name="TextBox 19"/>
+          <p:cNvSpPr txBox="1"/>
+          <p:nvPr/>
+        </p:nvSpPr>
+        <p:spPr>
+          <a:xfrm>
+            <a:off x="6400800" y="4389120"/>
+            <a:ext cx="5029200" cy="457200"/>
+          </a:xfrm>
+          <a:prstGeom prst="rect">
+            <a:avLst/>
+          </a:prstGeom>
+          <a:noFill/>
+        </p:spPr>
+        <p:txBody>
+          <a:bodyPr wrap="square" anchor="t" lIns="45720" rIns="45720" tIns="27432" bIns="27432">
+            <a:spAutoFit/>
+          </a:bodyPr>
+          <a:lstStyle/>
+          <a:p>
+            <a:pPr algn="l"/>
+            <a:r>
+              <a:rPr sz="1700" b="1" i="0">
+                <a:solidFill>
+                  <a:srgbClr val="0E4377"/>
+                </a:solidFill>
+                <a:latin typeface="Calibri"/>
+              </a:rPr>
+              <a:t>Demandes groupées</a:t>
+            </a:r>
+          </a:p>
+        </p:txBody>
+      </p:sp>
+      <p:sp>
+        <p:nvSpPr>
+          <p:cNvPr id="21" name="TextBox 20"/>
+          <p:cNvSpPr txBox="1"/>
+          <p:nvPr/>
+        </p:nvSpPr>
+        <p:spPr>
+          <a:xfrm>
+            <a:off x="6400800" y="4937760"/>
+            <a:ext cx="5029200" cy="1097280"/>
+          </a:xfrm>
+          <a:prstGeom prst="rect">
+            <a:avLst/>
+          </a:prstGeom>
+          <a:noFill/>
+        </p:spPr>
+        <p:txBody>
+          <a:bodyPr wrap="square" anchor="t" lIns="45720" rIns="45720" tIns="27432" bIns="27432">
+            <a:spAutoFit/>
+          </a:bodyPr>
+          <a:lstStyle/>
+          <a:p>
+            <a:pPr algn="l"/>
+            <a:r>
+              <a:rPr sz="1500" b="0" i="0">
+                <a:solidFill>
+                  <a:srgbClr val="12263A"/>
+                </a:solidFill>
+                <a:latin typeface="Calibri"/>
+              </a:rPr>
+              <a:t>Une seule demande par e-mail à la direction, avec la réponse appliquée à toutes.</a:t>
+            </a:r>
+          </a:p>
+        </p:txBody>
+      </p:sp>
     </p:spTree>
   </p:cSld>
   <p:clrMapOvr>
@@ -6872,7 +6760,7 @@
                 </a:solidFill>
                 <a:latin typeface="Calibri"/>
               </a:rPr>
-              <a:t>Et ce n'est pas tout</a:t>
+              <a:t>Français, arabe, anglais — et mode sombre</a:t>
             </a:r>
           </a:p>
         </p:txBody>
@@ -6907,7 +6795,7 @@
                 </a:solidFill>
                 <a:latin typeface="Calibri"/>
               </a:rPr>
-              <a:t>Toutes les fonctions utiles au quotidien</a:t>
+              <a:t>Chacun travaille dans sa langue, de droite à gauche en arabe</a:t>
             </a:r>
           </a:p>
         </p:txBody>
@@ -6947,16 +6835,74 @@
           </a:p>
         </p:txBody>
       </p:sp>
-      <p:sp>
-        <p:nvSpPr>
-          <p:cNvPr id="7" name="TextBox 6"/>
+      <p:pic>
+        <p:nvPicPr>
+          <p:cNvPr id="7" name="Picture 6" descr="92-arabe.png"/>
+          <p:cNvPicPr>
+            <a:picLocks noChangeAspect="1"/>
+          </p:cNvPicPr>
+          <p:nvPr/>
+        </p:nvPicPr>
+        <p:blipFill>
+          <a:blip r:embed="rId2"/>
+          <a:stretch>
+            <a:fillRect/>
+          </a:stretch>
+        </p:blipFill>
+        <p:spPr>
+          <a:xfrm>
+            <a:off x="548640" y="1600200"/>
+            <a:ext cx="5394960" cy="3252843"/>
+          </a:xfrm>
+          <a:prstGeom prst="rect">
+            <a:avLst/>
+          </a:prstGeom>
+          <a:ln w="9525">
+            <a:solidFill>
+              <a:srgbClr val="D0D7DE"/>
+            </a:solidFill>
+          </a:ln>
+        </p:spPr>
+      </p:pic>
+      <p:pic>
+        <p:nvPicPr>
+          <p:cNvPr id="8" name="Picture 7" descr="91-mode-sombre.png"/>
+          <p:cNvPicPr>
+            <a:picLocks noChangeAspect="1"/>
+          </p:cNvPicPr>
+          <p:nvPr/>
+        </p:nvPicPr>
+        <p:blipFill>
+          <a:blip r:embed="rId3"/>
+          <a:stretch>
+            <a:fillRect/>
+          </a:stretch>
+        </p:blipFill>
+        <p:spPr>
+          <a:xfrm>
+            <a:off x="6309360" y="1600200"/>
+            <a:ext cx="5394960" cy="3252843"/>
+          </a:xfrm>
+          <a:prstGeom prst="rect">
+            <a:avLst/>
+          </a:prstGeom>
+          <a:ln w="9525">
+            <a:solidFill>
+              <a:srgbClr val="D0D7DE"/>
+            </a:solidFill>
+          </a:ln>
+        </p:spPr>
+      </p:pic>
+      <p:sp>
+        <p:nvSpPr>
+          <p:cNvPr id="9" name="TextBox 8"/>
           <p:cNvSpPr txBox="1"/>
           <p:nvPr/>
         </p:nvSpPr>
         <p:spPr>
           <a:xfrm>
-            <a:off x="548640" y="1645920"/>
-            <a:ext cx="3657600" cy="4572000"/>
+            <a:off x="548640" y="5257800"/>
+            <a:ext cx="11064240" cy="1371600"/>
           </a:xfrm>
           <a:prstGeom prst="rect">
             <a:avLst/>
@@ -6964,654 +6910,32 @@
           <a:noFill/>
         </p:spPr>
         <p:txBody>
-          <a:bodyPr wrap="square">
+          <a:bodyPr wrap="square" anchor="t" lIns="45720" rIns="45720" tIns="27432" bIns="27432">
             <a:spAutoFit/>
           </a:bodyPr>
           <a:lstStyle/>
           <a:p>
-            <a:pPr>
-              <a:spcAft>
-                <a:spcPts val="1100"/>
-              </a:spcAft>
-            </a:pPr>
-            <a:r>
-              <a:rPr sz="1700" b="1">
-                <a:solidFill>
-                  <a:srgbClr val="2FB5B4"/>
-                </a:solidFill>
-                <a:latin typeface="Calibri"/>
-              </a:rPr>
-              <a:t>✔  </a:t>
-            </a:r>
-            <a:r>
-              <a:rPr sz="1700">
+            <a:pPr algn="l"/>
+            <a:r>
+              <a:rPr sz="1800" b="0" i="0">
                 <a:solidFill>
                   <a:srgbClr val="0E4377"/>
                 </a:solidFill>
                 <a:latin typeface="Calibri"/>
               </a:rPr>
-              <a:t>Rattraper les jours oubliés</a:t>
-            </a:r>
-          </a:p>
-          <a:p>
-            <a:pPr>
-              <a:spcAft>
-                <a:spcPts val="1100"/>
-              </a:spcAft>
-            </a:pPr>
-            <a:r>
-              <a:rPr sz="1700" b="1">
-                <a:solidFill>
-                  <a:srgbClr val="2FB5B4"/>
-                </a:solidFill>
-                <a:latin typeface="Calibri"/>
-              </a:rPr>
-              <a:t>✔  </a:t>
-            </a:r>
-            <a:r>
-              <a:rPr sz="1700">
+              <a:t>Application installable sur téléphone, en plein écran.</a:t>
+            </a:r>
+          </a:p>
+          <a:p>
+            <a:pPr algn="l"/>
+            <a:r>
+              <a:rPr sz="1800" b="0" i="0">
                 <a:solidFill>
                   <a:srgbClr val="0E4377"/>
                 </a:solidFill>
                 <a:latin typeface="Calibri"/>
               </a:rPr>
-              <a:t>Vues 1 mois, 3, 6, 12 mois</a:t>
-            </a:r>
-          </a:p>
-          <a:p>
-            <a:pPr>
-              <a:spcAft>
-                <a:spcPts val="1100"/>
-              </a:spcAft>
-            </a:pPr>
-            <a:r>
-              <a:rPr sz="1700" b="1">
-                <a:solidFill>
-                  <a:srgbClr val="2FB5B4"/>
-                </a:solidFill>
-                <a:latin typeface="Calibri"/>
-              </a:rPr>
-              <a:t>✔  </a:t>
-            </a:r>
-            <a:r>
-              <a:rPr sz="1700">
-                <a:solidFill>
-                  <a:srgbClr val="0E4377"/>
-                </a:solidFill>
-                <a:latin typeface="Calibri"/>
-              </a:rPr>
-              <a:t>Jours fériés algériens</a:t>
-            </a:r>
-          </a:p>
-          <a:p>
-            <a:pPr>
-              <a:spcAft>
-                <a:spcPts val="1100"/>
-              </a:spcAft>
-            </a:pPr>
-            <a:r>
-              <a:rPr sz="1700" b="1">
-                <a:solidFill>
-                  <a:srgbClr val="2FB5B4"/>
-                </a:solidFill>
-                <a:latin typeface="Calibri"/>
-              </a:rPr>
-              <a:t>✔  </a:t>
-            </a:r>
-            <a:r>
-              <a:rPr sz="1700">
-                <a:solidFill>
-                  <a:srgbClr val="0E4377"/>
-                </a:solidFill>
-                <a:latin typeface="Calibri"/>
-              </a:rPr>
-              <a:t>Solde T − CR et solde au départ</a:t>
-            </a:r>
-          </a:p>
-          <a:p>
-            <a:pPr>
-              <a:spcAft>
-                <a:spcPts val="1100"/>
-              </a:spcAft>
-            </a:pPr>
-            <a:r>
-              <a:rPr sz="1700" b="1">
-                <a:solidFill>
-                  <a:srgbClr val="2FB5B4"/>
-                </a:solidFill>
-                <a:latin typeface="Calibri"/>
-              </a:rPr>
-              <a:t>✔  </a:t>
-            </a:r>
-            <a:r>
-              <a:rPr sz="1700">
-                <a:solidFill>
-                  <a:srgbClr val="0E4377"/>
-                </a:solidFill>
-                <a:latin typeface="Calibri"/>
-              </a:rPr>
-              <a:t>Rotation par agent</a:t>
-            </a:r>
-          </a:p>
-          <a:p>
-            <a:pPr>
-              <a:spcAft>
-                <a:spcPts val="1100"/>
-              </a:spcAft>
-            </a:pPr>
-            <a:r>
-              <a:rPr sz="1700" b="1">
-                <a:solidFill>
-                  <a:srgbClr val="2FB5B4"/>
-                </a:solidFill>
-                <a:latin typeface="Calibri"/>
-              </a:rPr>
-              <a:t>✔  </a:t>
-            </a:r>
-            <a:r>
-              <a:rPr sz="1700">
-                <a:solidFill>
-                  <a:srgbClr val="0E4377"/>
-                </a:solidFill>
-                <a:latin typeface="Calibri"/>
-              </a:rPr>
-              <a:t>Modification de plusieurs agents</a:t>
-            </a:r>
-          </a:p>
-          <a:p>
-            <a:pPr>
-              <a:spcAft>
-                <a:spcPts val="1100"/>
-              </a:spcAft>
-            </a:pPr>
-            <a:r>
-              <a:rPr sz="1700" b="1">
-                <a:solidFill>
-                  <a:srgbClr val="2FB5B4"/>
-                </a:solidFill>
-                <a:latin typeface="Calibri"/>
-              </a:rPr>
-              <a:t>✔  </a:t>
-            </a:r>
-            <a:r>
-              <a:rPr sz="1700">
-                <a:solidFill>
-                  <a:srgbClr val="0E4377"/>
-                </a:solidFill>
-                <a:latin typeface="Calibri"/>
-              </a:rPr>
-              <a:t>Véhicules mis à disposition</a:t>
-            </a:r>
-          </a:p>
-          <a:p>
-            <a:pPr>
-              <a:spcAft>
-                <a:spcPts val="1100"/>
-              </a:spcAft>
-            </a:pPr>
-            <a:r>
-              <a:rPr sz="1700" b="1">
-                <a:solidFill>
-                  <a:srgbClr val="2FB5B4"/>
-                </a:solidFill>
-                <a:latin typeface="Calibri"/>
-              </a:rPr>
-              <a:t>✔  </a:t>
-            </a:r>
-            <a:r>
-              <a:rPr sz="1700">
-                <a:solidFill>
-                  <a:srgbClr val="0E4377"/>
-                </a:solidFill>
-                <a:latin typeface="Calibri"/>
-              </a:rPr>
-              <a:t>Aide intégrée en 3 langues</a:t>
-            </a:r>
-          </a:p>
-        </p:txBody>
-      </p:sp>
-      <p:sp>
-        <p:nvSpPr>
-          <p:cNvPr id="8" name="TextBox 7"/>
-          <p:cNvSpPr txBox="1"/>
-          <p:nvPr/>
-        </p:nvSpPr>
-        <p:spPr>
-          <a:xfrm>
-            <a:off x="4389120" y="1645920"/>
-            <a:ext cx="3657600" cy="4572000"/>
-          </a:xfrm>
-          <a:prstGeom prst="rect">
-            <a:avLst/>
-          </a:prstGeom>
-          <a:noFill/>
-        </p:spPr>
-        <p:txBody>
-          <a:bodyPr wrap="square">
-            <a:spAutoFit/>
-          </a:bodyPr>
-          <a:lstStyle/>
-          <a:p>
-            <a:pPr>
-              <a:spcAft>
-                <a:spcPts val="1100"/>
-              </a:spcAft>
-            </a:pPr>
-            <a:r>
-              <a:rPr sz="1700" b="1">
-                <a:solidFill>
-                  <a:srgbClr val="2FB5B4"/>
-                </a:solidFill>
-                <a:latin typeface="Calibri"/>
-              </a:rPr>
-              <a:t>✔  </a:t>
-            </a:r>
-            <a:r>
-              <a:rPr sz="1700">
-                <a:solidFill>
-                  <a:srgbClr val="0E4377"/>
-                </a:solidFill>
-                <a:latin typeface="Calibri"/>
-              </a:rPr>
-              <a:t>Demandes regroupées</a:t>
-            </a:r>
-          </a:p>
-          <a:p>
-            <a:pPr>
-              <a:spcAft>
-                <a:spcPts val="1100"/>
-              </a:spcAft>
-            </a:pPr>
-            <a:r>
-              <a:rPr sz="1700" b="1">
-                <a:solidFill>
-                  <a:srgbClr val="2FB5B4"/>
-                </a:solidFill>
-                <a:latin typeface="Calibri"/>
-              </a:rPr>
-              <a:t>✔  </a:t>
-            </a:r>
-            <a:r>
-              <a:rPr sz="1700">
-                <a:solidFill>
-                  <a:srgbClr val="0E4377"/>
-                </a:solidFill>
-                <a:latin typeface="Calibri"/>
-              </a:rPr>
-              <a:t>Date de reprise calculée</a:t>
-            </a:r>
-          </a:p>
-          <a:p>
-            <a:pPr>
-              <a:spcAft>
-                <a:spcPts val="1100"/>
-              </a:spcAft>
-            </a:pPr>
-            <a:r>
-              <a:rPr sz="1700" b="1">
-                <a:solidFill>
-                  <a:srgbClr val="2FB5B4"/>
-                </a:solidFill>
-                <a:latin typeface="Calibri"/>
-              </a:rPr>
-              <a:t>✔  </a:t>
-            </a:r>
-            <a:r>
-              <a:rPr sz="1700">
-                <a:solidFill>
-                  <a:srgbClr val="0E4377"/>
-                </a:solidFill>
-                <a:latin typeface="Calibri"/>
-              </a:rPr>
-              <a:t>Documents rangés et renommés</a:t>
-            </a:r>
-          </a:p>
-          <a:p>
-            <a:pPr>
-              <a:spcAft>
-                <a:spcPts val="1100"/>
-              </a:spcAft>
-            </a:pPr>
-            <a:r>
-              <a:rPr sz="1700" b="1">
-                <a:solidFill>
-                  <a:srgbClr val="2FB5B4"/>
-                </a:solidFill>
-                <a:latin typeface="Calibri"/>
-              </a:rPr>
-              <a:t>✔  </a:t>
-            </a:r>
-            <a:r>
-              <a:rPr sz="1700">
-                <a:solidFill>
-                  <a:srgbClr val="0E4377"/>
-                </a:solidFill>
-                <a:latin typeface="Calibri"/>
-              </a:rPr>
-              <a:t>Accès par e-mail</a:t>
-            </a:r>
-          </a:p>
-          <a:p>
-            <a:pPr>
-              <a:spcAft>
-                <a:spcPts val="1100"/>
-              </a:spcAft>
-            </a:pPr>
-            <a:r>
-              <a:rPr sz="1700" b="1">
-                <a:solidFill>
-                  <a:srgbClr val="2FB5B4"/>
-                </a:solidFill>
-                <a:latin typeface="Calibri"/>
-              </a:rPr>
-              <a:t>✔  </a:t>
-            </a:r>
-            <a:r>
-              <a:rPr sz="1700">
-                <a:solidFill>
-                  <a:srgbClr val="0E4377"/>
-                </a:solidFill>
-                <a:latin typeface="Calibri"/>
-              </a:rPr>
-              <a:t>Pastilles et notifications</a:t>
-            </a:r>
-          </a:p>
-          <a:p>
-            <a:pPr>
-              <a:spcAft>
-                <a:spcPts val="1100"/>
-              </a:spcAft>
-            </a:pPr>
-            <a:r>
-              <a:rPr sz="1700" b="1">
-                <a:solidFill>
-                  <a:srgbClr val="2FB5B4"/>
-                </a:solidFill>
-                <a:latin typeface="Calibri"/>
-              </a:rPr>
-              <a:t>✔  </a:t>
-            </a:r>
-            <a:r>
-              <a:rPr sz="1700">
-                <a:solidFill>
-                  <a:srgbClr val="0E4377"/>
-                </a:solidFill>
-                <a:latin typeface="Calibri"/>
-              </a:rPr>
-              <a:t>Lecture du bordereau des prix (OCR)</a:t>
-            </a:r>
-          </a:p>
-          <a:p>
-            <a:pPr>
-              <a:spcAft>
-                <a:spcPts val="1100"/>
-              </a:spcAft>
-            </a:pPr>
-            <a:r>
-              <a:rPr sz="1700" b="1">
-                <a:solidFill>
-                  <a:srgbClr val="2FB5B4"/>
-                </a:solidFill>
-                <a:latin typeface="Calibri"/>
-              </a:rPr>
-              <a:t>✔  </a:t>
-            </a:r>
-            <a:r>
-              <a:rPr sz="1700">
-                <a:solidFill>
-                  <a:srgbClr val="0E4377"/>
-                </a:solidFill>
-                <a:latin typeface="Calibri"/>
-              </a:rPr>
-              <a:t>Effectifs bornés par le contrat</a:t>
-            </a:r>
-          </a:p>
-          <a:p>
-            <a:pPr>
-              <a:spcAft>
-                <a:spcPts val="1100"/>
-              </a:spcAft>
-            </a:pPr>
-            <a:r>
-              <a:rPr sz="1700" b="1">
-                <a:solidFill>
-                  <a:srgbClr val="2FB5B4"/>
-                </a:solidFill>
-                <a:latin typeface="Calibri"/>
-              </a:rPr>
-              <a:t>✔  </a:t>
-            </a:r>
-            <a:r>
-              <a:rPr sz="1700">
-                <a:solidFill>
-                  <a:srgbClr val="0E4377"/>
-                </a:solidFill>
-                <a:latin typeface="Calibri"/>
-              </a:rPr>
-              <a:t>Compte client et remarques</a:t>
-            </a:r>
-          </a:p>
-        </p:txBody>
-      </p:sp>
-      <p:sp>
-        <p:nvSpPr>
-          <p:cNvPr id="9" name="TextBox 8"/>
-          <p:cNvSpPr txBox="1"/>
-          <p:nvPr/>
-        </p:nvSpPr>
-        <p:spPr>
-          <a:xfrm>
-            <a:off x="8229600" y="1645920"/>
-            <a:ext cx="3657600" cy="4572000"/>
-          </a:xfrm>
-          <a:prstGeom prst="rect">
-            <a:avLst/>
-          </a:prstGeom>
-          <a:noFill/>
-        </p:spPr>
-        <p:txBody>
-          <a:bodyPr wrap="square">
-            <a:spAutoFit/>
-          </a:bodyPr>
-          <a:lstStyle/>
-          <a:p>
-            <a:pPr>
-              <a:spcAft>
-                <a:spcPts val="1100"/>
-              </a:spcAft>
-            </a:pPr>
-            <a:r>
-              <a:rPr sz="1700" b="1">
-                <a:solidFill>
-                  <a:srgbClr val="2FB5B4"/>
-                </a:solidFill>
-                <a:latin typeface="Calibri"/>
-              </a:rPr>
-              <a:t>✔  </a:t>
-            </a:r>
-            <a:r>
-              <a:rPr sz="1700">
-                <a:solidFill>
-                  <a:srgbClr val="0E4377"/>
-                </a:solidFill>
-                <a:latin typeface="Calibri"/>
-              </a:rPr>
-              <a:t>Attachement figé puis facture</a:t>
-            </a:r>
-          </a:p>
-          <a:p>
-            <a:pPr>
-              <a:spcAft>
-                <a:spcPts val="1100"/>
-              </a:spcAft>
-            </a:pPr>
-            <a:r>
-              <a:rPr sz="1700" b="1">
-                <a:solidFill>
-                  <a:srgbClr val="2FB5B4"/>
-                </a:solidFill>
-                <a:latin typeface="Calibri"/>
-              </a:rPr>
-              <a:t>✔  </a:t>
-            </a:r>
-            <a:r>
-              <a:rPr sz="1700">
-                <a:solidFill>
-                  <a:srgbClr val="0E4377"/>
-                </a:solidFill>
-                <a:latin typeface="Calibri"/>
-              </a:rPr>
-              <a:t>Historique et reste à facturer</a:t>
-            </a:r>
-          </a:p>
-          <a:p>
-            <a:pPr>
-              <a:spcAft>
-                <a:spcPts val="1100"/>
-              </a:spcAft>
-            </a:pPr>
-            <a:r>
-              <a:rPr sz="1700" b="1">
-                <a:solidFill>
-                  <a:srgbClr val="2FB5B4"/>
-                </a:solidFill>
-                <a:latin typeface="Calibri"/>
-              </a:rPr>
-              <a:t>✔  </a:t>
-            </a:r>
-            <a:r>
-              <a:rPr sz="1700">
-                <a:solidFill>
-                  <a:srgbClr val="0E4377"/>
-                </a:solidFill>
-                <a:latin typeface="Calibri"/>
-              </a:rPr>
-              <a:t>Fiche de pointage Excel / PDF</a:t>
-            </a:r>
-          </a:p>
-          <a:p>
-            <a:pPr>
-              <a:spcAft>
-                <a:spcPts val="1100"/>
-              </a:spcAft>
-            </a:pPr>
-            <a:r>
-              <a:rPr sz="1700" b="1">
-                <a:solidFill>
-                  <a:srgbClr val="2FB5B4"/>
-                </a:solidFill>
-                <a:latin typeface="Calibri"/>
-              </a:rPr>
-              <a:t>✔  </a:t>
-            </a:r>
-            <a:r>
-              <a:rPr sz="1700">
-                <a:solidFill>
-                  <a:srgbClr val="0E4377"/>
-                </a:solidFill>
-                <a:latin typeface="Calibri"/>
-              </a:rPr>
-              <a:t>Export et import Excel</a:t>
-            </a:r>
-          </a:p>
-          <a:p>
-            <a:pPr>
-              <a:spcAft>
-                <a:spcPts val="1100"/>
-              </a:spcAft>
-            </a:pPr>
-            <a:r>
-              <a:rPr sz="1700" b="1">
-                <a:solidFill>
-                  <a:srgbClr val="2FB5B4"/>
-                </a:solidFill>
-                <a:latin typeface="Calibri"/>
-              </a:rPr>
-              <a:t>✔  </a:t>
-            </a:r>
-            <a:r>
-              <a:rPr sz="1700">
-                <a:solidFill>
-                  <a:srgbClr val="0E4377"/>
-                </a:solidFill>
-                <a:latin typeface="Calibri"/>
-              </a:rPr>
-              <a:t>Sauvegarde et restauration</a:t>
-            </a:r>
-          </a:p>
-          <a:p>
-            <a:pPr>
-              <a:spcAft>
-                <a:spcPts val="1100"/>
-              </a:spcAft>
-            </a:pPr>
-            <a:r>
-              <a:rPr sz="1700" b="1">
-                <a:solidFill>
-                  <a:srgbClr val="2FB5B4"/>
-                </a:solidFill>
-                <a:latin typeface="Calibri"/>
-              </a:rPr>
-              <a:t>✔  </a:t>
-            </a:r>
-            <a:r>
-              <a:rPr sz="1700">
-                <a:solidFill>
-                  <a:srgbClr val="0E4377"/>
-                </a:solidFill>
-                <a:latin typeface="Calibri"/>
-              </a:rPr>
-              <a:t>Mode sombre</a:t>
-            </a:r>
-          </a:p>
-          <a:p>
-            <a:pPr>
-              <a:spcAft>
-                <a:spcPts val="1100"/>
-              </a:spcAft>
-            </a:pPr>
-            <a:r>
-              <a:rPr sz="1700" b="1">
-                <a:solidFill>
-                  <a:srgbClr val="2FB5B4"/>
-                </a:solidFill>
-                <a:latin typeface="Calibri"/>
-              </a:rPr>
-              <a:t>✔  </a:t>
-            </a:r>
-            <a:r>
-              <a:rPr sz="1700">
-                <a:solidFill>
-                  <a:srgbClr val="0E4377"/>
-                </a:solidFill>
-                <a:latin typeface="Calibri"/>
-              </a:rPr>
-              <a:t>Installable sur téléphone</a:t>
-            </a:r>
-          </a:p>
-          <a:p>
-            <a:pPr>
-              <a:spcAft>
-                <a:spcPts val="1100"/>
-              </a:spcAft>
-            </a:pPr>
-            <a:r>
-              <a:rPr sz="1700" b="1">
-                <a:solidFill>
-                  <a:srgbClr val="2FB5B4"/>
-                </a:solidFill>
-                <a:latin typeface="Calibri"/>
-              </a:rPr>
-              <a:t>✔  </a:t>
-            </a:r>
-            <a:r>
-              <a:rPr sz="1700">
-                <a:solidFill>
-                  <a:srgbClr val="0E4377"/>
-                </a:solidFill>
-                <a:latin typeface="Calibri"/>
-              </a:rPr>
-              <a:t>Charte de confidentialité</a:t>
+              <a:t>Langue et mode sombre : un petit sélecteur discret en bas à droite.</a:t>
             </a:r>
           </a:p>
         </p:txBody>
@@ -7751,7 +7075,7 @@
                 </a:solidFill>
                 <a:latin typeface="Calibri"/>
               </a:rPr>
-              <a:t>Prêt en trois étapes</a:t>
+              <a:t>Vos données restent chez vous</a:t>
             </a:r>
           </a:p>
         </p:txBody>
@@ -7786,7 +7110,7 @@
                 </a:solidFill>
                 <a:latin typeface="Calibri"/>
               </a:rPr>
-              <a:t>Du premier essai au premier pointage</a:t>
+              <a:t>Un classeur Google par entreprise, jamais mélangé</a:t>
             </a:r>
           </a:p>
         </p:txBody>
@@ -7828,393 +7152,294 @@
       </p:sp>
       <p:sp>
         <p:nvSpPr>
-          <p:cNvPr id="7" name="Rounded Rectangle 6"/>
-          <p:cNvSpPr/>
-          <p:nvPr/>
-        </p:nvSpPr>
-        <p:spPr>
-          <a:xfrm>
-            <a:off x="548640" y="1828800"/>
-            <a:ext cx="3611880" cy="3291840"/>
-          </a:xfrm>
-          <a:prstGeom prst="roundRect">
-            <a:avLst>
-              <a:gd name="adj" fmla="val 6000"/>
-            </a:avLst>
-          </a:prstGeom>
-          <a:solidFill>
-            <a:srgbClr val="FFFFFF"/>
-          </a:solidFill>
-          <a:ln>
+          <p:cNvPr id="7" name="TextBox 6"/>
+          <p:cNvSpPr txBox="1"/>
+          <p:nvPr/>
+        </p:nvSpPr>
+        <p:spPr>
+          <a:xfrm>
+            <a:off x="548640" y="1737360"/>
+            <a:ext cx="5669280" cy="4572000"/>
+          </a:xfrm>
+          <a:prstGeom prst="rect">
+            <a:avLst/>
+          </a:prstGeom>
+          <a:noFill/>
+        </p:spPr>
+        <p:txBody>
+          <a:bodyPr wrap="square">
+            <a:spAutoFit/>
+          </a:bodyPr>
+          <a:lstStyle/>
+          <a:p>
+            <a:pPr>
+              <a:spcAft>
+                <a:spcPts val="1000"/>
+              </a:spcAft>
+            </a:pPr>
+            <a:r>
+              <a:rPr sz="1200">
+                <a:solidFill>
+                  <a:srgbClr val="2FB5B4"/>
+                </a:solidFill>
+                <a:latin typeface="Calibri"/>
+              </a:rPr>
+              <a:t>● </a:t>
+            </a:r>
+            <a:r>
+              <a:rPr sz="1600" b="1">
+                <a:solidFill>
+                  <a:srgbClr val="0E4377"/>
+                </a:solidFill>
+                <a:latin typeface="Calibri"/>
+              </a:rPr>
+              <a:t>Un classeur par entreprise</a:t>
+            </a:r>
+            <a:r>
+              <a:rPr sz="1500">
+                <a:solidFill>
+                  <a:srgbClr val="12263A"/>
+                </a:solidFill>
+                <a:latin typeface="Calibri"/>
+              </a:rPr>
+              <a:t> — vous pouvez l'ouvrir à tout moment</a:t>
+            </a:r>
+          </a:p>
+          <a:p>
+            <a:pPr>
+              <a:spcAft>
+                <a:spcPts val="1000"/>
+              </a:spcAft>
+            </a:pPr>
+            <a:r>
+              <a:rPr sz="1200">
+                <a:solidFill>
+                  <a:srgbClr val="2FB5B4"/>
+                </a:solidFill>
+                <a:latin typeface="Calibri"/>
+              </a:rPr>
+              <a:t>● </a:t>
+            </a:r>
+            <a:r>
+              <a:rPr sz="1600" b="1">
+                <a:solidFill>
+                  <a:srgbClr val="0E4377"/>
+                </a:solidFill>
+                <a:latin typeface="Calibri"/>
+              </a:rPr>
+              <a:t>Mots de passe</a:t>
+            </a:r>
+            <a:r>
+              <a:rPr sz="1500">
+                <a:solidFill>
+                  <a:srgbClr val="12263A"/>
+                </a:solidFill>
+                <a:latin typeface="Calibri"/>
+              </a:rPr>
+              <a:t> — jamais stockés en clair, connexions limitées</a:t>
+            </a:r>
+          </a:p>
+          <a:p>
+            <a:pPr>
+              <a:spcAft>
+                <a:spcPts val="1000"/>
+              </a:spcAft>
+            </a:pPr>
+            <a:r>
+              <a:rPr sz="1200">
+                <a:solidFill>
+                  <a:srgbClr val="2FB5B4"/>
+                </a:solidFill>
+                <a:latin typeface="Calibri"/>
+              </a:rPr>
+              <a:t>● </a:t>
+            </a:r>
+            <a:r>
+              <a:rPr sz="1600" b="1">
+                <a:solidFill>
+                  <a:srgbClr val="0E4377"/>
+                </a:solidFill>
+                <a:latin typeface="Calibri"/>
+              </a:rPr>
+              <a:t>Droits par profil</a:t>
+            </a:r>
+            <a:r>
+              <a:rPr sz="1500">
+                <a:solidFill>
+                  <a:srgbClr val="12263A"/>
+                </a:solidFill>
+                <a:latin typeface="Calibri"/>
+              </a:rPr>
+              <a:t> — chacun ne voit que son périmètre</a:t>
+            </a:r>
+          </a:p>
+          <a:p>
+            <a:pPr>
+              <a:spcAft>
+                <a:spcPts val="1000"/>
+              </a:spcAft>
+            </a:pPr>
+            <a:r>
+              <a:rPr sz="1200">
+                <a:solidFill>
+                  <a:srgbClr val="2FB5B4"/>
+                </a:solidFill>
+                <a:latin typeface="Calibri"/>
+              </a:rPr>
+              <a:t>● </a:t>
+            </a:r>
+            <a:r>
+              <a:rPr sz="1600" b="1">
+                <a:solidFill>
+                  <a:srgbClr val="0E4377"/>
+                </a:solidFill>
+                <a:latin typeface="Calibri"/>
+              </a:rPr>
+              <a:t>Textes saisis</a:t>
+            </a:r>
+            <a:r>
+              <a:rPr sz="1500">
+                <a:solidFill>
+                  <a:srgbClr val="12263A"/>
+                </a:solidFill>
+                <a:latin typeface="Calibri"/>
+              </a:rPr>
+              <a:t> — jamais exécutés comme des formules</a:t>
+            </a:r>
+          </a:p>
+          <a:p>
+            <a:pPr>
+              <a:spcAft>
+                <a:spcPts val="1000"/>
+              </a:spcAft>
+            </a:pPr>
+            <a:r>
+              <a:rPr sz="1200">
+                <a:solidFill>
+                  <a:srgbClr val="2FB5B4"/>
+                </a:solidFill>
+                <a:latin typeface="Calibri"/>
+              </a:rPr>
+              <a:t>● </a:t>
+            </a:r>
+            <a:r>
+              <a:rPr sz="1600" b="1">
+                <a:solidFill>
+                  <a:srgbClr val="0E4377"/>
+                </a:solidFill>
+                <a:latin typeface="Calibri"/>
+              </a:rPr>
+              <a:t>Sauvegarde et restauration</a:t>
+            </a:r>
+            <a:r>
+              <a:rPr sz="1500">
+                <a:solidFill>
+                  <a:srgbClr val="12263A"/>
+                </a:solidFill>
+                <a:latin typeface="Calibri"/>
+              </a:rPr>
+              <a:t> — en un clic</a:t>
+            </a:r>
+          </a:p>
+          <a:p>
+            <a:pPr>
+              <a:spcAft>
+                <a:spcPts val="1000"/>
+              </a:spcAft>
+            </a:pPr>
+            <a:r>
+              <a:rPr sz="1200">
+                <a:solidFill>
+                  <a:srgbClr val="2FB5B4"/>
+                </a:solidFill>
+                <a:latin typeface="Calibri"/>
+              </a:rPr>
+              <a:t>● </a:t>
+            </a:r>
+            <a:r>
+              <a:rPr sz="1600" b="1">
+                <a:solidFill>
+                  <a:srgbClr val="0E4377"/>
+                </a:solidFill>
+                <a:latin typeface="Calibri"/>
+              </a:rPr>
+              <a:t>Export et import Excel</a:t>
+            </a:r>
+            <a:r>
+              <a:rPr sz="1500">
+                <a:solidFill>
+                  <a:srgbClr val="12263A"/>
+                </a:solidFill>
+                <a:latin typeface="Calibri"/>
+              </a:rPr>
+              <a:t> — vos données ne sont pas prisonnières</a:t>
+            </a:r>
+          </a:p>
+          <a:p>
+            <a:pPr>
+              <a:spcAft>
+                <a:spcPts val="1000"/>
+              </a:spcAft>
+            </a:pPr>
+            <a:r>
+              <a:rPr sz="1200">
+                <a:solidFill>
+                  <a:srgbClr val="2FB5B4"/>
+                </a:solidFill>
+                <a:latin typeface="Calibri"/>
+              </a:rPr>
+              <a:t>● </a:t>
+            </a:r>
+            <a:r>
+              <a:rPr sz="1600" b="1">
+                <a:solidFill>
+                  <a:srgbClr val="0E4377"/>
+                </a:solidFill>
+                <a:latin typeface="Calibri"/>
+              </a:rPr>
+              <a:t>Charte de confidentialité</a:t>
+            </a:r>
+            <a:r>
+              <a:rPr sz="1500">
+                <a:solidFill>
+                  <a:srgbClr val="12263A"/>
+                </a:solidFill>
+                <a:latin typeface="Calibri"/>
+              </a:rPr>
+              <a:t> — visible sur chaque page</a:t>
+            </a:r>
+          </a:p>
+        </p:txBody>
+      </p:sp>
+      <p:pic>
+        <p:nvPicPr>
+          <p:cNvPr id="8" name="Picture 7" descr="43-setup-maintenance.png"/>
+          <p:cNvPicPr>
+            <a:picLocks noChangeAspect="1"/>
+          </p:cNvPicPr>
+          <p:nvPr/>
+        </p:nvPicPr>
+        <p:blipFill>
+          <a:blip r:embed="rId2"/>
+          <a:stretch>
+            <a:fillRect/>
+          </a:stretch>
+        </p:blipFill>
+        <p:spPr>
+          <a:xfrm>
+            <a:off x="6949440" y="1600200"/>
+            <a:ext cx="4768630" cy="4663440"/>
+          </a:xfrm>
+          <a:prstGeom prst="rect">
+            <a:avLst/>
+          </a:prstGeom>
+          <a:ln w="9525">
             <a:solidFill>
-              <a:srgbClr val="D9DFE5"/>
+              <a:srgbClr val="D0D7DE"/>
             </a:solidFill>
           </a:ln>
-          <a:effectLst/>
-        </p:spPr>
-        <p:style>
-          <a:lnRef idx="1">
-            <a:schemeClr val="accent1"/>
-          </a:lnRef>
-          <a:fillRef idx="3">
-            <a:schemeClr val="accent1"/>
-          </a:fillRef>
-          <a:effectRef idx="2">
-            <a:schemeClr val="accent1"/>
-          </a:effectRef>
-          <a:fontRef idx="minor">
-            <a:schemeClr val="lt1"/>
-          </a:fontRef>
-        </p:style>
-        <p:txBody>
-          <a:bodyPr rtlCol="0" anchor="ctr"/>
-          <a:lstStyle/>
-          <a:p>
-            <a:pPr algn="ctr"/>
-          </a:p>
-        </p:txBody>
-      </p:sp>
-      <p:sp>
-        <p:nvSpPr>
-          <p:cNvPr id="8" name="TextBox 7"/>
-          <p:cNvSpPr txBox="1"/>
-          <p:nvPr/>
-        </p:nvSpPr>
-        <p:spPr>
-          <a:xfrm>
-            <a:off x="731520" y="1965960"/>
-            <a:ext cx="3246120" cy="457200"/>
-          </a:xfrm>
-          <a:prstGeom prst="rect">
-            <a:avLst/>
-          </a:prstGeom>
-          <a:noFill/>
-        </p:spPr>
-        <p:txBody>
-          <a:bodyPr wrap="square" anchor="t" lIns="45720" rIns="45720" tIns="27432" bIns="27432">
-            <a:spAutoFit/>
-          </a:bodyPr>
-          <a:lstStyle/>
-          <a:p>
-            <a:pPr algn="l"/>
-            <a:r>
-              <a:rPr sz="1700" b="1" i="0">
-                <a:solidFill>
-                  <a:srgbClr val="0E4377"/>
-                </a:solidFill>
-                <a:latin typeface="Calibri"/>
-              </a:rPr>
-              <a:t>1. Demandez votre essai</a:t>
-            </a:r>
-          </a:p>
-        </p:txBody>
-      </p:sp>
-      <p:sp>
-        <p:nvSpPr>
-          <p:cNvPr id="9" name="TextBox 8"/>
-          <p:cNvSpPr txBox="1"/>
-          <p:nvPr/>
-        </p:nvSpPr>
-        <p:spPr>
-          <a:xfrm>
-            <a:off x="731520" y="2514600"/>
-            <a:ext cx="3246120" cy="2468880"/>
-          </a:xfrm>
-          <a:prstGeom prst="rect">
-            <a:avLst/>
-          </a:prstGeom>
-          <a:noFill/>
-        </p:spPr>
-        <p:txBody>
-          <a:bodyPr wrap="square" anchor="t" lIns="45720" rIns="45720" tIns="27432" bIns="27432">
-            <a:spAutoFit/>
-          </a:bodyPr>
-          <a:lstStyle/>
-          <a:p>
-            <a:pPr algn="l"/>
-            <a:r>
-              <a:rPr sz="1700" b="0" i="0">
-                <a:solidFill>
-                  <a:srgbClr val="12263A"/>
-                </a:solidFill>
-                <a:latin typeface="Calibri"/>
-              </a:rPr>
-              <a:t>Un formulaire sur la page d'accueil. Votre espace est créé et les accès vous sont envoyés par e-mail.</a:t>
-            </a:r>
-          </a:p>
-        </p:txBody>
-      </p:sp>
-      <p:sp>
-        <p:nvSpPr>
-          <p:cNvPr id="10" name="Rounded Rectangle 9"/>
-          <p:cNvSpPr/>
-          <p:nvPr/>
-        </p:nvSpPr>
-        <p:spPr>
-          <a:xfrm>
-            <a:off x="4389120" y="1828800"/>
-            <a:ext cx="3611880" cy="3291840"/>
-          </a:xfrm>
-          <a:prstGeom prst="roundRect">
-            <a:avLst>
-              <a:gd name="adj" fmla="val 6000"/>
-            </a:avLst>
-          </a:prstGeom>
-          <a:solidFill>
-            <a:srgbClr val="FFFFFF"/>
-          </a:solidFill>
-          <a:ln>
-            <a:solidFill>
-              <a:srgbClr val="D9DFE5"/>
-            </a:solidFill>
-          </a:ln>
-          <a:effectLst/>
-        </p:spPr>
-        <p:style>
-          <a:lnRef idx="1">
-            <a:schemeClr val="accent1"/>
-          </a:lnRef>
-          <a:fillRef idx="3">
-            <a:schemeClr val="accent1"/>
-          </a:fillRef>
-          <a:effectRef idx="2">
-            <a:schemeClr val="accent1"/>
-          </a:effectRef>
-          <a:fontRef idx="minor">
-            <a:schemeClr val="lt1"/>
-          </a:fontRef>
-        </p:style>
-        <p:txBody>
-          <a:bodyPr rtlCol="0" anchor="ctr"/>
-          <a:lstStyle/>
-          <a:p>
-            <a:pPr algn="ctr"/>
-          </a:p>
-        </p:txBody>
-      </p:sp>
-      <p:sp>
-        <p:nvSpPr>
-          <p:cNvPr id="11" name="TextBox 10"/>
-          <p:cNvSpPr txBox="1"/>
-          <p:nvPr/>
-        </p:nvSpPr>
-        <p:spPr>
-          <a:xfrm>
-            <a:off x="4572000" y="1965960"/>
-            <a:ext cx="3246120" cy="457200"/>
-          </a:xfrm>
-          <a:prstGeom prst="rect">
-            <a:avLst/>
-          </a:prstGeom>
-          <a:noFill/>
-        </p:spPr>
-        <p:txBody>
-          <a:bodyPr wrap="square" anchor="t" lIns="45720" rIns="45720" tIns="27432" bIns="27432">
-            <a:spAutoFit/>
-          </a:bodyPr>
-          <a:lstStyle/>
-          <a:p>
-            <a:pPr algn="l"/>
-            <a:r>
-              <a:rPr sz="1700" b="1" i="0">
-                <a:solidFill>
-                  <a:srgbClr val="0E4377"/>
-                </a:solidFill>
-                <a:latin typeface="Calibri"/>
-              </a:rPr>
-              <a:t>2. Déposez votre contrat</a:t>
-            </a:r>
-          </a:p>
-        </p:txBody>
-      </p:sp>
-      <p:sp>
-        <p:nvSpPr>
-          <p:cNvPr id="12" name="TextBox 11"/>
-          <p:cNvSpPr txBox="1"/>
-          <p:nvPr/>
-        </p:nvSpPr>
-        <p:spPr>
-          <a:xfrm>
-            <a:off x="4572000" y="2514600"/>
-            <a:ext cx="3246120" cy="2468880"/>
-          </a:xfrm>
-          <a:prstGeom prst="rect">
-            <a:avLst/>
-          </a:prstGeom>
-          <a:noFill/>
-        </p:spPr>
-        <p:txBody>
-          <a:bodyPr wrap="square" anchor="t" lIns="45720" rIns="45720" tIns="27432" bIns="27432">
-            <a:spAutoFit/>
-          </a:bodyPr>
-          <a:lstStyle/>
-          <a:p>
-            <a:pPr algn="l"/>
-            <a:r>
-              <a:rPr sz="1700" b="0" i="0">
-                <a:solidFill>
-                  <a:srgbClr val="12263A"/>
-                </a:solidFill>
-                <a:latin typeface="Calibri"/>
-              </a:rPr>
-              <a:t>Le bordereau des prix est lu automatiquement. Ajoutez vos agents : leurs accès partent par e-mail.</a:t>
-            </a:r>
-          </a:p>
-        </p:txBody>
-      </p:sp>
-      <p:sp>
-        <p:nvSpPr>
-          <p:cNvPr id="13" name="Rounded Rectangle 12"/>
-          <p:cNvSpPr/>
-          <p:nvPr/>
-        </p:nvSpPr>
-        <p:spPr>
-          <a:xfrm>
-            <a:off x="8229600" y="1828800"/>
-            <a:ext cx="3611880" cy="3291840"/>
-          </a:xfrm>
-          <a:prstGeom prst="roundRect">
-            <a:avLst>
-              <a:gd name="adj" fmla="val 6000"/>
-            </a:avLst>
-          </a:prstGeom>
-          <a:solidFill>
-            <a:srgbClr val="FFFFFF"/>
-          </a:solidFill>
-          <a:ln>
-            <a:solidFill>
-              <a:srgbClr val="D9DFE5"/>
-            </a:solidFill>
-          </a:ln>
-          <a:effectLst/>
-        </p:spPr>
-        <p:style>
-          <a:lnRef idx="1">
-            <a:schemeClr val="accent1"/>
-          </a:lnRef>
-          <a:fillRef idx="3">
-            <a:schemeClr val="accent1"/>
-          </a:fillRef>
-          <a:effectRef idx="2">
-            <a:schemeClr val="accent1"/>
-          </a:effectRef>
-          <a:fontRef idx="minor">
-            <a:schemeClr val="lt1"/>
-          </a:fontRef>
-        </p:style>
-        <p:txBody>
-          <a:bodyPr rtlCol="0" anchor="ctr"/>
-          <a:lstStyle/>
-          <a:p>
-            <a:pPr algn="ctr"/>
-          </a:p>
-        </p:txBody>
-      </p:sp>
-      <p:sp>
-        <p:nvSpPr>
-          <p:cNvPr id="14" name="TextBox 13"/>
-          <p:cNvSpPr txBox="1"/>
-          <p:nvPr/>
-        </p:nvSpPr>
-        <p:spPr>
-          <a:xfrm>
-            <a:off x="8412480" y="1965960"/>
-            <a:ext cx="3246120" cy="457200"/>
-          </a:xfrm>
-          <a:prstGeom prst="rect">
-            <a:avLst/>
-          </a:prstGeom>
-          <a:noFill/>
-        </p:spPr>
-        <p:txBody>
-          <a:bodyPr wrap="square" anchor="t" lIns="45720" rIns="45720" tIns="27432" bIns="27432">
-            <a:spAutoFit/>
-          </a:bodyPr>
-          <a:lstStyle/>
-          <a:p>
-            <a:pPr algn="l"/>
-            <a:r>
-              <a:rPr sz="1700" b="1" i="0">
-                <a:solidFill>
-                  <a:srgbClr val="0E4377"/>
-                </a:solidFill>
-                <a:latin typeface="Calibri"/>
-              </a:rPr>
-              <a:t>3. Pointez</a:t>
-            </a:r>
-          </a:p>
-        </p:txBody>
-      </p:sp>
-      <p:sp>
-        <p:nvSpPr>
-          <p:cNvPr id="15" name="TextBox 14"/>
-          <p:cNvSpPr txBox="1"/>
-          <p:nvPr/>
-        </p:nvSpPr>
-        <p:spPr>
-          <a:xfrm>
-            <a:off x="8412480" y="2514600"/>
-            <a:ext cx="3246120" cy="2468880"/>
-          </a:xfrm>
-          <a:prstGeom prst="rect">
-            <a:avLst/>
-          </a:prstGeom>
-          <a:noFill/>
-        </p:spPr>
-        <p:txBody>
-          <a:bodyPr wrap="square" anchor="t" lIns="45720" rIns="45720" tIns="27432" bIns="27432">
-            <a:spAutoFit/>
-          </a:bodyPr>
-          <a:lstStyle/>
-          <a:p>
-            <a:pPr algn="l"/>
-            <a:r>
-              <a:rPr sz="1700" b="0" i="0">
-                <a:solidFill>
-                  <a:srgbClr val="12263A"/>
-                </a:solidFill>
-                <a:latin typeface="Calibri"/>
-              </a:rPr>
-              <a:t>Dès le premier jour. Les prévisions, les soldes et les vues se calculent seuls.</a:t>
-            </a:r>
-          </a:p>
-        </p:txBody>
-      </p:sp>
-      <p:sp>
-        <p:nvSpPr>
-          <p:cNvPr id="16" name="TextBox 15"/>
-          <p:cNvSpPr txBox="1"/>
-          <p:nvPr/>
-        </p:nvSpPr>
-        <p:spPr>
-          <a:xfrm>
-            <a:off x="548640" y="5532120"/>
-            <a:ext cx="11064240" cy="548640"/>
-          </a:xfrm>
-          <a:prstGeom prst="rect">
-            <a:avLst/>
-          </a:prstGeom>
-          <a:noFill/>
-        </p:spPr>
-        <p:txBody>
-          <a:bodyPr wrap="square" anchor="t" lIns="45720" rIns="45720" tIns="27432" bIns="27432">
-            <a:spAutoFit/>
-          </a:bodyPr>
-          <a:lstStyle/>
-          <a:p>
-            <a:pPr algn="l"/>
-            <a:r>
-              <a:rPr sz="1700" b="1" i="0">
-                <a:solidFill>
-                  <a:srgbClr val="16598D"/>
-                </a:solidFill>
-                <a:latin typeface="Calibri"/>
-              </a:rPr>
-              <a:t>Besoin de reprendre un historique ? Importez vos fichiers Excel : un mois par onglet.</a:t>
-            </a:r>
-          </a:p>
-        </p:txBody>
-      </p:sp>
+        </p:spPr>
+      </p:pic>
     </p:spTree>
   </p:cSld>
   <p:clrMapOvr>
@@ -8248,7 +7473,7 @@
             <a:avLst/>
           </a:prstGeom>
           <a:solidFill>
-            <a:srgbClr val="0E4377"/>
+            <a:srgbClr val="F4F1E8"/>
           </a:solidFill>
           <a:ln>
             <a:noFill/>
@@ -8277,30 +7502,49 @@
           </a:p>
         </p:txBody>
       </p:sp>
-      <p:pic>
-        <p:nvPicPr>
-          <p:cNvPr id="3" name="Picture 2" descr="logo-sijil-symbole.png"/>
-          <p:cNvPicPr>
-            <a:picLocks noChangeAspect="1"/>
-          </p:cNvPicPr>
-          <p:nvPr/>
-        </p:nvPicPr>
-        <p:blipFill>
-          <a:blip r:embed="rId2"/>
-          <a:stretch>
-            <a:fillRect/>
-          </a:stretch>
-        </p:blipFill>
-        <p:spPr>
-          <a:xfrm>
-            <a:off x="5184648" y="822960"/>
-            <a:ext cx="1833796" cy="1828800"/>
-          </a:xfrm>
-          <a:prstGeom prst="rect">
-            <a:avLst/>
-          </a:prstGeom>
-        </p:spPr>
-      </p:pic>
+      <p:sp>
+        <p:nvSpPr>
+          <p:cNvPr id="3" name="Rectangle 2"/>
+          <p:cNvSpPr/>
+          <p:nvPr/>
+        </p:nvSpPr>
+        <p:spPr>
+          <a:xfrm>
+            <a:off x="0" y="0"/>
+            <a:ext cx="12191695" cy="109728"/>
+          </a:xfrm>
+          <a:prstGeom prst="rect">
+            <a:avLst/>
+          </a:prstGeom>
+          <a:solidFill>
+            <a:srgbClr val="2FB5B4"/>
+          </a:solidFill>
+          <a:ln>
+            <a:noFill/>
+          </a:ln>
+        </p:spPr>
+        <p:style>
+          <a:lnRef idx="1">
+            <a:schemeClr val="accent1"/>
+          </a:lnRef>
+          <a:fillRef idx="3">
+            <a:schemeClr val="accent1"/>
+          </a:fillRef>
+          <a:effectRef idx="2">
+            <a:schemeClr val="accent1"/>
+          </a:effectRef>
+          <a:fontRef idx="minor">
+            <a:schemeClr val="lt1"/>
+          </a:fontRef>
+        </p:style>
+        <p:txBody>
+          <a:bodyPr rtlCol="0" anchor="ctr"/>
+          <a:lstStyle/>
+          <a:p>
+            <a:pPr algn="ctr"/>
+          </a:p>
+        </p:txBody>
+      </p:sp>
       <p:sp>
         <p:nvSpPr>
           <p:cNvPr id="4" name="TextBox 3"/>
@@ -8309,8 +7553,8 @@
         </p:nvSpPr>
         <p:spPr>
           <a:xfrm>
-            <a:off x="457200" y="2926080"/>
-            <a:ext cx="11247120" cy="914400"/>
+            <a:off x="548640" y="320040"/>
+            <a:ext cx="11064240" cy="731520"/>
           </a:xfrm>
           <a:prstGeom prst="rect">
             <a:avLst/>
@@ -8323,15 +7567,15 @@
           </a:bodyPr>
           <a:lstStyle/>
           <a:p>
-            <a:pPr algn="ctr"/>
-            <a:r>
-              <a:rPr sz="5400" b="1" i="0">
-                <a:solidFill>
-                  <a:srgbClr val="FFFFFF"/>
-                </a:solidFill>
-                <a:latin typeface="Calibri"/>
-              </a:rPr>
-              <a:t>Sijil</a:t>
+            <a:pPr algn="l"/>
+            <a:r>
+              <a:rPr sz="3200" b="1" i="0">
+                <a:solidFill>
+                  <a:srgbClr val="0E4377"/>
+                </a:solidFill>
+                <a:latin typeface="Calibri"/>
+              </a:rPr>
+              <a:t>Et ce n'est pas tout</a:t>
             </a:r>
           </a:p>
         </p:txBody>
@@ -8344,8 +7588,8 @@
         </p:nvSpPr>
         <p:spPr>
           <a:xfrm>
-            <a:off x="457200" y="3931920"/>
-            <a:ext cx="11247120" cy="640080"/>
+            <a:off x="548640" y="1005840"/>
+            <a:ext cx="11064240" cy="457200"/>
           </a:xfrm>
           <a:prstGeom prst="rect">
             <a:avLst/>
@@ -8358,15 +7602,15 @@
           </a:bodyPr>
           <a:lstStyle/>
           <a:p>
-            <a:pPr algn="ctr"/>
-            <a:r>
-              <a:rPr sz="2600" b="1" i="0">
-                <a:solidFill>
-                  <a:srgbClr val="2FB5B4"/>
-                </a:solidFill>
-                <a:latin typeface="Calibri"/>
-              </a:rPr>
-              <a:t>Gestion du temps de travail et des rotations</a:t>
+            <a:pPr algn="l"/>
+            <a:r>
+              <a:rPr sz="1700" b="0" i="0">
+                <a:solidFill>
+                  <a:srgbClr val="6B7785"/>
+                </a:solidFill>
+                <a:latin typeface="Calibri"/>
+              </a:rPr>
+              <a:t>Toutes les fonctions utiles au quotidien</a:t>
             </a:r>
           </a:p>
         </p:txBody>
@@ -8379,8 +7623,8 @@
         </p:nvSpPr>
         <p:spPr>
           <a:xfrm>
-            <a:off x="457200" y="4937760"/>
-            <a:ext cx="11247120" cy="548640"/>
+            <a:off x="548640" y="6473952"/>
+            <a:ext cx="8229600" cy="274320"/>
           </a:xfrm>
           <a:prstGeom prst="rect">
             <a:avLst/>
@@ -8393,15 +7637,15 @@
           </a:bodyPr>
           <a:lstStyle/>
           <a:p>
-            <a:pPr algn="ctr"/>
-            <a:r>
-              <a:rPr sz="2000" b="0" i="0">
-                <a:solidFill>
-                  <a:srgbClr val="FFFFFF"/>
-                </a:solidFill>
-                <a:latin typeface="Calibri"/>
-              </a:rPr>
-              <a:t>Demandez votre essai gratuit depuis la page d'accueil.</a:t>
+            <a:pPr algn="l"/>
+            <a:r>
+              <a:rPr sz="1000" b="0" i="0">
+                <a:solidFill>
+                  <a:srgbClr val="6B7785"/>
+                </a:solidFill>
+                <a:latin typeface="Calibri"/>
+              </a:rPr>
+              <a:t>© 2026 JawlaDev — Tous droits réservés</a:t>
             </a:r>
           </a:p>
         </p:txBody>
@@ -8414,8 +7658,8 @@
         </p:nvSpPr>
         <p:spPr>
           <a:xfrm>
-            <a:off x="457200" y="6126480"/>
-            <a:ext cx="11247120" cy="365760"/>
+            <a:off x="548640" y="1645920"/>
+            <a:ext cx="3657600" cy="4572000"/>
           </a:xfrm>
           <a:prstGeom prst="rect">
             <a:avLst/>
@@ -8423,20 +7667,654 @@
           <a:noFill/>
         </p:spPr>
         <p:txBody>
-          <a:bodyPr wrap="square" anchor="t" lIns="45720" rIns="45720" tIns="27432" bIns="27432">
+          <a:bodyPr wrap="square">
             <a:spAutoFit/>
           </a:bodyPr>
           <a:lstStyle/>
           <a:p>
-            <a:pPr algn="ctr"/>
-            <a:r>
-              <a:rPr sz="1100" b="0" i="0">
-                <a:solidFill>
-                  <a:srgbClr val="B8C8D8"/>
-                </a:solidFill>
-                <a:latin typeface="Calibri"/>
-              </a:rPr>
-              <a:t>© 2026 JawlaDev — Tous droits réservés</a:t>
+            <a:pPr>
+              <a:spcAft>
+                <a:spcPts val="1100"/>
+              </a:spcAft>
+            </a:pPr>
+            <a:r>
+              <a:rPr sz="1700" b="1">
+                <a:solidFill>
+                  <a:srgbClr val="2FB5B4"/>
+                </a:solidFill>
+                <a:latin typeface="Calibri"/>
+              </a:rPr>
+              <a:t>✔  </a:t>
+            </a:r>
+            <a:r>
+              <a:rPr sz="1700">
+                <a:solidFill>
+                  <a:srgbClr val="0E4377"/>
+                </a:solidFill>
+                <a:latin typeface="Calibri"/>
+              </a:rPr>
+              <a:t>Rattraper les jours oubliés</a:t>
+            </a:r>
+          </a:p>
+          <a:p>
+            <a:pPr>
+              <a:spcAft>
+                <a:spcPts val="1100"/>
+              </a:spcAft>
+            </a:pPr>
+            <a:r>
+              <a:rPr sz="1700" b="1">
+                <a:solidFill>
+                  <a:srgbClr val="2FB5B4"/>
+                </a:solidFill>
+                <a:latin typeface="Calibri"/>
+              </a:rPr>
+              <a:t>✔  </a:t>
+            </a:r>
+            <a:r>
+              <a:rPr sz="1700">
+                <a:solidFill>
+                  <a:srgbClr val="0E4377"/>
+                </a:solidFill>
+                <a:latin typeface="Calibri"/>
+              </a:rPr>
+              <a:t>Vues 1 mois, 3, 6, 12 mois</a:t>
+            </a:r>
+          </a:p>
+          <a:p>
+            <a:pPr>
+              <a:spcAft>
+                <a:spcPts val="1100"/>
+              </a:spcAft>
+            </a:pPr>
+            <a:r>
+              <a:rPr sz="1700" b="1">
+                <a:solidFill>
+                  <a:srgbClr val="2FB5B4"/>
+                </a:solidFill>
+                <a:latin typeface="Calibri"/>
+              </a:rPr>
+              <a:t>✔  </a:t>
+            </a:r>
+            <a:r>
+              <a:rPr sz="1700">
+                <a:solidFill>
+                  <a:srgbClr val="0E4377"/>
+                </a:solidFill>
+                <a:latin typeface="Calibri"/>
+              </a:rPr>
+              <a:t>Jours fériés algériens</a:t>
+            </a:r>
+          </a:p>
+          <a:p>
+            <a:pPr>
+              <a:spcAft>
+                <a:spcPts val="1100"/>
+              </a:spcAft>
+            </a:pPr>
+            <a:r>
+              <a:rPr sz="1700" b="1">
+                <a:solidFill>
+                  <a:srgbClr val="2FB5B4"/>
+                </a:solidFill>
+                <a:latin typeface="Calibri"/>
+              </a:rPr>
+              <a:t>✔  </a:t>
+            </a:r>
+            <a:r>
+              <a:rPr sz="1700">
+                <a:solidFill>
+                  <a:srgbClr val="0E4377"/>
+                </a:solidFill>
+                <a:latin typeface="Calibri"/>
+              </a:rPr>
+              <a:t>Solde T − CR et solde au départ</a:t>
+            </a:r>
+          </a:p>
+          <a:p>
+            <a:pPr>
+              <a:spcAft>
+                <a:spcPts val="1100"/>
+              </a:spcAft>
+            </a:pPr>
+            <a:r>
+              <a:rPr sz="1700" b="1">
+                <a:solidFill>
+                  <a:srgbClr val="2FB5B4"/>
+                </a:solidFill>
+                <a:latin typeface="Calibri"/>
+              </a:rPr>
+              <a:t>✔  </a:t>
+            </a:r>
+            <a:r>
+              <a:rPr sz="1700">
+                <a:solidFill>
+                  <a:srgbClr val="0E4377"/>
+                </a:solidFill>
+                <a:latin typeface="Calibri"/>
+              </a:rPr>
+              <a:t>Rotation par agent</a:t>
+            </a:r>
+          </a:p>
+          <a:p>
+            <a:pPr>
+              <a:spcAft>
+                <a:spcPts val="1100"/>
+              </a:spcAft>
+            </a:pPr>
+            <a:r>
+              <a:rPr sz="1700" b="1">
+                <a:solidFill>
+                  <a:srgbClr val="2FB5B4"/>
+                </a:solidFill>
+                <a:latin typeface="Calibri"/>
+              </a:rPr>
+              <a:t>✔  </a:t>
+            </a:r>
+            <a:r>
+              <a:rPr sz="1700">
+                <a:solidFill>
+                  <a:srgbClr val="0E4377"/>
+                </a:solidFill>
+                <a:latin typeface="Calibri"/>
+              </a:rPr>
+              <a:t>Modification de plusieurs agents</a:t>
+            </a:r>
+          </a:p>
+          <a:p>
+            <a:pPr>
+              <a:spcAft>
+                <a:spcPts val="1100"/>
+              </a:spcAft>
+            </a:pPr>
+            <a:r>
+              <a:rPr sz="1700" b="1">
+                <a:solidFill>
+                  <a:srgbClr val="2FB5B4"/>
+                </a:solidFill>
+                <a:latin typeface="Calibri"/>
+              </a:rPr>
+              <a:t>✔  </a:t>
+            </a:r>
+            <a:r>
+              <a:rPr sz="1700">
+                <a:solidFill>
+                  <a:srgbClr val="0E4377"/>
+                </a:solidFill>
+                <a:latin typeface="Calibri"/>
+              </a:rPr>
+              <a:t>Matériel mis à disposition (camions, 4x4…)</a:t>
+            </a:r>
+          </a:p>
+          <a:p>
+            <a:pPr>
+              <a:spcAft>
+                <a:spcPts val="1100"/>
+              </a:spcAft>
+            </a:pPr>
+            <a:r>
+              <a:rPr sz="1700" b="1">
+                <a:solidFill>
+                  <a:srgbClr val="2FB5B4"/>
+                </a:solidFill>
+                <a:latin typeface="Calibri"/>
+              </a:rPr>
+              <a:t>✔  </a:t>
+            </a:r>
+            <a:r>
+              <a:rPr sz="1700">
+                <a:solidFill>
+                  <a:srgbClr val="0E4377"/>
+                </a:solidFill>
+                <a:latin typeface="Calibri"/>
+              </a:rPr>
+              <a:t>Aide intégrée en 3 langues</a:t>
+            </a:r>
+          </a:p>
+        </p:txBody>
+      </p:sp>
+      <p:sp>
+        <p:nvSpPr>
+          <p:cNvPr id="8" name="TextBox 7"/>
+          <p:cNvSpPr txBox="1"/>
+          <p:nvPr/>
+        </p:nvSpPr>
+        <p:spPr>
+          <a:xfrm>
+            <a:off x="4389120" y="1645920"/>
+            <a:ext cx="3657600" cy="4572000"/>
+          </a:xfrm>
+          <a:prstGeom prst="rect">
+            <a:avLst/>
+          </a:prstGeom>
+          <a:noFill/>
+        </p:spPr>
+        <p:txBody>
+          <a:bodyPr wrap="square">
+            <a:spAutoFit/>
+          </a:bodyPr>
+          <a:lstStyle/>
+          <a:p>
+            <a:pPr>
+              <a:spcAft>
+                <a:spcPts val="1100"/>
+              </a:spcAft>
+            </a:pPr>
+            <a:r>
+              <a:rPr sz="1700" b="1">
+                <a:solidFill>
+                  <a:srgbClr val="2FB5B4"/>
+                </a:solidFill>
+                <a:latin typeface="Calibri"/>
+              </a:rPr>
+              <a:t>✔  </a:t>
+            </a:r>
+            <a:r>
+              <a:rPr sz="1700">
+                <a:solidFill>
+                  <a:srgbClr val="0E4377"/>
+                </a:solidFill>
+                <a:latin typeface="Calibri"/>
+              </a:rPr>
+              <a:t>Demandes regroupées</a:t>
+            </a:r>
+          </a:p>
+          <a:p>
+            <a:pPr>
+              <a:spcAft>
+                <a:spcPts val="1100"/>
+              </a:spcAft>
+            </a:pPr>
+            <a:r>
+              <a:rPr sz="1700" b="1">
+                <a:solidFill>
+                  <a:srgbClr val="2FB5B4"/>
+                </a:solidFill>
+                <a:latin typeface="Calibri"/>
+              </a:rPr>
+              <a:t>✔  </a:t>
+            </a:r>
+            <a:r>
+              <a:rPr sz="1700">
+                <a:solidFill>
+                  <a:srgbClr val="0E4377"/>
+                </a:solidFill>
+                <a:latin typeface="Calibri"/>
+              </a:rPr>
+              <a:t>Date de reprise calculée</a:t>
+            </a:r>
+          </a:p>
+          <a:p>
+            <a:pPr>
+              <a:spcAft>
+                <a:spcPts val="1100"/>
+              </a:spcAft>
+            </a:pPr>
+            <a:r>
+              <a:rPr sz="1700" b="1">
+                <a:solidFill>
+                  <a:srgbClr val="2FB5B4"/>
+                </a:solidFill>
+                <a:latin typeface="Calibri"/>
+              </a:rPr>
+              <a:t>✔  </a:t>
+            </a:r>
+            <a:r>
+              <a:rPr sz="1700">
+                <a:solidFill>
+                  <a:srgbClr val="0E4377"/>
+                </a:solidFill>
+                <a:latin typeface="Calibri"/>
+              </a:rPr>
+              <a:t>Documents rangés et renommés</a:t>
+            </a:r>
+          </a:p>
+          <a:p>
+            <a:pPr>
+              <a:spcAft>
+                <a:spcPts val="1100"/>
+              </a:spcAft>
+            </a:pPr>
+            <a:r>
+              <a:rPr sz="1700" b="1">
+                <a:solidFill>
+                  <a:srgbClr val="2FB5B4"/>
+                </a:solidFill>
+                <a:latin typeface="Calibri"/>
+              </a:rPr>
+              <a:t>✔  </a:t>
+            </a:r>
+            <a:r>
+              <a:rPr sz="1700">
+                <a:solidFill>
+                  <a:srgbClr val="0E4377"/>
+                </a:solidFill>
+                <a:latin typeface="Calibri"/>
+              </a:rPr>
+              <a:t>Accès par e-mail</a:t>
+            </a:r>
+          </a:p>
+          <a:p>
+            <a:pPr>
+              <a:spcAft>
+                <a:spcPts val="1100"/>
+              </a:spcAft>
+            </a:pPr>
+            <a:r>
+              <a:rPr sz="1700" b="1">
+                <a:solidFill>
+                  <a:srgbClr val="2FB5B4"/>
+                </a:solidFill>
+                <a:latin typeface="Calibri"/>
+              </a:rPr>
+              <a:t>✔  </a:t>
+            </a:r>
+            <a:r>
+              <a:rPr sz="1700">
+                <a:solidFill>
+                  <a:srgbClr val="0E4377"/>
+                </a:solidFill>
+                <a:latin typeface="Calibri"/>
+              </a:rPr>
+              <a:t>Pastilles et notifications</a:t>
+            </a:r>
+          </a:p>
+          <a:p>
+            <a:pPr>
+              <a:spcAft>
+                <a:spcPts val="1100"/>
+              </a:spcAft>
+            </a:pPr>
+            <a:r>
+              <a:rPr sz="1700" b="1">
+                <a:solidFill>
+                  <a:srgbClr val="2FB5B4"/>
+                </a:solidFill>
+                <a:latin typeface="Calibri"/>
+              </a:rPr>
+              <a:t>✔  </a:t>
+            </a:r>
+            <a:r>
+              <a:rPr sz="1700">
+                <a:solidFill>
+                  <a:srgbClr val="0E4377"/>
+                </a:solidFill>
+                <a:latin typeface="Calibri"/>
+              </a:rPr>
+              <a:t>Lecture du bordereau des prix (OCR)</a:t>
+            </a:r>
+          </a:p>
+          <a:p>
+            <a:pPr>
+              <a:spcAft>
+                <a:spcPts val="1100"/>
+              </a:spcAft>
+            </a:pPr>
+            <a:r>
+              <a:rPr sz="1700" b="1">
+                <a:solidFill>
+                  <a:srgbClr val="2FB5B4"/>
+                </a:solidFill>
+                <a:latin typeface="Calibri"/>
+              </a:rPr>
+              <a:t>✔  </a:t>
+            </a:r>
+            <a:r>
+              <a:rPr sz="1700">
+                <a:solidFill>
+                  <a:srgbClr val="0E4377"/>
+                </a:solidFill>
+                <a:latin typeface="Calibri"/>
+              </a:rPr>
+              <a:t>Effectifs bornés par le contrat</a:t>
+            </a:r>
+          </a:p>
+          <a:p>
+            <a:pPr>
+              <a:spcAft>
+                <a:spcPts val="1100"/>
+              </a:spcAft>
+            </a:pPr>
+            <a:r>
+              <a:rPr sz="1700" b="1">
+                <a:solidFill>
+                  <a:srgbClr val="2FB5B4"/>
+                </a:solidFill>
+                <a:latin typeface="Calibri"/>
+              </a:rPr>
+              <a:t>✔  </a:t>
+            </a:r>
+            <a:r>
+              <a:rPr sz="1700">
+                <a:solidFill>
+                  <a:srgbClr val="0E4377"/>
+                </a:solidFill>
+                <a:latin typeface="Calibri"/>
+              </a:rPr>
+              <a:t>Compte client et remarques</a:t>
+            </a:r>
+          </a:p>
+        </p:txBody>
+      </p:sp>
+      <p:sp>
+        <p:nvSpPr>
+          <p:cNvPr id="9" name="TextBox 8"/>
+          <p:cNvSpPr txBox="1"/>
+          <p:nvPr/>
+        </p:nvSpPr>
+        <p:spPr>
+          <a:xfrm>
+            <a:off x="8229600" y="1645920"/>
+            <a:ext cx="3657600" cy="4572000"/>
+          </a:xfrm>
+          <a:prstGeom prst="rect">
+            <a:avLst/>
+          </a:prstGeom>
+          <a:noFill/>
+        </p:spPr>
+        <p:txBody>
+          <a:bodyPr wrap="square">
+            <a:spAutoFit/>
+          </a:bodyPr>
+          <a:lstStyle/>
+          <a:p>
+            <a:pPr>
+              <a:spcAft>
+                <a:spcPts val="1100"/>
+              </a:spcAft>
+            </a:pPr>
+            <a:r>
+              <a:rPr sz="1700" b="1">
+                <a:solidFill>
+                  <a:srgbClr val="2FB5B4"/>
+                </a:solidFill>
+                <a:latin typeface="Calibri"/>
+              </a:rPr>
+              <a:t>✔  </a:t>
+            </a:r>
+            <a:r>
+              <a:rPr sz="1700">
+                <a:solidFill>
+                  <a:srgbClr val="0E4377"/>
+                </a:solidFill>
+                <a:latin typeface="Calibri"/>
+              </a:rPr>
+              <a:t>Attachement figé puis facture</a:t>
+            </a:r>
+          </a:p>
+          <a:p>
+            <a:pPr>
+              <a:spcAft>
+                <a:spcPts val="1100"/>
+              </a:spcAft>
+            </a:pPr>
+            <a:r>
+              <a:rPr sz="1700" b="1">
+                <a:solidFill>
+                  <a:srgbClr val="2FB5B4"/>
+                </a:solidFill>
+                <a:latin typeface="Calibri"/>
+              </a:rPr>
+              <a:t>✔  </a:t>
+            </a:r>
+            <a:r>
+              <a:rPr sz="1700">
+                <a:solidFill>
+                  <a:srgbClr val="0E4377"/>
+                </a:solidFill>
+                <a:latin typeface="Calibri"/>
+              </a:rPr>
+              <a:t>Historique et reste à facturer</a:t>
+            </a:r>
+          </a:p>
+          <a:p>
+            <a:pPr>
+              <a:spcAft>
+                <a:spcPts val="1100"/>
+              </a:spcAft>
+            </a:pPr>
+            <a:r>
+              <a:rPr sz="1700" b="1">
+                <a:solidFill>
+                  <a:srgbClr val="2FB5B4"/>
+                </a:solidFill>
+                <a:latin typeface="Calibri"/>
+              </a:rPr>
+              <a:t>✔  </a:t>
+            </a:r>
+            <a:r>
+              <a:rPr sz="1700">
+                <a:solidFill>
+                  <a:srgbClr val="0E4377"/>
+                </a:solidFill>
+                <a:latin typeface="Calibri"/>
+              </a:rPr>
+              <a:t>Fiche de pointage Excel / PDF</a:t>
+            </a:r>
+          </a:p>
+          <a:p>
+            <a:pPr>
+              <a:spcAft>
+                <a:spcPts val="1100"/>
+              </a:spcAft>
+            </a:pPr>
+            <a:r>
+              <a:rPr sz="1700" b="1">
+                <a:solidFill>
+                  <a:srgbClr val="2FB5B4"/>
+                </a:solidFill>
+                <a:latin typeface="Calibri"/>
+              </a:rPr>
+              <a:t>✔  </a:t>
+            </a:r>
+            <a:r>
+              <a:rPr sz="1700">
+                <a:solidFill>
+                  <a:srgbClr val="0E4377"/>
+                </a:solidFill>
+                <a:latin typeface="Calibri"/>
+              </a:rPr>
+              <a:t>Export et import Excel</a:t>
+            </a:r>
+          </a:p>
+          <a:p>
+            <a:pPr>
+              <a:spcAft>
+                <a:spcPts val="1100"/>
+              </a:spcAft>
+            </a:pPr>
+            <a:r>
+              <a:rPr sz="1700" b="1">
+                <a:solidFill>
+                  <a:srgbClr val="2FB5B4"/>
+                </a:solidFill>
+                <a:latin typeface="Calibri"/>
+              </a:rPr>
+              <a:t>✔  </a:t>
+            </a:r>
+            <a:r>
+              <a:rPr sz="1700">
+                <a:solidFill>
+                  <a:srgbClr val="0E4377"/>
+                </a:solidFill>
+                <a:latin typeface="Calibri"/>
+              </a:rPr>
+              <a:t>Sauvegarde et restauration</a:t>
+            </a:r>
+          </a:p>
+          <a:p>
+            <a:pPr>
+              <a:spcAft>
+                <a:spcPts val="1100"/>
+              </a:spcAft>
+            </a:pPr>
+            <a:r>
+              <a:rPr sz="1700" b="1">
+                <a:solidFill>
+                  <a:srgbClr val="2FB5B4"/>
+                </a:solidFill>
+                <a:latin typeface="Calibri"/>
+              </a:rPr>
+              <a:t>✔  </a:t>
+            </a:r>
+            <a:r>
+              <a:rPr sz="1700">
+                <a:solidFill>
+                  <a:srgbClr val="0E4377"/>
+                </a:solidFill>
+                <a:latin typeface="Calibri"/>
+              </a:rPr>
+              <a:t>Mode sombre</a:t>
+            </a:r>
+          </a:p>
+          <a:p>
+            <a:pPr>
+              <a:spcAft>
+                <a:spcPts val="1100"/>
+              </a:spcAft>
+            </a:pPr>
+            <a:r>
+              <a:rPr sz="1700" b="1">
+                <a:solidFill>
+                  <a:srgbClr val="2FB5B4"/>
+                </a:solidFill>
+                <a:latin typeface="Calibri"/>
+              </a:rPr>
+              <a:t>✔  </a:t>
+            </a:r>
+            <a:r>
+              <a:rPr sz="1700">
+                <a:solidFill>
+                  <a:srgbClr val="0E4377"/>
+                </a:solidFill>
+                <a:latin typeface="Calibri"/>
+              </a:rPr>
+              <a:t>Installable sur téléphone</a:t>
+            </a:r>
+          </a:p>
+          <a:p>
+            <a:pPr>
+              <a:spcAft>
+                <a:spcPts val="1100"/>
+              </a:spcAft>
+            </a:pPr>
+            <a:r>
+              <a:rPr sz="1700" b="1">
+                <a:solidFill>
+                  <a:srgbClr val="2FB5B4"/>
+                </a:solidFill>
+                <a:latin typeface="Calibri"/>
+              </a:rPr>
+              <a:t>✔  </a:t>
+            </a:r>
+            <a:r>
+              <a:rPr sz="1700">
+                <a:solidFill>
+                  <a:srgbClr val="0E4377"/>
+                </a:solidFill>
+                <a:latin typeface="Calibri"/>
+              </a:rPr>
+              <a:t>Charte de confidentialité</a:t>
             </a:r>
           </a:p>
         </p:txBody>
@@ -9367,6 +9245,831 @@
 </p:sld>
 </file>
 
+<file path=ppt/slides/slide20.xml><?xml version="1.0" encoding="utf-8"?>
+<p:sld xmlns:a="http://schemas.openxmlformats.org/drawingml/2006/main" xmlns:p="http://schemas.openxmlformats.org/presentationml/2006/main" xmlns:r="http://schemas.openxmlformats.org/officeDocument/2006/relationships">
+  <p:cSld>
+    <p:spTree>
+      <p:nvGrpSpPr>
+        <p:cNvPr id="1" name=""/>
+        <p:cNvGrpSpPr/>
+        <p:nvPr/>
+      </p:nvGrpSpPr>
+      <p:grpSpPr/>
+      <p:sp>
+        <p:nvSpPr>
+          <p:cNvPr id="2" name="Rectangle 1"/>
+          <p:cNvSpPr/>
+          <p:nvPr/>
+        </p:nvSpPr>
+        <p:spPr>
+          <a:xfrm>
+            <a:off x="0" y="0"/>
+            <a:ext cx="12191695" cy="6858000"/>
+          </a:xfrm>
+          <a:prstGeom prst="rect">
+            <a:avLst/>
+          </a:prstGeom>
+          <a:solidFill>
+            <a:srgbClr val="FFFFFF"/>
+          </a:solidFill>
+          <a:ln>
+            <a:noFill/>
+          </a:ln>
+          <a:effectLst/>
+        </p:spPr>
+        <p:style>
+          <a:lnRef idx="1">
+            <a:schemeClr val="accent1"/>
+          </a:lnRef>
+          <a:fillRef idx="3">
+            <a:schemeClr val="accent1"/>
+          </a:fillRef>
+          <a:effectRef idx="2">
+            <a:schemeClr val="accent1"/>
+          </a:effectRef>
+          <a:fontRef idx="minor">
+            <a:schemeClr val="lt1"/>
+          </a:fontRef>
+        </p:style>
+        <p:txBody>
+          <a:bodyPr rtlCol="0" anchor="ctr"/>
+          <a:lstStyle/>
+          <a:p>
+            <a:pPr algn="ctr"/>
+          </a:p>
+        </p:txBody>
+      </p:sp>
+      <p:sp>
+        <p:nvSpPr>
+          <p:cNvPr id="3" name="Rectangle 2"/>
+          <p:cNvSpPr/>
+          <p:nvPr/>
+        </p:nvSpPr>
+        <p:spPr>
+          <a:xfrm>
+            <a:off x="0" y="0"/>
+            <a:ext cx="12191695" cy="109728"/>
+          </a:xfrm>
+          <a:prstGeom prst="rect">
+            <a:avLst/>
+          </a:prstGeom>
+          <a:solidFill>
+            <a:srgbClr val="2FB5B4"/>
+          </a:solidFill>
+          <a:ln>
+            <a:noFill/>
+          </a:ln>
+        </p:spPr>
+        <p:style>
+          <a:lnRef idx="1">
+            <a:schemeClr val="accent1"/>
+          </a:lnRef>
+          <a:fillRef idx="3">
+            <a:schemeClr val="accent1"/>
+          </a:fillRef>
+          <a:effectRef idx="2">
+            <a:schemeClr val="accent1"/>
+          </a:effectRef>
+          <a:fontRef idx="minor">
+            <a:schemeClr val="lt1"/>
+          </a:fontRef>
+        </p:style>
+        <p:txBody>
+          <a:bodyPr rtlCol="0" anchor="ctr"/>
+          <a:lstStyle/>
+          <a:p>
+            <a:pPr algn="ctr"/>
+          </a:p>
+        </p:txBody>
+      </p:sp>
+      <p:sp>
+        <p:nvSpPr>
+          <p:cNvPr id="4" name="TextBox 3"/>
+          <p:cNvSpPr txBox="1"/>
+          <p:nvPr/>
+        </p:nvSpPr>
+        <p:spPr>
+          <a:xfrm>
+            <a:off x="548640" y="320040"/>
+            <a:ext cx="11064240" cy="731520"/>
+          </a:xfrm>
+          <a:prstGeom prst="rect">
+            <a:avLst/>
+          </a:prstGeom>
+          <a:noFill/>
+        </p:spPr>
+        <p:txBody>
+          <a:bodyPr wrap="square" anchor="t" lIns="45720" rIns="45720" tIns="27432" bIns="27432">
+            <a:spAutoFit/>
+          </a:bodyPr>
+          <a:lstStyle/>
+          <a:p>
+            <a:pPr algn="l"/>
+            <a:r>
+              <a:rPr sz="3200" b="1" i="0">
+                <a:solidFill>
+                  <a:srgbClr val="0E4377"/>
+                </a:solidFill>
+                <a:latin typeface="Calibri"/>
+              </a:rPr>
+              <a:t>Prêt en trois étapes</a:t>
+            </a:r>
+          </a:p>
+        </p:txBody>
+      </p:sp>
+      <p:sp>
+        <p:nvSpPr>
+          <p:cNvPr id="5" name="TextBox 4"/>
+          <p:cNvSpPr txBox="1"/>
+          <p:nvPr/>
+        </p:nvSpPr>
+        <p:spPr>
+          <a:xfrm>
+            <a:off x="548640" y="1005840"/>
+            <a:ext cx="11064240" cy="457200"/>
+          </a:xfrm>
+          <a:prstGeom prst="rect">
+            <a:avLst/>
+          </a:prstGeom>
+          <a:noFill/>
+        </p:spPr>
+        <p:txBody>
+          <a:bodyPr wrap="square" anchor="t" lIns="45720" rIns="45720" tIns="27432" bIns="27432">
+            <a:spAutoFit/>
+          </a:bodyPr>
+          <a:lstStyle/>
+          <a:p>
+            <a:pPr algn="l"/>
+            <a:r>
+              <a:rPr sz="1700" b="0" i="0">
+                <a:solidFill>
+                  <a:srgbClr val="6B7785"/>
+                </a:solidFill>
+                <a:latin typeface="Calibri"/>
+              </a:rPr>
+              <a:t>Du premier essai au premier pointage</a:t>
+            </a:r>
+          </a:p>
+        </p:txBody>
+      </p:sp>
+      <p:sp>
+        <p:nvSpPr>
+          <p:cNvPr id="6" name="TextBox 5"/>
+          <p:cNvSpPr txBox="1"/>
+          <p:nvPr/>
+        </p:nvSpPr>
+        <p:spPr>
+          <a:xfrm>
+            <a:off x="548640" y="6473952"/>
+            <a:ext cx="8229600" cy="274320"/>
+          </a:xfrm>
+          <a:prstGeom prst="rect">
+            <a:avLst/>
+          </a:prstGeom>
+          <a:noFill/>
+        </p:spPr>
+        <p:txBody>
+          <a:bodyPr wrap="square" anchor="t" lIns="45720" rIns="45720" tIns="27432" bIns="27432">
+            <a:spAutoFit/>
+          </a:bodyPr>
+          <a:lstStyle/>
+          <a:p>
+            <a:pPr algn="l"/>
+            <a:r>
+              <a:rPr sz="1000" b="0" i="0">
+                <a:solidFill>
+                  <a:srgbClr val="6B7785"/>
+                </a:solidFill>
+                <a:latin typeface="Calibri"/>
+              </a:rPr>
+              <a:t>© 2026 JawlaDev — Tous droits réservés</a:t>
+            </a:r>
+          </a:p>
+        </p:txBody>
+      </p:sp>
+      <p:sp>
+        <p:nvSpPr>
+          <p:cNvPr id="7" name="Rounded Rectangle 6"/>
+          <p:cNvSpPr/>
+          <p:nvPr/>
+        </p:nvSpPr>
+        <p:spPr>
+          <a:xfrm>
+            <a:off x="548640" y="1828800"/>
+            <a:ext cx="3611880" cy="3291840"/>
+          </a:xfrm>
+          <a:prstGeom prst="roundRect">
+            <a:avLst>
+              <a:gd name="adj" fmla="val 6000"/>
+            </a:avLst>
+          </a:prstGeom>
+          <a:solidFill>
+            <a:srgbClr val="FFFFFF"/>
+          </a:solidFill>
+          <a:ln>
+            <a:solidFill>
+              <a:srgbClr val="D9DFE5"/>
+            </a:solidFill>
+          </a:ln>
+          <a:effectLst/>
+        </p:spPr>
+        <p:style>
+          <a:lnRef idx="1">
+            <a:schemeClr val="accent1"/>
+          </a:lnRef>
+          <a:fillRef idx="3">
+            <a:schemeClr val="accent1"/>
+          </a:fillRef>
+          <a:effectRef idx="2">
+            <a:schemeClr val="accent1"/>
+          </a:effectRef>
+          <a:fontRef idx="minor">
+            <a:schemeClr val="lt1"/>
+          </a:fontRef>
+        </p:style>
+        <p:txBody>
+          <a:bodyPr rtlCol="0" anchor="ctr"/>
+          <a:lstStyle/>
+          <a:p>
+            <a:pPr algn="ctr"/>
+          </a:p>
+        </p:txBody>
+      </p:sp>
+      <p:sp>
+        <p:nvSpPr>
+          <p:cNvPr id="8" name="TextBox 7"/>
+          <p:cNvSpPr txBox="1"/>
+          <p:nvPr/>
+        </p:nvSpPr>
+        <p:spPr>
+          <a:xfrm>
+            <a:off x="731520" y="1965960"/>
+            <a:ext cx="3246120" cy="457200"/>
+          </a:xfrm>
+          <a:prstGeom prst="rect">
+            <a:avLst/>
+          </a:prstGeom>
+          <a:noFill/>
+        </p:spPr>
+        <p:txBody>
+          <a:bodyPr wrap="square" anchor="t" lIns="45720" rIns="45720" tIns="27432" bIns="27432">
+            <a:spAutoFit/>
+          </a:bodyPr>
+          <a:lstStyle/>
+          <a:p>
+            <a:pPr algn="l"/>
+            <a:r>
+              <a:rPr sz="1700" b="1" i="0">
+                <a:solidFill>
+                  <a:srgbClr val="0E4377"/>
+                </a:solidFill>
+                <a:latin typeface="Calibri"/>
+              </a:rPr>
+              <a:t>1. Demandez votre essai</a:t>
+            </a:r>
+          </a:p>
+        </p:txBody>
+      </p:sp>
+      <p:sp>
+        <p:nvSpPr>
+          <p:cNvPr id="9" name="TextBox 8"/>
+          <p:cNvSpPr txBox="1"/>
+          <p:nvPr/>
+        </p:nvSpPr>
+        <p:spPr>
+          <a:xfrm>
+            <a:off x="731520" y="2514600"/>
+            <a:ext cx="3246120" cy="2468880"/>
+          </a:xfrm>
+          <a:prstGeom prst="rect">
+            <a:avLst/>
+          </a:prstGeom>
+          <a:noFill/>
+        </p:spPr>
+        <p:txBody>
+          <a:bodyPr wrap="square" anchor="t" lIns="45720" rIns="45720" tIns="27432" bIns="27432">
+            <a:spAutoFit/>
+          </a:bodyPr>
+          <a:lstStyle/>
+          <a:p>
+            <a:pPr algn="l"/>
+            <a:r>
+              <a:rPr sz="1700" b="0" i="0">
+                <a:solidFill>
+                  <a:srgbClr val="12263A"/>
+                </a:solidFill>
+                <a:latin typeface="Calibri"/>
+              </a:rPr>
+              <a:t>Un formulaire sur la page d'accueil. Votre espace est créé et les accès vous sont envoyés par e-mail.</a:t>
+            </a:r>
+          </a:p>
+        </p:txBody>
+      </p:sp>
+      <p:sp>
+        <p:nvSpPr>
+          <p:cNvPr id="10" name="Rounded Rectangle 9"/>
+          <p:cNvSpPr/>
+          <p:nvPr/>
+        </p:nvSpPr>
+        <p:spPr>
+          <a:xfrm>
+            <a:off x="4389120" y="1828800"/>
+            <a:ext cx="3611880" cy="3291840"/>
+          </a:xfrm>
+          <a:prstGeom prst="roundRect">
+            <a:avLst>
+              <a:gd name="adj" fmla="val 6000"/>
+            </a:avLst>
+          </a:prstGeom>
+          <a:solidFill>
+            <a:srgbClr val="FFFFFF"/>
+          </a:solidFill>
+          <a:ln>
+            <a:solidFill>
+              <a:srgbClr val="D9DFE5"/>
+            </a:solidFill>
+          </a:ln>
+          <a:effectLst/>
+        </p:spPr>
+        <p:style>
+          <a:lnRef idx="1">
+            <a:schemeClr val="accent1"/>
+          </a:lnRef>
+          <a:fillRef idx="3">
+            <a:schemeClr val="accent1"/>
+          </a:fillRef>
+          <a:effectRef idx="2">
+            <a:schemeClr val="accent1"/>
+          </a:effectRef>
+          <a:fontRef idx="minor">
+            <a:schemeClr val="lt1"/>
+          </a:fontRef>
+        </p:style>
+        <p:txBody>
+          <a:bodyPr rtlCol="0" anchor="ctr"/>
+          <a:lstStyle/>
+          <a:p>
+            <a:pPr algn="ctr"/>
+          </a:p>
+        </p:txBody>
+      </p:sp>
+      <p:sp>
+        <p:nvSpPr>
+          <p:cNvPr id="11" name="TextBox 10"/>
+          <p:cNvSpPr txBox="1"/>
+          <p:nvPr/>
+        </p:nvSpPr>
+        <p:spPr>
+          <a:xfrm>
+            <a:off x="4572000" y="1965960"/>
+            <a:ext cx="3246120" cy="457200"/>
+          </a:xfrm>
+          <a:prstGeom prst="rect">
+            <a:avLst/>
+          </a:prstGeom>
+          <a:noFill/>
+        </p:spPr>
+        <p:txBody>
+          <a:bodyPr wrap="square" anchor="t" lIns="45720" rIns="45720" tIns="27432" bIns="27432">
+            <a:spAutoFit/>
+          </a:bodyPr>
+          <a:lstStyle/>
+          <a:p>
+            <a:pPr algn="l"/>
+            <a:r>
+              <a:rPr sz="1700" b="1" i="0">
+                <a:solidFill>
+                  <a:srgbClr val="0E4377"/>
+                </a:solidFill>
+                <a:latin typeface="Calibri"/>
+              </a:rPr>
+              <a:t>2. Déposez votre contrat</a:t>
+            </a:r>
+          </a:p>
+        </p:txBody>
+      </p:sp>
+      <p:sp>
+        <p:nvSpPr>
+          <p:cNvPr id="12" name="TextBox 11"/>
+          <p:cNvSpPr txBox="1"/>
+          <p:nvPr/>
+        </p:nvSpPr>
+        <p:spPr>
+          <a:xfrm>
+            <a:off x="4572000" y="2514600"/>
+            <a:ext cx="3246120" cy="2468880"/>
+          </a:xfrm>
+          <a:prstGeom prst="rect">
+            <a:avLst/>
+          </a:prstGeom>
+          <a:noFill/>
+        </p:spPr>
+        <p:txBody>
+          <a:bodyPr wrap="square" anchor="t" lIns="45720" rIns="45720" tIns="27432" bIns="27432">
+            <a:spAutoFit/>
+          </a:bodyPr>
+          <a:lstStyle/>
+          <a:p>
+            <a:pPr algn="l"/>
+            <a:r>
+              <a:rPr sz="1700" b="0" i="0">
+                <a:solidFill>
+                  <a:srgbClr val="12263A"/>
+                </a:solidFill>
+                <a:latin typeface="Calibri"/>
+              </a:rPr>
+              <a:t>Le bordereau des prix est lu automatiquement. Ajoutez vos agents : leurs accès partent par e-mail.</a:t>
+            </a:r>
+          </a:p>
+        </p:txBody>
+      </p:sp>
+      <p:sp>
+        <p:nvSpPr>
+          <p:cNvPr id="13" name="Rounded Rectangle 12"/>
+          <p:cNvSpPr/>
+          <p:nvPr/>
+        </p:nvSpPr>
+        <p:spPr>
+          <a:xfrm>
+            <a:off x="8229600" y="1828800"/>
+            <a:ext cx="3611880" cy="3291840"/>
+          </a:xfrm>
+          <a:prstGeom prst="roundRect">
+            <a:avLst>
+              <a:gd name="adj" fmla="val 6000"/>
+            </a:avLst>
+          </a:prstGeom>
+          <a:solidFill>
+            <a:srgbClr val="FFFFFF"/>
+          </a:solidFill>
+          <a:ln>
+            <a:solidFill>
+              <a:srgbClr val="D9DFE5"/>
+            </a:solidFill>
+          </a:ln>
+          <a:effectLst/>
+        </p:spPr>
+        <p:style>
+          <a:lnRef idx="1">
+            <a:schemeClr val="accent1"/>
+          </a:lnRef>
+          <a:fillRef idx="3">
+            <a:schemeClr val="accent1"/>
+          </a:fillRef>
+          <a:effectRef idx="2">
+            <a:schemeClr val="accent1"/>
+          </a:effectRef>
+          <a:fontRef idx="minor">
+            <a:schemeClr val="lt1"/>
+          </a:fontRef>
+        </p:style>
+        <p:txBody>
+          <a:bodyPr rtlCol="0" anchor="ctr"/>
+          <a:lstStyle/>
+          <a:p>
+            <a:pPr algn="ctr"/>
+          </a:p>
+        </p:txBody>
+      </p:sp>
+      <p:sp>
+        <p:nvSpPr>
+          <p:cNvPr id="14" name="TextBox 13"/>
+          <p:cNvSpPr txBox="1"/>
+          <p:nvPr/>
+        </p:nvSpPr>
+        <p:spPr>
+          <a:xfrm>
+            <a:off x="8412480" y="1965960"/>
+            <a:ext cx="3246120" cy="457200"/>
+          </a:xfrm>
+          <a:prstGeom prst="rect">
+            <a:avLst/>
+          </a:prstGeom>
+          <a:noFill/>
+        </p:spPr>
+        <p:txBody>
+          <a:bodyPr wrap="square" anchor="t" lIns="45720" rIns="45720" tIns="27432" bIns="27432">
+            <a:spAutoFit/>
+          </a:bodyPr>
+          <a:lstStyle/>
+          <a:p>
+            <a:pPr algn="l"/>
+            <a:r>
+              <a:rPr sz="1700" b="1" i="0">
+                <a:solidFill>
+                  <a:srgbClr val="0E4377"/>
+                </a:solidFill>
+                <a:latin typeface="Calibri"/>
+              </a:rPr>
+              <a:t>3. Pointez</a:t>
+            </a:r>
+          </a:p>
+        </p:txBody>
+      </p:sp>
+      <p:sp>
+        <p:nvSpPr>
+          <p:cNvPr id="15" name="TextBox 14"/>
+          <p:cNvSpPr txBox="1"/>
+          <p:nvPr/>
+        </p:nvSpPr>
+        <p:spPr>
+          <a:xfrm>
+            <a:off x="8412480" y="2514600"/>
+            <a:ext cx="3246120" cy="2468880"/>
+          </a:xfrm>
+          <a:prstGeom prst="rect">
+            <a:avLst/>
+          </a:prstGeom>
+          <a:noFill/>
+        </p:spPr>
+        <p:txBody>
+          <a:bodyPr wrap="square" anchor="t" lIns="45720" rIns="45720" tIns="27432" bIns="27432">
+            <a:spAutoFit/>
+          </a:bodyPr>
+          <a:lstStyle/>
+          <a:p>
+            <a:pPr algn="l"/>
+            <a:r>
+              <a:rPr sz="1700" b="0" i="0">
+                <a:solidFill>
+                  <a:srgbClr val="12263A"/>
+                </a:solidFill>
+                <a:latin typeface="Calibri"/>
+              </a:rPr>
+              <a:t>Dès le premier jour. Les prévisions, les soldes et les vues se calculent seuls.</a:t>
+            </a:r>
+          </a:p>
+        </p:txBody>
+      </p:sp>
+      <p:sp>
+        <p:nvSpPr>
+          <p:cNvPr id="16" name="TextBox 15"/>
+          <p:cNvSpPr txBox="1"/>
+          <p:nvPr/>
+        </p:nvSpPr>
+        <p:spPr>
+          <a:xfrm>
+            <a:off x="548640" y="5532120"/>
+            <a:ext cx="11064240" cy="548640"/>
+          </a:xfrm>
+          <a:prstGeom prst="rect">
+            <a:avLst/>
+          </a:prstGeom>
+          <a:noFill/>
+        </p:spPr>
+        <p:txBody>
+          <a:bodyPr wrap="square" anchor="t" lIns="45720" rIns="45720" tIns="27432" bIns="27432">
+            <a:spAutoFit/>
+          </a:bodyPr>
+          <a:lstStyle/>
+          <a:p>
+            <a:pPr algn="l"/>
+            <a:r>
+              <a:rPr sz="1700" b="1" i="0">
+                <a:solidFill>
+                  <a:srgbClr val="16598D"/>
+                </a:solidFill>
+                <a:latin typeface="Calibri"/>
+              </a:rPr>
+              <a:t>Besoin de reprendre un historique ? Importez vos fichiers Excel : un mois par onglet.</a:t>
+            </a:r>
+          </a:p>
+        </p:txBody>
+      </p:sp>
+    </p:spTree>
+  </p:cSld>
+  <p:clrMapOvr>
+    <a:masterClrMapping/>
+  </p:clrMapOvr>
+</p:sld>
+</file>
+
+<file path=ppt/slides/slide21.xml><?xml version="1.0" encoding="utf-8"?>
+<p:sld xmlns:a="http://schemas.openxmlformats.org/drawingml/2006/main" xmlns:p="http://schemas.openxmlformats.org/presentationml/2006/main" xmlns:r="http://schemas.openxmlformats.org/officeDocument/2006/relationships">
+  <p:cSld>
+    <p:spTree>
+      <p:nvGrpSpPr>
+        <p:cNvPr id="1" name=""/>
+        <p:cNvGrpSpPr/>
+        <p:nvPr/>
+      </p:nvGrpSpPr>
+      <p:grpSpPr/>
+      <p:sp>
+        <p:nvSpPr>
+          <p:cNvPr id="2" name="Rectangle 1"/>
+          <p:cNvSpPr/>
+          <p:nvPr/>
+        </p:nvSpPr>
+        <p:spPr>
+          <a:xfrm>
+            <a:off x="0" y="0"/>
+            <a:ext cx="12191695" cy="6858000"/>
+          </a:xfrm>
+          <a:prstGeom prst="rect">
+            <a:avLst/>
+          </a:prstGeom>
+          <a:solidFill>
+            <a:srgbClr val="0E4377"/>
+          </a:solidFill>
+          <a:ln>
+            <a:noFill/>
+          </a:ln>
+          <a:effectLst/>
+        </p:spPr>
+        <p:style>
+          <a:lnRef idx="1">
+            <a:schemeClr val="accent1"/>
+          </a:lnRef>
+          <a:fillRef idx="3">
+            <a:schemeClr val="accent1"/>
+          </a:fillRef>
+          <a:effectRef idx="2">
+            <a:schemeClr val="accent1"/>
+          </a:effectRef>
+          <a:fontRef idx="minor">
+            <a:schemeClr val="lt1"/>
+          </a:fontRef>
+        </p:style>
+        <p:txBody>
+          <a:bodyPr rtlCol="0" anchor="ctr"/>
+          <a:lstStyle/>
+          <a:p>
+            <a:pPr algn="ctr"/>
+          </a:p>
+        </p:txBody>
+      </p:sp>
+      <p:pic>
+        <p:nvPicPr>
+          <p:cNvPr id="3" name="Picture 2" descr="logo-sijil-symbole.png"/>
+          <p:cNvPicPr>
+            <a:picLocks noChangeAspect="1"/>
+          </p:cNvPicPr>
+          <p:nvPr/>
+        </p:nvPicPr>
+        <p:blipFill>
+          <a:blip r:embed="rId2"/>
+          <a:stretch>
+            <a:fillRect/>
+          </a:stretch>
+        </p:blipFill>
+        <p:spPr>
+          <a:xfrm>
+            <a:off x="5184648" y="822960"/>
+            <a:ext cx="1833796" cy="1828800"/>
+          </a:xfrm>
+          <a:prstGeom prst="rect">
+            <a:avLst/>
+          </a:prstGeom>
+        </p:spPr>
+      </p:pic>
+      <p:sp>
+        <p:nvSpPr>
+          <p:cNvPr id="4" name="TextBox 3"/>
+          <p:cNvSpPr txBox="1"/>
+          <p:nvPr/>
+        </p:nvSpPr>
+        <p:spPr>
+          <a:xfrm>
+            <a:off x="457200" y="2926080"/>
+            <a:ext cx="11247120" cy="914400"/>
+          </a:xfrm>
+          <a:prstGeom prst="rect">
+            <a:avLst/>
+          </a:prstGeom>
+          <a:noFill/>
+        </p:spPr>
+        <p:txBody>
+          <a:bodyPr wrap="square" anchor="t" lIns="45720" rIns="45720" tIns="27432" bIns="27432">
+            <a:spAutoFit/>
+          </a:bodyPr>
+          <a:lstStyle/>
+          <a:p>
+            <a:pPr algn="ctr"/>
+            <a:r>
+              <a:rPr sz="5400" b="1" i="0">
+                <a:solidFill>
+                  <a:srgbClr val="FFFFFF"/>
+                </a:solidFill>
+                <a:latin typeface="Calibri"/>
+              </a:rPr>
+              <a:t>Sijil</a:t>
+            </a:r>
+          </a:p>
+        </p:txBody>
+      </p:sp>
+      <p:sp>
+        <p:nvSpPr>
+          <p:cNvPr id="5" name="TextBox 4"/>
+          <p:cNvSpPr txBox="1"/>
+          <p:nvPr/>
+        </p:nvSpPr>
+        <p:spPr>
+          <a:xfrm>
+            <a:off x="457200" y="3931920"/>
+            <a:ext cx="11247120" cy="640080"/>
+          </a:xfrm>
+          <a:prstGeom prst="rect">
+            <a:avLst/>
+          </a:prstGeom>
+          <a:noFill/>
+        </p:spPr>
+        <p:txBody>
+          <a:bodyPr wrap="square" anchor="t" lIns="45720" rIns="45720" tIns="27432" bIns="27432">
+            <a:spAutoFit/>
+          </a:bodyPr>
+          <a:lstStyle/>
+          <a:p>
+            <a:pPr algn="ctr"/>
+            <a:r>
+              <a:rPr sz="2600" b="1" i="0">
+                <a:solidFill>
+                  <a:srgbClr val="2FB5B4"/>
+                </a:solidFill>
+                <a:latin typeface="Calibri"/>
+              </a:rPr>
+              <a:t>Gestion du temps de travail et des rotations</a:t>
+            </a:r>
+          </a:p>
+        </p:txBody>
+      </p:sp>
+      <p:sp>
+        <p:nvSpPr>
+          <p:cNvPr id="6" name="TextBox 5"/>
+          <p:cNvSpPr txBox="1"/>
+          <p:nvPr/>
+        </p:nvSpPr>
+        <p:spPr>
+          <a:xfrm>
+            <a:off x="457200" y="4937760"/>
+            <a:ext cx="11247120" cy="548640"/>
+          </a:xfrm>
+          <a:prstGeom prst="rect">
+            <a:avLst/>
+          </a:prstGeom>
+          <a:noFill/>
+        </p:spPr>
+        <p:txBody>
+          <a:bodyPr wrap="square" anchor="t" lIns="45720" rIns="45720" tIns="27432" bIns="27432">
+            <a:spAutoFit/>
+          </a:bodyPr>
+          <a:lstStyle/>
+          <a:p>
+            <a:pPr algn="ctr"/>
+            <a:r>
+              <a:rPr sz="2000" b="0" i="0">
+                <a:solidFill>
+                  <a:srgbClr val="FFFFFF"/>
+                </a:solidFill>
+                <a:latin typeface="Calibri"/>
+              </a:rPr>
+              <a:t>Demandez votre essai gratuit depuis la page d'accueil.</a:t>
+            </a:r>
+          </a:p>
+        </p:txBody>
+      </p:sp>
+      <p:sp>
+        <p:nvSpPr>
+          <p:cNvPr id="7" name="TextBox 6"/>
+          <p:cNvSpPr txBox="1"/>
+          <p:nvPr/>
+        </p:nvSpPr>
+        <p:spPr>
+          <a:xfrm>
+            <a:off x="457200" y="6126480"/>
+            <a:ext cx="11247120" cy="365760"/>
+          </a:xfrm>
+          <a:prstGeom prst="rect">
+            <a:avLst/>
+          </a:prstGeom>
+          <a:noFill/>
+        </p:spPr>
+        <p:txBody>
+          <a:bodyPr wrap="square" anchor="t" lIns="45720" rIns="45720" tIns="27432" bIns="27432">
+            <a:spAutoFit/>
+          </a:bodyPr>
+          <a:lstStyle/>
+          <a:p>
+            <a:pPr algn="ctr"/>
+            <a:r>
+              <a:rPr sz="1100" b="0" i="0">
+                <a:solidFill>
+                  <a:srgbClr val="B8C8D8"/>
+                </a:solidFill>
+                <a:latin typeface="Calibri"/>
+              </a:rPr>
+              <a:t>© 2026 JawlaDev — Tous droits réservés</a:t>
+            </a:r>
+          </a:p>
+        </p:txBody>
+      </p:sp>
+    </p:spTree>
+  </p:cSld>
+  <p:clrMapOvr>
+    <a:masterClrMapping/>
+  </p:clrMapOvr>
+</p:sld>
+</file>
+
 <file path=ppt/slides/slide3.xml><?xml version="1.0" encoding="utf-8"?>
 <p:sld xmlns:a="http://schemas.openxmlformats.org/drawingml/2006/main" xmlns:p="http://schemas.openxmlformats.org/presentationml/2006/main" xmlns:r="http://schemas.openxmlformats.org/officeDocument/2006/relationships">
   <p:cSld>
@@ -11908,7 +12611,7 @@
                 </a:solidFill>
                 <a:latin typeface="Calibri"/>
               </a:rPr>
-              <a:t>Véhicules</a:t>
+              <a:t>Matériel (camions, engins, 4x4)</a:t>
             </a:r>
             <a:r>
               <a:rPr sz="1500">
@@ -11917,7 +12620,7 @@
                 </a:solidFill>
                 <a:latin typeface="Calibri"/>
               </a:rPr>
-              <a:t> — pointés comme des agents</a:t>
+              <a:t> — pointé comme des agents</a:t>
             </a:r>
           </a:p>
         </p:txBody>
@@ -12057,7 +12760,7 @@
                 </a:solidFill>
                 <a:latin typeface="Calibri"/>
               </a:rPr>
-              <a:t>Vous avez oublié de pointer ? Un bouton suffit</a:t>
+              <a:t>Le matériel aussi : camions, engins, 4x4</a:t>
             </a:r>
           </a:p>
         </p:txBody>
@@ -12092,7 +12795,7 @@
                 </a:solidFill>
                 <a:latin typeface="Calibri"/>
               </a:rPr>
-              <a:t>« Copier le dernier pointage » rattrape les jours manquants</a:t>
+              <a:t>Chaque engin mis à disposition est pointé comme une personne</a:t>
             </a:r>
           </a:p>
         </p:txBody>
@@ -12134,7 +12837,7 @@
       </p:sp>
       <p:pic>
         <p:nvPicPr>
-          <p:cNvPr id="7" name="Picture 6" descr="11-completer.png"/>
+          <p:cNvPr id="7" name="Picture 6" descr="15-materiel-pointage.png"/>
           <p:cNvPicPr>
             <a:picLocks noChangeAspect="1"/>
           </p:cNvPicPr>
@@ -12148,8 +12851,8 @@
         </p:blipFill>
         <p:spPr>
           <a:xfrm>
-            <a:off x="548640" y="1600200"/>
-            <a:ext cx="7589520" cy="4576034"/>
+            <a:off x="548640" y="1554480"/>
+            <a:ext cx="6675120" cy="4910064"/>
           </a:xfrm>
           <a:prstGeom prst="rect">
             <a:avLst/>
@@ -12169,8 +12872,8 @@
         </p:nvSpPr>
         <p:spPr>
           <a:xfrm>
-            <a:off x="8412480" y="1737360"/>
-            <a:ext cx="3383280" cy="4572000"/>
+            <a:off x="7498079" y="1737360"/>
+            <a:ext cx="4297680" cy="4572000"/>
           </a:xfrm>
           <a:prstGeom prst="rect">
             <a:avLst/>
@@ -12185,7 +12888,7 @@
           <a:p>
             <a:pPr>
               <a:spcAft>
-                <a:spcPts val="1200"/>
+                <a:spcPts val="1400"/>
               </a:spcAft>
             </a:pPr>
             <a:r>
@@ -12204,7 +12907,7 @@
                 </a:solidFill>
                 <a:latin typeface="Calibri"/>
               </a:rPr>
-              <a:t>Agents cochés</a:t>
+              <a:t>Camion 2,5 tonnes, rétrochargeur, véhicule 4x4</a:t>
             </a:r>
             <a:r>
               <a:rPr sz="1500">
@@ -12213,13 +12916,13 @@
                 </a:solidFill>
                 <a:latin typeface="Calibri"/>
               </a:rPr>
-              <a:t> — ou tous en une case</a:t>
+              <a:t> — créés avec leur immatriculation</a:t>
             </a:r>
           </a:p>
           <a:p>
             <a:pPr>
               <a:spcAft>
-                <a:spcPts val="1200"/>
+                <a:spcPts val="1400"/>
               </a:spcAft>
             </a:pPr>
             <a:r>
@@ -12238,7 +12941,7 @@
                 </a:solidFill>
                 <a:latin typeface="Calibri"/>
               </a:rPr>
-              <a:t>Dernier statut recopié</a:t>
+              <a:t>En service (T), à l'arrêt (R), en panne (ABS)</a:t>
             </a:r>
             <a:r>
               <a:rPr sz="1500">
@@ -12247,13 +12950,13 @@
                 </a:solidFill>
                 <a:latin typeface="Calibri"/>
               </a:rPr>
-              <a:t> — jusqu'à aujourd'hui</a:t>
+              <a:t> — même grille que le personnel</a:t>
             </a:r>
           </a:p>
           <a:p>
             <a:pPr>
               <a:spcAft>
-                <a:spcPts val="1200"/>
+                <a:spcPts val="1400"/>
               </a:spcAft>
             </a:pPr>
             <a:r>
@@ -12266,28 +12969,19 @@
               <a:t>● </a:t>
             </a:r>
             <a:r>
-              <a:rPr sz="1600" b="1">
-                <a:solidFill>
-                  <a:srgbClr val="0E4377"/>
-                </a:solidFill>
-                <a:latin typeface="Calibri"/>
-              </a:rPr>
-              <a:t>Résumé avant d'écrire</a:t>
-            </a:r>
-            <a:r>
-              <a:rPr sz="1500">
+              <a:rPr sz="1600" b="0">
                 <a:solidFill>
                   <a:srgbClr val="12263A"/>
                 </a:solidFill>
                 <a:latin typeface="Calibri"/>
               </a:rPr>
-              <a:t> — rien de caché</a:t>
+              <a:t>Repérés par le badge VH, sans compte de connexion</a:t>
             </a:r>
           </a:p>
           <a:p>
             <a:pPr>
               <a:spcAft>
-                <a:spcPts val="1200"/>
+                <a:spcPts val="1400"/>
               </a:spcAft>
             </a:pPr>
             <a:r>
@@ -12300,22 +12994,13 @@
               <a:t>● </a:t>
             </a:r>
             <a:r>
-              <a:rPr sz="1600" b="1">
-                <a:solidFill>
-                  <a:srgbClr val="0E4377"/>
-                </a:solidFill>
-                <a:latin typeface="Calibri"/>
-              </a:rPr>
-              <a:t>Jours déjà pointés</a:t>
-            </a:r>
-            <a:r>
-              <a:rPr sz="1500">
+              <a:rPr sz="1600" b="0">
                 <a:solidFill>
                   <a:srgbClr val="12263A"/>
                 </a:solidFill>
                 <a:latin typeface="Calibri"/>
               </a:rPr>
-              <a:t> — jamais remplacés</a:t>
+              <a:t>Le nombre d'engins suit le contrat : voyant complet / manque / dépassé</a:t>
             </a:r>
           </a:p>
         </p:txBody>
@@ -12455,7 +13140,7 @@
                 </a:solidFill>
                 <a:latin typeface="Calibri"/>
               </a:rPr>
-              <a:t>Voir loin : 3 mois, 6 mois, 1 an</a:t>
+              <a:t>Personnel et matériel, un seul attachement</a:t>
             </a:r>
           </a:p>
         </p:txBody>
@@ -12490,7 +13175,7 @@
                 </a:solidFill>
                 <a:latin typeface="Calibri"/>
               </a:rPr>
-              <a:t>Les départs, les reprises et les fêtes, en un coup d'œil</a:t>
+              <a:t>Les jours pointés de chaque engin deviennent des quantités et des montants</a:t>
             </a:r>
           </a:p>
         </p:txBody>
@@ -12532,7 +13217,7 @@
       </p:sp>
       <p:pic>
         <p:nvPicPr>
-          <p:cNvPr id="7" name="Picture 6" descr="14-vue-1-an.png"/>
+          <p:cNvPr id="7" name="Picture 6" descr="51-materiel-attachement.png"/>
           <p:cNvPicPr>
             <a:picLocks noChangeAspect="1"/>
           </p:cNvPicPr>
@@ -12547,7 +13232,7 @@
         <p:spPr>
           <a:xfrm>
             <a:off x="548640" y="1554480"/>
-            <a:ext cx="7863840" cy="4741432"/>
+            <a:ext cx="7223760" cy="3947599"/>
           </a:xfrm>
           <a:prstGeom prst="rect">
             <a:avLst/>
@@ -12567,8 +13252,8 @@
         </p:nvSpPr>
         <p:spPr>
           <a:xfrm>
-            <a:off x="8686800" y="1737360"/>
-            <a:ext cx="3200400" cy="4572000"/>
+            <a:off x="8046720" y="1737360"/>
+            <a:ext cx="3749039" cy="4572000"/>
           </a:xfrm>
           <a:prstGeom prst="rect">
             <a:avLst/>
@@ -12583,7 +13268,7 @@
           <a:p>
             <a:pPr>
               <a:spcAft>
-                <a:spcPts val="1200"/>
+                <a:spcPts val="1400"/>
               </a:spcAft>
             </a:pPr>
             <a:r>
@@ -12596,28 +13281,19 @@
               <a:t>● </a:t>
             </a:r>
             <a:r>
-              <a:rPr sz="1600" b="1">
-                <a:solidFill>
-                  <a:srgbClr val="0E4377"/>
-                </a:solidFill>
-                <a:latin typeface="Calibri"/>
-              </a:rPr>
-              <a:t>Jours fériés algériens</a:t>
-            </a:r>
-            <a:r>
-              <a:rPr sz="1500">
+              <a:rPr sz="1600" b="0">
                 <a:solidFill>
                   <a:srgbClr val="12263A"/>
                 </a:solidFill>
                 <a:latin typeface="Calibri"/>
               </a:rPr>
-              <a:t> — fêtes nationales et religieuses</a:t>
+              <a:t>Une ligne par fonction du bordereau : personnel et matériel</a:t>
             </a:r>
           </a:p>
           <a:p>
             <a:pPr>
               <a:spcAft>
-                <a:spcPts val="1200"/>
+                <a:spcPts val="1400"/>
               </a:spcAft>
             </a:pPr>
             <a:r>
@@ -12630,28 +13306,19 @@
               <a:t>● </a:t>
             </a:r>
             <a:r>
-              <a:rPr sz="1600" b="1">
-                <a:solidFill>
-                  <a:srgbClr val="0E4377"/>
-                </a:solidFill>
-                <a:latin typeface="Calibri"/>
-              </a:rPr>
-              <a:t>Jour courant</a:t>
-            </a:r>
-            <a:r>
-              <a:rPr sz="1500">
+              <a:rPr sz="1600" b="0">
                 <a:solidFill>
                   <a:srgbClr val="12263A"/>
                 </a:solidFill>
                 <a:latin typeface="Calibri"/>
               </a:rPr>
-              <a:t> — repéré, la grille s'y place</a:t>
+              <a:t>Quantité du mois = jours réellement pointés (modifiable)</a:t>
             </a:r>
           </a:p>
           <a:p>
             <a:pPr>
               <a:spcAft>
-                <a:spcPts val="1200"/>
+                <a:spcPts val="1400"/>
               </a:spcAft>
             </a:pPr>
             <a:r>
@@ -12664,28 +13331,19 @@
               <a:t>● </a:t>
             </a:r>
             <a:r>
-              <a:rPr sz="1600" b="1">
-                <a:solidFill>
-                  <a:srgbClr val="0E4377"/>
-                </a:solidFill>
-                <a:latin typeface="Calibri"/>
-              </a:rPr>
-              <a:t>Totaux T, CR, ABS</a:t>
-            </a:r>
-            <a:r>
-              <a:rPr sz="1500">
+              <a:rPr sz="1600" b="0">
                 <a:solidFill>
                   <a:srgbClr val="12263A"/>
                 </a:solidFill>
                 <a:latin typeface="Calibri"/>
               </a:rPr>
-              <a:t> — et solde cumulé</a:t>
+              <a:t>Prix unitaire du contrat, total HT calculé</a:t>
             </a:r>
           </a:p>
           <a:p>
             <a:pPr>
               <a:spcAft>
-                <a:spcPts val="1200"/>
+                <a:spcPts val="1400"/>
               </a:spcAft>
             </a:pPr>
             <a:r>
@@ -12698,22 +13356,13 @@
               <a:t>● </a:t>
             </a:r>
             <a:r>
-              <a:rPr sz="1600" b="1">
-                <a:solidFill>
-                  <a:srgbClr val="0E4377"/>
-                </a:solidFill>
-                <a:latin typeface="Calibri"/>
-              </a:rPr>
-              <a:t>Dates religieuses</a:t>
-            </a:r>
-            <a:r>
-              <a:rPr sz="1500">
+              <a:rPr sz="1600" b="0">
                 <a:solidFill>
                   <a:srgbClr val="12263A"/>
                 </a:solidFill>
                 <a:latin typeface="Calibri"/>
               </a:rPr>
-              <a:t> — corrigeables en 2 clics</a:t>
+              <a:t>Excel et PDF, puis la facture si le module est activé</a:t>
             </a:r>
           </a:p>
         </p:txBody>
@@ -12853,7 +13502,7 @@
                 </a:solidFill>
                 <a:latin typeface="Calibri"/>
               </a:rPr>
-              <a:t>L'agent sait toujours où il en est</a:t>
+              <a:t>Vous avez oublié de pointer ? Un bouton suffit</a:t>
             </a:r>
           </a:p>
         </p:txBody>
@@ -12888,7 +13537,7 @@
                 </a:solidFill>
                 <a:latin typeface="Calibri"/>
               </a:rPr>
-              <a:t>Plus besoin d'appeler pour demander son solde ou sa date de reprise</a:t>
+              <a:t>« Copier le dernier pointage » rattrape les jours manquants</a:t>
             </a:r>
           </a:p>
         </p:txBody>
@@ -12930,7 +13579,7 @@
       </p:sp>
       <p:pic>
         <p:nvPicPr>
-          <p:cNvPr id="7" name="Picture 6" descr="60-agent-accueil.png"/>
+          <p:cNvPr id="7" name="Picture 6" descr="11-completer.png"/>
           <p:cNvPicPr>
             <a:picLocks noChangeAspect="1"/>
           </p:cNvPicPr>
@@ -12945,7 +13594,7 @@
         <p:spPr>
           <a:xfrm>
             <a:off x="548640" y="1600200"/>
-            <a:ext cx="6766560" cy="4079837"/>
+            <a:ext cx="7589520" cy="4576034"/>
           </a:xfrm>
           <a:prstGeom prst="rect">
             <a:avLst/>
@@ -12957,45 +13606,16 @@
           </a:ln>
         </p:spPr>
       </p:pic>
-      <p:pic>
-        <p:nvPicPr>
-          <p:cNvPr id="8" name="Picture 7" descr="93-mobile.png"/>
-          <p:cNvPicPr>
-            <a:picLocks noChangeAspect="1"/>
-          </p:cNvPicPr>
-          <p:nvPr/>
-        </p:nvPicPr>
-        <p:blipFill>
-          <a:blip r:embed="rId3"/>
-          <a:stretch>
-            <a:fillRect/>
-          </a:stretch>
-        </p:blipFill>
-        <p:spPr>
-          <a:xfrm>
-            <a:off x="7680960" y="1463040"/>
-            <a:ext cx="2318004" cy="4754880"/>
-          </a:xfrm>
-          <a:prstGeom prst="rect">
-            <a:avLst/>
-          </a:prstGeom>
-          <a:ln w="9525">
-            <a:solidFill>
-              <a:srgbClr val="D0D7DE"/>
-            </a:solidFill>
-          </a:ln>
-        </p:spPr>
-      </p:pic>
-      <p:sp>
-        <p:nvSpPr>
-          <p:cNvPr id="9" name="TextBox 8"/>
+      <p:sp>
+        <p:nvSpPr>
+          <p:cNvPr id="8" name="TextBox 7"/>
           <p:cNvSpPr txBox="1"/>
           <p:nvPr/>
         </p:nvSpPr>
         <p:spPr>
           <a:xfrm>
-            <a:off x="10058400" y="2103120"/>
-            <a:ext cx="2011680" cy="2926080"/>
+            <a:off x="8412480" y="1737360"/>
+            <a:ext cx="3383280" cy="4572000"/>
           </a:xfrm>
           <a:prstGeom prst="rect">
             <a:avLst/>
@@ -13003,20 +13623,144 @@
           <a:noFill/>
         </p:spPr>
         <p:txBody>
-          <a:bodyPr wrap="square" anchor="t" lIns="45720" rIns="45720" tIns="27432" bIns="27432">
+          <a:bodyPr wrap="square">
             <a:spAutoFit/>
           </a:bodyPr>
           <a:lstStyle/>
           <a:p>
-            <a:pPr algn="l"/>
-            <a:r>
-              <a:rPr sz="1500" b="0" i="1">
+            <a:pPr>
+              <a:spcAft>
+                <a:spcPts val="1200"/>
+              </a:spcAft>
+            </a:pPr>
+            <a:r>
+              <a:rPr sz="1200">
+                <a:solidFill>
+                  <a:srgbClr val="2FB5B4"/>
+                </a:solidFill>
+                <a:latin typeface="Calibri"/>
+              </a:rPr>
+              <a:t>● </a:t>
+            </a:r>
+            <a:r>
+              <a:rPr sz="1600" b="1">
                 <a:solidFill>
                   <a:srgbClr val="0E4377"/>
                 </a:solidFill>
                 <a:latin typeface="Calibri"/>
               </a:rPr>
-              <a:t>« Le jour de votre départ, votre solde sera de +43 jours. »</a:t>
+              <a:t>Agents cochés</a:t>
+            </a:r>
+            <a:r>
+              <a:rPr sz="1500">
+                <a:solidFill>
+                  <a:srgbClr val="12263A"/>
+                </a:solidFill>
+                <a:latin typeface="Calibri"/>
+              </a:rPr>
+              <a:t> — ou tous en une case</a:t>
+            </a:r>
+          </a:p>
+          <a:p>
+            <a:pPr>
+              <a:spcAft>
+                <a:spcPts val="1200"/>
+              </a:spcAft>
+            </a:pPr>
+            <a:r>
+              <a:rPr sz="1200">
+                <a:solidFill>
+                  <a:srgbClr val="2FB5B4"/>
+                </a:solidFill>
+                <a:latin typeface="Calibri"/>
+              </a:rPr>
+              <a:t>● </a:t>
+            </a:r>
+            <a:r>
+              <a:rPr sz="1600" b="1">
+                <a:solidFill>
+                  <a:srgbClr val="0E4377"/>
+                </a:solidFill>
+                <a:latin typeface="Calibri"/>
+              </a:rPr>
+              <a:t>Dernier statut recopié</a:t>
+            </a:r>
+            <a:r>
+              <a:rPr sz="1500">
+                <a:solidFill>
+                  <a:srgbClr val="12263A"/>
+                </a:solidFill>
+                <a:latin typeface="Calibri"/>
+              </a:rPr>
+              <a:t> — jusqu'à aujourd'hui</a:t>
+            </a:r>
+          </a:p>
+          <a:p>
+            <a:pPr>
+              <a:spcAft>
+                <a:spcPts val="1200"/>
+              </a:spcAft>
+            </a:pPr>
+            <a:r>
+              <a:rPr sz="1200">
+                <a:solidFill>
+                  <a:srgbClr val="2FB5B4"/>
+                </a:solidFill>
+                <a:latin typeface="Calibri"/>
+              </a:rPr>
+              <a:t>● </a:t>
+            </a:r>
+            <a:r>
+              <a:rPr sz="1600" b="1">
+                <a:solidFill>
+                  <a:srgbClr val="0E4377"/>
+                </a:solidFill>
+                <a:latin typeface="Calibri"/>
+              </a:rPr>
+              <a:t>Résumé avant d'écrire</a:t>
+            </a:r>
+            <a:r>
+              <a:rPr sz="1500">
+                <a:solidFill>
+                  <a:srgbClr val="12263A"/>
+                </a:solidFill>
+                <a:latin typeface="Calibri"/>
+              </a:rPr>
+              <a:t> — rien de caché</a:t>
+            </a:r>
+          </a:p>
+          <a:p>
+            <a:pPr>
+              <a:spcAft>
+                <a:spcPts val="1200"/>
+              </a:spcAft>
+            </a:pPr>
+            <a:r>
+              <a:rPr sz="1200">
+                <a:solidFill>
+                  <a:srgbClr val="2FB5B4"/>
+                </a:solidFill>
+                <a:latin typeface="Calibri"/>
+              </a:rPr>
+              <a:t>● </a:t>
+            </a:r>
+            <a:r>
+              <a:rPr sz="1600" b="1">
+                <a:solidFill>
+                  <a:srgbClr val="0E4377"/>
+                </a:solidFill>
+                <a:latin typeface="Calibri"/>
+              </a:rPr>
+              <a:t>Jours déjà pointés</a:t>
+            </a:r>
+            <a:r>
+              <a:rPr sz="1500">
+                <a:solidFill>
+                  <a:srgbClr val="12263A"/>
+                </a:solidFill>
+                <a:latin typeface="Calibri"/>
+              </a:rPr>
+              <a:t> — jamais remplacés</a:t>
             </a:r>
           </a:p>
         </p:txBody>

--- a/docs/Sijil-Presentation.pptx
+++ b/docs/Sijil-Presentation.pptx
@@ -3389,7 +3389,7 @@
                 </a:solidFill>
                 <a:latin typeface="Calibri"/>
               </a:rPr>
-              <a:t>Version 3.41.0 · Octobre 2026 · Captures : entreprise fictive</a:t>
+              <a:t>Version 3.42.0 · Octobre 2026 · Captures : entreprise fictive</a:t>
             </a:r>
           </a:p>
         </p:txBody>
